--- a/docs/prezentacja.pptx
+++ b/docs/prezentacja.pptx
@@ -17,6 +17,21 @@
     <p:sldId id="265" r:id="rId16"/>
     <p:sldId id="266" r:id="rId17"/>
     <p:sldId id="267" r:id="rId18"/>
+    <p:sldId id="268" r:id="rId19"/>
+    <p:sldId id="269" r:id="rId20"/>
+    <p:sldId id="270" r:id="rId21"/>
+    <p:sldId id="271" r:id="rId22"/>
+    <p:sldId id="272" r:id="rId23"/>
+    <p:sldId id="273" r:id="rId24"/>
+    <p:sldId id="274" r:id="rId25"/>
+    <p:sldId id="275" r:id="rId26"/>
+    <p:sldId id="276" r:id="rId27"/>
+    <p:sldId id="277" r:id="rId28"/>
+    <p:sldId id="278" r:id="rId29"/>
+    <p:sldId id="279" r:id="rId30"/>
+    <p:sldId id="280" r:id="rId31"/>
+    <p:sldId id="281" r:id="rId32"/>
+    <p:sldId id="282" r:id="rId33"/>
   </p:sldIdLst>
   <p:sldSz cx="12191695" cy="6858000" type="screen4x3"/>
   <p:notesSz cx="6858000" cy="9144000"/>
@@ -3144,14 +3159,57 @@
       </p:sp>
       <p:sp>
         <p:nvSpPr>
-          <p:cNvPr id="3" name="TextBox 2"/>
-          <p:cNvSpPr txBox="1"/>
-          <p:nvPr/>
-        </p:nvSpPr>
-        <p:spPr>
-          <a:xfrm>
-            <a:off x="731520" y="1463040"/>
-            <a:ext cx="10515600" cy="1097280"/>
+          <p:cNvPr id="3" name="Rectangle 2"/>
+          <p:cNvSpPr/>
+          <p:nvPr/>
+        </p:nvSpPr>
+        <p:spPr>
+          <a:xfrm>
+            <a:off x="0" y="5303520"/>
+            <a:ext cx="12191695" cy="1554480"/>
+          </a:xfrm>
+          <a:prstGeom prst="rect">
+            <a:avLst/>
+          </a:prstGeom>
+          <a:solidFill>
+            <a:srgbClr val="2E7D32"/>
+          </a:solidFill>
+          <a:ln>
+            <a:noFill/>
+          </a:ln>
+        </p:spPr>
+        <p:style>
+          <a:lnRef idx="1">
+            <a:schemeClr val="accent1"/>
+          </a:lnRef>
+          <a:fillRef idx="3">
+            <a:schemeClr val="accent1"/>
+          </a:fillRef>
+          <a:effectRef idx="2">
+            <a:schemeClr val="accent1"/>
+          </a:effectRef>
+          <a:fontRef idx="minor">
+            <a:schemeClr val="lt1"/>
+          </a:fontRef>
+        </p:style>
+        <p:txBody>
+          <a:bodyPr rtlCol="0" anchor="ctr"/>
+          <a:lstStyle/>
+          <a:p>
+            <a:pPr algn="ctr"/>
+          </a:p>
+        </p:txBody>
+      </p:sp>
+      <p:sp>
+        <p:nvSpPr>
+          <p:cNvPr id="4" name="TextBox 3"/>
+          <p:cNvSpPr txBox="1"/>
+          <p:nvPr/>
+        </p:nvSpPr>
+        <p:spPr>
+          <a:xfrm>
+            <a:off x="822960" y="1280160"/>
+            <a:ext cx="10515600" cy="1280160"/>
           </a:xfrm>
           <a:prstGeom prst="rect">
             <a:avLst/>
@@ -3164,8 +3222,8 @@
           </a:bodyPr>
           <a:lstStyle/>
           <a:p>
-            <a:pPr algn="ctr">
-              <a:defRPr sz="3200" b="1">
+            <a:pPr algn="l">
+              <a:defRPr sz="3400" b="1">
                 <a:solidFill>
                   <a:srgbClr val="FFFFFF"/>
                 </a:solidFill>
@@ -3179,13 +3237,13 @@
       </p:sp>
       <p:sp>
         <p:nvSpPr>
-          <p:cNvPr id="4" name="TextBox 3"/>
-          <p:cNvSpPr txBox="1"/>
-          <p:nvPr/>
-        </p:nvSpPr>
-        <p:spPr>
-          <a:xfrm>
-            <a:off x="731520" y="2651760"/>
+          <p:cNvPr id="5" name="TextBox 4"/>
+          <p:cNvSpPr txBox="1"/>
+          <p:nvPr/>
+        </p:nvSpPr>
+        <p:spPr>
+          <a:xfrm>
+            <a:off x="822960" y="2606040"/>
             <a:ext cx="10515600" cy="548640"/>
           </a:xfrm>
           <a:prstGeom prst="rect">
@@ -3199,29 +3257,29 @@
           </a:bodyPr>
           <a:lstStyle/>
           <a:p>
-            <a:pPr algn="ctr">
-              <a:defRPr sz="2000" b="0">
+            <a:pPr algn="l">
+              <a:defRPr sz="1800" b="0">
                 <a:solidFill>
                   <a:srgbClr val="FFFFFF"/>
                 </a:solidFill>
               </a:defRPr>
             </a:pPr>
             <a:r>
-              <a:t>Analiza i wizualizacja danych – Pandas, DataFrame</a:t>
-            </a:r>
-          </a:p>
-        </p:txBody>
-      </p:sp>
-      <p:sp>
-        <p:nvSpPr>
-          <p:cNvPr id="5" name="TextBox 4"/>
-          <p:cNvSpPr txBox="1"/>
-          <p:nvPr/>
-        </p:nvSpPr>
-        <p:spPr>
-          <a:xfrm>
-            <a:off x="731520" y="3383280"/>
-            <a:ext cx="10515600" cy="457200"/>
+              <a:t>Analiza szeregów czasowych na publicznym zbiorze danych (2015–2018)</a:t>
+            </a:r>
+          </a:p>
+        </p:txBody>
+      </p:sp>
+      <p:sp>
+        <p:nvSpPr>
+          <p:cNvPr id="6" name="TextBox 5"/>
+          <p:cNvSpPr txBox="1"/>
+          <p:nvPr/>
+        </p:nvSpPr>
+        <p:spPr>
+          <a:xfrm>
+            <a:off x="822960" y="5532120"/>
+            <a:ext cx="10515600" cy="411480"/>
           </a:xfrm>
           <a:prstGeom prst="rect">
             <a:avLst/>
@@ -3234,7 +3292,7 @@
           </a:bodyPr>
           <a:lstStyle/>
           <a:p>
-            <a:pPr algn="ctr">
+            <a:pPr algn="l">
               <a:defRPr sz="1400" b="0">
                 <a:solidFill>
                   <a:srgbClr val="FFFFFF"/>
@@ -3242,20 +3300,20 @@
               </a:defRPr>
             </a:pPr>
             <a:r>
-              <a:t>Dawid Hetmańczyk (126674)  |  Bartosz Bugla (180737)</a:t>
-            </a:r>
-          </a:p>
-        </p:txBody>
-      </p:sp>
-      <p:sp>
-        <p:nvSpPr>
-          <p:cNvPr id="6" name="TextBox 5"/>
-          <p:cNvSpPr txBox="1"/>
-          <p:nvPr/>
-        </p:nvSpPr>
-        <p:spPr>
-          <a:xfrm>
-            <a:off x="731520" y="4023360"/>
+              <a:t>Dawid Hetmańczyk (album 126674)  •  Bartosz Bugla (album 180737)</a:t>
+            </a:r>
+          </a:p>
+        </p:txBody>
+      </p:sp>
+      <p:sp>
+        <p:nvSpPr>
+          <p:cNvPr id="7" name="TextBox 6"/>
+          <p:cNvSpPr txBox="1"/>
+          <p:nvPr/>
+        </p:nvSpPr>
+        <p:spPr>
+          <a:xfrm>
+            <a:off x="822960" y="5989320"/>
             <a:ext cx="10515600" cy="365760"/>
           </a:xfrm>
           <a:prstGeom prst="rect">
@@ -3269,7 +3327,7 @@
           </a:bodyPr>
           <a:lstStyle/>
           <a:p>
-            <a:pPr algn="ctr">
+            <a:pPr algn="l">
               <a:defRPr sz="1300" b="0">
                 <a:solidFill>
                   <a:srgbClr val="FFFFFF"/>
@@ -3277,7 +3335,7 @@
               </a:defRPr>
             </a:pPr>
             <a:r>
-              <a:t>Merito Chorzów  •  2025/2026  •  semestr 3 (letni)</a:t>
+              <a:t>Merito Chorzów  |  2025/2026  |  semestr 3 (letni)</a:t>
             </a:r>
           </a:p>
         </p:txBody>
@@ -3309,13 +3367,13 @@
         <p:spPr>
           <a:xfrm>
             <a:off x="0" y="0"/>
-            <a:ext cx="12191695" cy="960120"/>
+            <a:ext cx="12191695" cy="6858000"/>
           </a:xfrm>
           <a:prstGeom prst="rect">
             <a:avLst/>
           </a:prstGeom>
           <a:solidFill>
-            <a:srgbClr val="1565C0"/>
+            <a:srgbClr val="263238"/>
           </a:solidFill>
           <a:ln>
             <a:noFill/>
@@ -3351,8 +3409,8 @@
         </p:nvSpPr>
         <p:spPr>
           <a:xfrm>
-            <a:off x="502920" y="201168"/>
-            <a:ext cx="10972800" cy="502920"/>
+            <a:off x="822960" y="2011680"/>
+            <a:ext cx="1828800" cy="1097280"/>
           </a:xfrm>
           <a:prstGeom prst="rect">
             <a:avLst/>
@@ -3366,73 +3424,162 @@
           <a:lstStyle/>
           <a:p>
             <a:pPr algn="l">
-              <a:defRPr sz="2400" b="1">
+              <a:defRPr sz="7200" b="1">
+                <a:solidFill>
+                  <a:srgbClr val="2E7D32"/>
+                </a:solidFill>
+              </a:defRPr>
+            </a:pPr>
+            <a:r>
+              <a:t>03</a:t>
+            </a:r>
+          </a:p>
+        </p:txBody>
+      </p:sp>
+      <p:sp>
+        <p:nvSpPr>
+          <p:cNvPr id="4" name="TextBox 3"/>
+          <p:cNvSpPr txBox="1"/>
+          <p:nvPr/>
+        </p:nvSpPr>
+        <p:spPr>
+          <a:xfrm>
+            <a:off x="822960" y="3200400"/>
+            <a:ext cx="10058400" cy="914400"/>
+          </a:xfrm>
+          <a:prstGeom prst="rect">
+            <a:avLst/>
+          </a:prstGeom>
+          <a:noFill/>
+        </p:spPr>
+        <p:txBody>
+          <a:bodyPr wrap="square">
+            <a:spAutoFit/>
+          </a:bodyPr>
+          <a:lstStyle/>
+          <a:p>
+            <a:pPr algn="l">
+              <a:defRPr sz="3600" b="1">
                 <a:solidFill>
                   <a:srgbClr val="FFFFFF"/>
                 </a:solidFill>
               </a:defRPr>
             </a:pPr>
             <a:r>
-              <a:t>Prognoza zużycia (regresja liniowa)</a:t>
-            </a:r>
-          </a:p>
-        </p:txBody>
-      </p:sp>
-      <p:pic>
-        <p:nvPicPr>
-          <p:cNvPr id="4" name="Picture 3" descr="05_prognoza.png"/>
-          <p:cNvPicPr>
-            <a:picLocks noChangeAspect="1"/>
-          </p:cNvPicPr>
-          <p:nvPr/>
-        </p:nvPicPr>
-        <p:blipFill>
-          <a:blip r:embed="rId2"/>
-          <a:stretch>
-            <a:fillRect/>
-          </a:stretch>
-        </p:blipFill>
-        <p:spPr>
-          <a:xfrm>
-            <a:off x="594360" y="1051560"/>
-            <a:ext cx="10972800" cy="3718447"/>
-          </a:xfrm>
-          <a:prstGeom prst="rect">
-            <a:avLst/>
-          </a:prstGeom>
-        </p:spPr>
-      </p:pic>
-      <p:sp>
-        <p:nvSpPr>
-          <p:cNvPr id="5" name="TextBox 4"/>
-          <p:cNvSpPr txBox="1"/>
-          <p:nvPr/>
-        </p:nvSpPr>
-        <p:spPr>
-          <a:xfrm>
-            <a:off x="594360" y="6263640"/>
-            <a:ext cx="10972800" cy="320040"/>
-          </a:xfrm>
-          <a:prstGeom prst="rect">
-            <a:avLst/>
-          </a:prstGeom>
-          <a:noFill/>
-        </p:spPr>
-        <p:txBody>
-          <a:bodyPr wrap="square">
-            <a:spAutoFit/>
-          </a:bodyPr>
-          <a:lstStyle/>
-          <a:p>
-            <a:pPr algn="ctr">
-              <a:defRPr sz="1100" b="0">
+              <a:t>Analiza wizualna</a:t>
+            </a:r>
+          </a:p>
+        </p:txBody>
+      </p:sp>
+      <p:sp>
+        <p:nvSpPr>
+          <p:cNvPr id="5" name="Rectangle 4"/>
+          <p:cNvSpPr/>
+          <p:nvPr/>
+        </p:nvSpPr>
+        <p:spPr>
+          <a:xfrm>
+            <a:off x="0" y="6537960"/>
+            <a:ext cx="12191695" cy="320040"/>
+          </a:xfrm>
+          <a:prstGeom prst="rect">
+            <a:avLst/>
+          </a:prstGeom>
+          <a:solidFill>
+            <a:srgbClr val="ECEFF1"/>
+          </a:solidFill>
+          <a:ln>
+            <a:noFill/>
+          </a:ln>
+        </p:spPr>
+        <p:style>
+          <a:lnRef idx="1">
+            <a:schemeClr val="accent1"/>
+          </a:lnRef>
+          <a:fillRef idx="3">
+            <a:schemeClr val="accent1"/>
+          </a:fillRef>
+          <a:effectRef idx="2">
+            <a:schemeClr val="accent1"/>
+          </a:effectRef>
+          <a:fontRef idx="minor">
+            <a:schemeClr val="lt1"/>
+          </a:fontRef>
+        </p:style>
+        <p:txBody>
+          <a:bodyPr rtlCol="0" anchor="ctr"/>
+          <a:lstStyle/>
+          <a:p>
+            <a:pPr algn="ctr"/>
+          </a:p>
+        </p:txBody>
+      </p:sp>
+      <p:sp>
+        <p:nvSpPr>
+          <p:cNvPr id="6" name="TextBox 5"/>
+          <p:cNvSpPr txBox="1"/>
+          <p:nvPr/>
+        </p:nvSpPr>
+        <p:spPr>
+          <a:xfrm>
+            <a:off x="457200" y="6565392"/>
+            <a:ext cx="7315200" cy="256032"/>
+          </a:xfrm>
+          <a:prstGeom prst="rect">
+            <a:avLst/>
+          </a:prstGeom>
+          <a:noFill/>
+        </p:spPr>
+        <p:txBody>
+          <a:bodyPr wrap="none">
+            <a:spAutoFit/>
+          </a:bodyPr>
+          <a:lstStyle/>
+          <a:p>
+            <a:pPr>
+              <a:defRPr sz="900">
                 <a:solidFill>
                   <a:srgbClr val="607D8B"/>
                 </a:solidFill>
               </a:defRPr>
             </a:pPr>
             <a:r>
-              <a:t>MAE ≈ 3,384 MW  |  MAPE ≈ 11.7% na danych 2018</a:t>
+              <a:t>Analiza i wizualizacja danych – Pandas, DataFrame  •  Merito Chorzów</a:t>
+            </a:r>
+          </a:p>
+        </p:txBody>
+      </p:sp>
+      <p:sp>
+        <p:nvSpPr>
+          <p:cNvPr id="7" name="TextBox 6"/>
+          <p:cNvSpPr txBox="1"/>
+          <p:nvPr/>
+        </p:nvSpPr>
+        <p:spPr>
+          <a:xfrm>
+            <a:off x="11094415" y="6565392"/>
+            <a:ext cx="731520" cy="256032"/>
+          </a:xfrm>
+          <a:prstGeom prst="rect">
+            <a:avLst/>
+          </a:prstGeom>
+          <a:noFill/>
+        </p:spPr>
+        <p:txBody>
+          <a:bodyPr wrap="none">
+            <a:spAutoFit/>
+          </a:bodyPr>
+          <a:lstStyle/>
+          <a:p>
+            <a:pPr algn="r">
+              <a:defRPr sz="900">
+                <a:solidFill>
+                  <a:srgbClr val="607D8B"/>
+                </a:solidFill>
+              </a:defRPr>
+            </a:pPr>
+            <a:r>
+              <a:t>9</a:t>
             </a:r>
           </a:p>
         </p:txBody>
@@ -3506,12 +3653,114 @@
         </p:nvSpPr>
         <p:spPr>
           <a:xfrm>
-            <a:off x="502920" y="201168"/>
+            <a:off x="502920" y="182880"/>
+            <a:ext cx="10972800" cy="640080"/>
+          </a:xfrm>
+          <a:prstGeom prst="rect">
+            <a:avLst/>
+          </a:prstGeom>
+          <a:noFill/>
+        </p:spPr>
+        <p:txBody>
+          <a:bodyPr wrap="none">
+            <a:spAutoFit/>
+          </a:bodyPr>
+          <a:lstStyle/>
+          <a:p>
+            <a:pPr>
+              <a:defRPr sz="2800" b="1">
+                <a:solidFill>
+                  <a:srgbClr val="FFFFFF"/>
+                </a:solidFill>
+              </a:defRPr>
+            </a:pPr>
+            <a:r>
+              <a:t>Zużycie energii w czasie</a:t>
+            </a:r>
+          </a:p>
+        </p:txBody>
+      </p:sp>
+      <p:pic>
+        <p:nvPicPr>
+          <p:cNvPr id="4" name="Picture 3" descr="01_zuzycie_czas.png"/>
+          <p:cNvPicPr>
+            <a:picLocks noChangeAspect="1"/>
+          </p:cNvPicPr>
+          <p:nvPr/>
+        </p:nvPicPr>
+        <p:blipFill>
+          <a:blip r:embed="rId2"/>
+          <a:stretch>
+            <a:fillRect/>
+          </a:stretch>
+        </p:blipFill>
+        <p:spPr>
+          <a:xfrm>
+            <a:off x="594360" y="1097280"/>
+            <a:ext cx="10972800" cy="3702479"/>
+          </a:xfrm>
+          <a:prstGeom prst="rect">
+            <a:avLst/>
+          </a:prstGeom>
+        </p:spPr>
+      </p:pic>
+      <p:sp>
+        <p:nvSpPr>
+          <p:cNvPr id="5" name="Rectangle 4"/>
+          <p:cNvSpPr/>
+          <p:nvPr/>
+        </p:nvSpPr>
+        <p:spPr>
+          <a:xfrm>
+            <a:off x="594360" y="5989320"/>
             <a:ext cx="10972800" cy="502920"/>
           </a:xfrm>
           <a:prstGeom prst="rect">
             <a:avLst/>
           </a:prstGeom>
+          <a:solidFill>
+            <a:srgbClr val="ECEFF1"/>
+          </a:solidFill>
+          <a:ln>
+            <a:noFill/>
+          </a:ln>
+        </p:spPr>
+        <p:style>
+          <a:lnRef idx="1">
+            <a:schemeClr val="accent1"/>
+          </a:lnRef>
+          <a:fillRef idx="3">
+            <a:schemeClr val="accent1"/>
+          </a:fillRef>
+          <a:effectRef idx="2">
+            <a:schemeClr val="accent1"/>
+          </a:effectRef>
+          <a:fontRef idx="minor">
+            <a:schemeClr val="lt1"/>
+          </a:fontRef>
+        </p:style>
+        <p:txBody>
+          <a:bodyPr rtlCol="0" anchor="ctr"/>
+          <a:lstStyle/>
+          <a:p>
+            <a:pPr algn="ctr"/>
+          </a:p>
+        </p:txBody>
+      </p:sp>
+      <p:sp>
+        <p:nvSpPr>
+          <p:cNvPr id="6" name="TextBox 5"/>
+          <p:cNvSpPr txBox="1"/>
+          <p:nvPr/>
+        </p:nvSpPr>
+        <p:spPr>
+          <a:xfrm>
+            <a:off x="777240" y="6053328"/>
+            <a:ext cx="10607040" cy="411480"/>
+          </a:xfrm>
+          <a:prstGeom prst="rect">
+            <a:avLst/>
+          </a:prstGeom>
           <a:noFill/>
         </p:spPr>
         <p:txBody>
@@ -3520,155 +3769,128 @@
           </a:bodyPr>
           <a:lstStyle/>
           <a:p>
-            <a:pPr algn="l">
-              <a:defRPr sz="2600" b="1">
-                <a:solidFill>
-                  <a:srgbClr val="FFFFFF"/>
-                </a:solidFill>
-              </a:defRPr>
-            </a:pPr>
-            <a:r>
-              <a:t>Wnioski</a:t>
-            </a:r>
-          </a:p>
-        </p:txBody>
-      </p:sp>
-      <p:sp>
-        <p:nvSpPr>
-          <p:cNvPr id="4" name="TextBox 3"/>
-          <p:cNvSpPr txBox="1"/>
-          <p:nvPr/>
-        </p:nvSpPr>
-        <p:spPr>
-          <a:xfrm>
-            <a:off x="777240" y="1143000"/>
-            <a:ext cx="10515600" cy="502920"/>
-          </a:xfrm>
-          <a:prstGeom prst="rect">
-            <a:avLst/>
-          </a:prstGeom>
-          <a:noFill/>
-        </p:spPr>
-        <p:txBody>
-          <a:bodyPr wrap="square">
-            <a:spAutoFit/>
-          </a:bodyPr>
-          <a:lstStyle/>
-          <a:p>
-            <a:pPr algn="l">
-              <a:defRPr sz="1700" b="0">
+            <a:pPr algn="ctr">
+              <a:defRPr sz="1200" b="0">
                 <a:solidFill>
                   <a:srgbClr val="263238"/>
                 </a:solidFill>
               </a:defRPr>
             </a:pPr>
             <a:r>
-              <a:t>•  Silna sezonowość i cykl tygodniowy zużycia energii</a:t>
-            </a:r>
-          </a:p>
-        </p:txBody>
-      </p:sp>
-      <p:sp>
-        <p:nvSpPr>
-          <p:cNvPr id="5" name="TextBox 4"/>
-          <p:cNvSpPr txBox="1"/>
-          <p:nvPr/>
-        </p:nvSpPr>
-        <p:spPr>
-          <a:xfrm>
-            <a:off x="777240" y="1618488"/>
-            <a:ext cx="10515600" cy="502920"/>
-          </a:xfrm>
-          <a:prstGeom prst="rect">
-            <a:avLst/>
-          </a:prstGeom>
-          <a:noFill/>
-        </p:spPr>
-        <p:txBody>
-          <a:bodyPr wrap="square">
-            <a:spAutoFit/>
-          </a:bodyPr>
-          <a:lstStyle/>
-          <a:p>
-            <a:pPr algn="l">
-              <a:defRPr sz="1700" b="0">
-                <a:solidFill>
-                  <a:srgbClr val="263238"/>
-                </a:solidFill>
-              </a:defRPr>
-            </a:pPr>
-            <a:r>
-              <a:t>•  OZE i paliwa kopalne uzupełniają się sezonowo</a:t>
-            </a:r>
-          </a:p>
-        </p:txBody>
-      </p:sp>
-      <p:sp>
-        <p:nvSpPr>
-          <p:cNvPr id="6" name="TextBox 5"/>
-          <p:cNvSpPr txBox="1"/>
-          <p:nvPr/>
-        </p:nvSpPr>
-        <p:spPr>
-          <a:xfrm>
-            <a:off x="777240" y="2093976"/>
-            <a:ext cx="10515600" cy="502920"/>
-          </a:xfrm>
-          <a:prstGeom prst="rect">
-            <a:avLst/>
-          </a:prstGeom>
-          <a:noFill/>
-        </p:spPr>
-        <p:txBody>
-          <a:bodyPr wrap="square">
-            <a:spAutoFit/>
-          </a:bodyPr>
-          <a:lstStyle/>
-          <a:p>
-            <a:pPr algn="l">
-              <a:defRPr sz="1700" b="0">
-                <a:solidFill>
-                  <a:srgbClr val="263238"/>
-                </a:solidFill>
-              </a:defRPr>
-            </a:pPr>
-            <a:r>
-              <a:t>•  Model baseline (5 cech) osiąga MAPE ≈ 11.7%</a:t>
-            </a:r>
-          </a:p>
-        </p:txBody>
-      </p:sp>
-      <p:sp>
-        <p:nvSpPr>
-          <p:cNvPr id="7" name="TextBox 6"/>
-          <p:cNvSpPr txBox="1"/>
-          <p:nvPr/>
-        </p:nvSpPr>
-        <p:spPr>
-          <a:xfrm>
-            <a:off x="777240" y="2569464"/>
-            <a:ext cx="10515600" cy="502920"/>
-          </a:xfrm>
-          <a:prstGeom prst="rect">
-            <a:avLst/>
-          </a:prstGeom>
-          <a:noFill/>
-        </p:spPr>
-        <p:txBody>
-          <a:bodyPr wrap="square">
-            <a:spAutoFit/>
-          </a:bodyPr>
-          <a:lstStyle/>
-          <a:p>
-            <a:pPr algn="l">
-              <a:defRPr sz="1700" b="0">
-                <a:solidFill>
-                  <a:srgbClr val="263238"/>
-                </a:solidFill>
-              </a:defRPr>
-            </a:pPr>
-            <a:r>
-              <a:t>•  Temperatura i pora dnia to kluczowe predyktory</a:t>
+              <a:t>Wyraźna sezonowość roczna — wyższe zużycie zimą i latem (ogrzewanie / klimatyzacja).</a:t>
+            </a:r>
+          </a:p>
+        </p:txBody>
+      </p:sp>
+      <p:sp>
+        <p:nvSpPr>
+          <p:cNvPr id="7" name="Rectangle 6"/>
+          <p:cNvSpPr/>
+          <p:nvPr/>
+        </p:nvSpPr>
+        <p:spPr>
+          <a:xfrm>
+            <a:off x="0" y="6537960"/>
+            <a:ext cx="12191695" cy="320040"/>
+          </a:xfrm>
+          <a:prstGeom prst="rect">
+            <a:avLst/>
+          </a:prstGeom>
+          <a:solidFill>
+            <a:srgbClr val="ECEFF1"/>
+          </a:solidFill>
+          <a:ln>
+            <a:noFill/>
+          </a:ln>
+        </p:spPr>
+        <p:style>
+          <a:lnRef idx="1">
+            <a:schemeClr val="accent1"/>
+          </a:lnRef>
+          <a:fillRef idx="3">
+            <a:schemeClr val="accent1"/>
+          </a:fillRef>
+          <a:effectRef idx="2">
+            <a:schemeClr val="accent1"/>
+          </a:effectRef>
+          <a:fontRef idx="minor">
+            <a:schemeClr val="lt1"/>
+          </a:fontRef>
+        </p:style>
+        <p:txBody>
+          <a:bodyPr rtlCol="0" anchor="ctr"/>
+          <a:lstStyle/>
+          <a:p>
+            <a:pPr algn="ctr"/>
+          </a:p>
+        </p:txBody>
+      </p:sp>
+      <p:sp>
+        <p:nvSpPr>
+          <p:cNvPr id="8" name="TextBox 7"/>
+          <p:cNvSpPr txBox="1"/>
+          <p:nvPr/>
+        </p:nvSpPr>
+        <p:spPr>
+          <a:xfrm>
+            <a:off x="457200" y="6565392"/>
+            <a:ext cx="7315200" cy="256032"/>
+          </a:xfrm>
+          <a:prstGeom prst="rect">
+            <a:avLst/>
+          </a:prstGeom>
+          <a:noFill/>
+        </p:spPr>
+        <p:txBody>
+          <a:bodyPr wrap="none">
+            <a:spAutoFit/>
+          </a:bodyPr>
+          <a:lstStyle/>
+          <a:p>
+            <a:pPr>
+              <a:defRPr sz="900">
+                <a:solidFill>
+                  <a:srgbClr val="607D8B"/>
+                </a:solidFill>
+              </a:defRPr>
+            </a:pPr>
+            <a:r>
+              <a:t>Analiza i wizualizacja danych – Pandas, DataFrame  •  Merito Chorzów</a:t>
+            </a:r>
+          </a:p>
+        </p:txBody>
+      </p:sp>
+      <p:sp>
+        <p:nvSpPr>
+          <p:cNvPr id="9" name="TextBox 8"/>
+          <p:cNvSpPr txBox="1"/>
+          <p:nvPr/>
+        </p:nvSpPr>
+        <p:spPr>
+          <a:xfrm>
+            <a:off x="11094415" y="6565392"/>
+            <a:ext cx="731520" cy="256032"/>
+          </a:xfrm>
+          <a:prstGeom prst="rect">
+            <a:avLst/>
+          </a:prstGeom>
+          <a:noFill/>
+        </p:spPr>
+        <p:txBody>
+          <a:bodyPr wrap="none">
+            <a:spAutoFit/>
+          </a:bodyPr>
+          <a:lstStyle/>
+          <a:p>
+            <a:pPr algn="r">
+              <a:defRPr sz="900">
+                <a:solidFill>
+                  <a:srgbClr val="607D8B"/>
+                </a:solidFill>
+              </a:defRPr>
+            </a:pPr>
+            <a:r>
+              <a:t>10</a:t>
             </a:r>
           </a:p>
         </p:txBody>
@@ -3700,13 +3922,13 @@
         <p:spPr>
           <a:xfrm>
             <a:off x="0" y="0"/>
-            <a:ext cx="12191695" cy="6858000"/>
+            <a:ext cx="12191695" cy="960120"/>
           </a:xfrm>
           <a:prstGeom prst="rect">
             <a:avLst/>
           </a:prstGeom>
           <a:solidFill>
-            <a:srgbClr val="2E7D32"/>
+            <a:srgbClr val="1565C0"/>
           </a:solidFill>
           <a:ln>
             <a:noFill/>
@@ -3742,7 +3964,1359 @@
         </p:nvSpPr>
         <p:spPr>
           <a:xfrm>
-            <a:off x="914400" y="2560320"/>
+            <a:off x="502920" y="182880"/>
+            <a:ext cx="10972800" cy="640080"/>
+          </a:xfrm>
+          <a:prstGeom prst="rect">
+            <a:avLst/>
+          </a:prstGeom>
+          <a:noFill/>
+        </p:spPr>
+        <p:txBody>
+          <a:bodyPr wrap="none">
+            <a:spAutoFit/>
+          </a:bodyPr>
+          <a:lstStyle/>
+          <a:p>
+            <a:pPr>
+              <a:defRPr sz="2800" b="1">
+                <a:solidFill>
+                  <a:srgbClr val="FFFFFF"/>
+                </a:solidFill>
+              </a:defRPr>
+            </a:pPr>
+            <a:r>
+              <a:t>Profil dobowy</a:t>
+            </a:r>
+          </a:p>
+        </p:txBody>
+      </p:sp>
+      <p:pic>
+        <p:nvPicPr>
+          <p:cNvPr id="4" name="Picture 3" descr="02_profil_dobowy.png"/>
+          <p:cNvPicPr>
+            <a:picLocks noChangeAspect="1"/>
+          </p:cNvPicPr>
+          <p:nvPr/>
+        </p:nvPicPr>
+        <p:blipFill>
+          <a:blip r:embed="rId2"/>
+          <a:stretch>
+            <a:fillRect/>
+          </a:stretch>
+        </p:blipFill>
+        <p:spPr>
+          <a:xfrm>
+            <a:off x="594360" y="1097280"/>
+            <a:ext cx="10972800" cy="5403898"/>
+          </a:xfrm>
+          <a:prstGeom prst="rect">
+            <a:avLst/>
+          </a:prstGeom>
+        </p:spPr>
+      </p:pic>
+      <p:sp>
+        <p:nvSpPr>
+          <p:cNvPr id="5" name="Rectangle 4"/>
+          <p:cNvSpPr/>
+          <p:nvPr/>
+        </p:nvSpPr>
+        <p:spPr>
+          <a:xfrm>
+            <a:off x="594360" y="5989320"/>
+            <a:ext cx="10972800" cy="502920"/>
+          </a:xfrm>
+          <a:prstGeom prst="rect">
+            <a:avLst/>
+          </a:prstGeom>
+          <a:solidFill>
+            <a:srgbClr val="ECEFF1"/>
+          </a:solidFill>
+          <a:ln>
+            <a:noFill/>
+          </a:ln>
+        </p:spPr>
+        <p:style>
+          <a:lnRef idx="1">
+            <a:schemeClr val="accent1"/>
+          </a:lnRef>
+          <a:fillRef idx="3">
+            <a:schemeClr val="accent1"/>
+          </a:fillRef>
+          <a:effectRef idx="2">
+            <a:schemeClr val="accent1"/>
+          </a:effectRef>
+          <a:fontRef idx="minor">
+            <a:schemeClr val="lt1"/>
+          </a:fontRef>
+        </p:style>
+        <p:txBody>
+          <a:bodyPr rtlCol="0" anchor="ctr"/>
+          <a:lstStyle/>
+          <a:p>
+            <a:pPr algn="ctr"/>
+          </a:p>
+        </p:txBody>
+      </p:sp>
+      <p:sp>
+        <p:nvSpPr>
+          <p:cNvPr id="6" name="TextBox 5"/>
+          <p:cNvSpPr txBox="1"/>
+          <p:nvPr/>
+        </p:nvSpPr>
+        <p:spPr>
+          <a:xfrm>
+            <a:off x="777240" y="6053328"/>
+            <a:ext cx="10607040" cy="411480"/>
+          </a:xfrm>
+          <a:prstGeom prst="rect">
+            <a:avLst/>
+          </a:prstGeom>
+          <a:noFill/>
+        </p:spPr>
+        <p:txBody>
+          <a:bodyPr wrap="square">
+            <a:spAutoFit/>
+          </a:bodyPr>
+          <a:lstStyle/>
+          <a:p>
+            <a:pPr algn="ctr">
+              <a:defRPr sz="1200" b="0">
+                <a:solidFill>
+                  <a:srgbClr val="263238"/>
+                </a:solidFill>
+              </a:defRPr>
+            </a:pPr>
+            <a:r>
+              <a:t>Dwa szczyty w dni robocze (rano i wieczór); weekend — niższe i bardziej płaskie zużycie.</a:t>
+            </a:r>
+          </a:p>
+        </p:txBody>
+      </p:sp>
+      <p:sp>
+        <p:nvSpPr>
+          <p:cNvPr id="7" name="Rectangle 6"/>
+          <p:cNvSpPr/>
+          <p:nvPr/>
+        </p:nvSpPr>
+        <p:spPr>
+          <a:xfrm>
+            <a:off x="0" y="6537960"/>
+            <a:ext cx="12191695" cy="320040"/>
+          </a:xfrm>
+          <a:prstGeom prst="rect">
+            <a:avLst/>
+          </a:prstGeom>
+          <a:solidFill>
+            <a:srgbClr val="ECEFF1"/>
+          </a:solidFill>
+          <a:ln>
+            <a:noFill/>
+          </a:ln>
+        </p:spPr>
+        <p:style>
+          <a:lnRef idx="1">
+            <a:schemeClr val="accent1"/>
+          </a:lnRef>
+          <a:fillRef idx="3">
+            <a:schemeClr val="accent1"/>
+          </a:fillRef>
+          <a:effectRef idx="2">
+            <a:schemeClr val="accent1"/>
+          </a:effectRef>
+          <a:fontRef idx="minor">
+            <a:schemeClr val="lt1"/>
+          </a:fontRef>
+        </p:style>
+        <p:txBody>
+          <a:bodyPr rtlCol="0" anchor="ctr"/>
+          <a:lstStyle/>
+          <a:p>
+            <a:pPr algn="ctr"/>
+          </a:p>
+        </p:txBody>
+      </p:sp>
+      <p:sp>
+        <p:nvSpPr>
+          <p:cNvPr id="8" name="TextBox 7"/>
+          <p:cNvSpPr txBox="1"/>
+          <p:nvPr/>
+        </p:nvSpPr>
+        <p:spPr>
+          <a:xfrm>
+            <a:off x="457200" y="6565392"/>
+            <a:ext cx="7315200" cy="256032"/>
+          </a:xfrm>
+          <a:prstGeom prst="rect">
+            <a:avLst/>
+          </a:prstGeom>
+          <a:noFill/>
+        </p:spPr>
+        <p:txBody>
+          <a:bodyPr wrap="none">
+            <a:spAutoFit/>
+          </a:bodyPr>
+          <a:lstStyle/>
+          <a:p>
+            <a:pPr>
+              <a:defRPr sz="900">
+                <a:solidFill>
+                  <a:srgbClr val="607D8B"/>
+                </a:solidFill>
+              </a:defRPr>
+            </a:pPr>
+            <a:r>
+              <a:t>Analiza i wizualizacja danych – Pandas, DataFrame  •  Merito Chorzów</a:t>
+            </a:r>
+          </a:p>
+        </p:txBody>
+      </p:sp>
+      <p:sp>
+        <p:nvSpPr>
+          <p:cNvPr id="9" name="TextBox 8"/>
+          <p:cNvSpPr txBox="1"/>
+          <p:nvPr/>
+        </p:nvSpPr>
+        <p:spPr>
+          <a:xfrm>
+            <a:off x="11094415" y="6565392"/>
+            <a:ext cx="731520" cy="256032"/>
+          </a:xfrm>
+          <a:prstGeom prst="rect">
+            <a:avLst/>
+          </a:prstGeom>
+          <a:noFill/>
+        </p:spPr>
+        <p:txBody>
+          <a:bodyPr wrap="none">
+            <a:spAutoFit/>
+          </a:bodyPr>
+          <a:lstStyle/>
+          <a:p>
+            <a:pPr algn="r">
+              <a:defRPr sz="900">
+                <a:solidFill>
+                  <a:srgbClr val="607D8B"/>
+                </a:solidFill>
+              </a:defRPr>
+            </a:pPr>
+            <a:r>
+              <a:t>11</a:t>
+            </a:r>
+          </a:p>
+        </p:txBody>
+      </p:sp>
+    </p:spTree>
+  </p:cSld>
+  <p:clrMapOvr>
+    <a:masterClrMapping/>
+  </p:clrMapOvr>
+</p:sld>
+</file>
+
+<file path=ppt/slides/slide13.xml><?xml version="1.0" encoding="utf-8"?>
+<p:sld xmlns:a="http://schemas.openxmlformats.org/drawingml/2006/main" xmlns:p="http://schemas.openxmlformats.org/presentationml/2006/main" xmlns:r="http://schemas.openxmlformats.org/officeDocument/2006/relationships">
+  <p:cSld>
+    <p:spTree>
+      <p:nvGrpSpPr>
+        <p:cNvPr id="1" name=""/>
+        <p:cNvGrpSpPr/>
+        <p:nvPr/>
+      </p:nvGrpSpPr>
+      <p:grpSpPr/>
+      <p:sp>
+        <p:nvSpPr>
+          <p:cNvPr id="2" name="Rectangle 1"/>
+          <p:cNvSpPr/>
+          <p:nvPr/>
+        </p:nvSpPr>
+        <p:spPr>
+          <a:xfrm>
+            <a:off x="0" y="0"/>
+            <a:ext cx="12191695" cy="960120"/>
+          </a:xfrm>
+          <a:prstGeom prst="rect">
+            <a:avLst/>
+          </a:prstGeom>
+          <a:solidFill>
+            <a:srgbClr val="1565C0"/>
+          </a:solidFill>
+          <a:ln>
+            <a:noFill/>
+          </a:ln>
+        </p:spPr>
+        <p:style>
+          <a:lnRef idx="1">
+            <a:schemeClr val="accent1"/>
+          </a:lnRef>
+          <a:fillRef idx="3">
+            <a:schemeClr val="accent1"/>
+          </a:fillRef>
+          <a:effectRef idx="2">
+            <a:schemeClr val="accent1"/>
+          </a:effectRef>
+          <a:fontRef idx="minor">
+            <a:schemeClr val="lt1"/>
+          </a:fontRef>
+        </p:style>
+        <p:txBody>
+          <a:bodyPr rtlCol="0" anchor="ctr"/>
+          <a:lstStyle/>
+          <a:p>
+            <a:pPr algn="ctr"/>
+          </a:p>
+        </p:txBody>
+      </p:sp>
+      <p:sp>
+        <p:nvSpPr>
+          <p:cNvPr id="3" name="TextBox 2"/>
+          <p:cNvSpPr txBox="1"/>
+          <p:nvPr/>
+        </p:nvSpPr>
+        <p:spPr>
+          <a:xfrm>
+            <a:off x="502920" y="182880"/>
+            <a:ext cx="10972800" cy="640080"/>
+          </a:xfrm>
+          <a:prstGeom prst="rect">
+            <a:avLst/>
+          </a:prstGeom>
+          <a:noFill/>
+        </p:spPr>
+        <p:txBody>
+          <a:bodyPr wrap="none">
+            <a:spAutoFit/>
+          </a:bodyPr>
+          <a:lstStyle/>
+          <a:p>
+            <a:pPr>
+              <a:defRPr sz="2800" b="1">
+                <a:solidFill>
+                  <a:srgbClr val="FFFFFF"/>
+                </a:solidFill>
+              </a:defRPr>
+            </a:pPr>
+            <a:r>
+              <a:t>Heatmapa godzina × miesiąc</a:t>
+            </a:r>
+          </a:p>
+        </p:txBody>
+      </p:sp>
+      <p:pic>
+        <p:nvPicPr>
+          <p:cNvPr id="4" name="Picture 3" descr="03_heatmapa.png"/>
+          <p:cNvPicPr>
+            <a:picLocks noChangeAspect="1"/>
+          </p:cNvPicPr>
+          <p:nvPr/>
+        </p:nvPicPr>
+        <p:blipFill>
+          <a:blip r:embed="rId2"/>
+          <a:stretch>
+            <a:fillRect/>
+          </a:stretch>
+        </p:blipFill>
+        <p:spPr>
+          <a:xfrm>
+            <a:off x="594360" y="1097280"/>
+            <a:ext cx="10972800" cy="6204604"/>
+          </a:xfrm>
+          <a:prstGeom prst="rect">
+            <a:avLst/>
+          </a:prstGeom>
+        </p:spPr>
+      </p:pic>
+      <p:sp>
+        <p:nvSpPr>
+          <p:cNvPr id="5" name="Rectangle 4"/>
+          <p:cNvSpPr/>
+          <p:nvPr/>
+        </p:nvSpPr>
+        <p:spPr>
+          <a:xfrm>
+            <a:off x="594360" y="5989320"/>
+            <a:ext cx="10972800" cy="502920"/>
+          </a:xfrm>
+          <a:prstGeom prst="rect">
+            <a:avLst/>
+          </a:prstGeom>
+          <a:solidFill>
+            <a:srgbClr val="ECEFF1"/>
+          </a:solidFill>
+          <a:ln>
+            <a:noFill/>
+          </a:ln>
+        </p:spPr>
+        <p:style>
+          <a:lnRef idx="1">
+            <a:schemeClr val="accent1"/>
+          </a:lnRef>
+          <a:fillRef idx="3">
+            <a:schemeClr val="accent1"/>
+          </a:fillRef>
+          <a:effectRef idx="2">
+            <a:schemeClr val="accent1"/>
+          </a:effectRef>
+          <a:fontRef idx="minor">
+            <a:schemeClr val="lt1"/>
+          </a:fontRef>
+        </p:style>
+        <p:txBody>
+          <a:bodyPr rtlCol="0" anchor="ctr"/>
+          <a:lstStyle/>
+          <a:p>
+            <a:pPr algn="ctr"/>
+          </a:p>
+        </p:txBody>
+      </p:sp>
+      <p:sp>
+        <p:nvSpPr>
+          <p:cNvPr id="6" name="TextBox 5"/>
+          <p:cNvSpPr txBox="1"/>
+          <p:nvPr/>
+        </p:nvSpPr>
+        <p:spPr>
+          <a:xfrm>
+            <a:off x="777240" y="6053328"/>
+            <a:ext cx="10607040" cy="411480"/>
+          </a:xfrm>
+          <a:prstGeom prst="rect">
+            <a:avLst/>
+          </a:prstGeom>
+          <a:noFill/>
+        </p:spPr>
+        <p:txBody>
+          <a:bodyPr wrap="square">
+            <a:spAutoFit/>
+          </a:bodyPr>
+          <a:lstStyle/>
+          <a:p>
+            <a:pPr algn="ctr">
+              <a:defRPr sz="1200" b="0">
+                <a:solidFill>
+                  <a:srgbClr val="263238"/>
+                </a:solidFill>
+              </a:defRPr>
+            </a:pPr>
+            <a:r>
+              <a:t>Wizualizacja interakcji pory dnia i sezonu — podstawa planowania szczytów.</a:t>
+            </a:r>
+          </a:p>
+        </p:txBody>
+      </p:sp>
+      <p:sp>
+        <p:nvSpPr>
+          <p:cNvPr id="7" name="Rectangle 6"/>
+          <p:cNvSpPr/>
+          <p:nvPr/>
+        </p:nvSpPr>
+        <p:spPr>
+          <a:xfrm>
+            <a:off x="0" y="6537960"/>
+            <a:ext cx="12191695" cy="320040"/>
+          </a:xfrm>
+          <a:prstGeom prst="rect">
+            <a:avLst/>
+          </a:prstGeom>
+          <a:solidFill>
+            <a:srgbClr val="ECEFF1"/>
+          </a:solidFill>
+          <a:ln>
+            <a:noFill/>
+          </a:ln>
+        </p:spPr>
+        <p:style>
+          <a:lnRef idx="1">
+            <a:schemeClr val="accent1"/>
+          </a:lnRef>
+          <a:fillRef idx="3">
+            <a:schemeClr val="accent1"/>
+          </a:fillRef>
+          <a:effectRef idx="2">
+            <a:schemeClr val="accent1"/>
+          </a:effectRef>
+          <a:fontRef idx="minor">
+            <a:schemeClr val="lt1"/>
+          </a:fontRef>
+        </p:style>
+        <p:txBody>
+          <a:bodyPr rtlCol="0" anchor="ctr"/>
+          <a:lstStyle/>
+          <a:p>
+            <a:pPr algn="ctr"/>
+          </a:p>
+        </p:txBody>
+      </p:sp>
+      <p:sp>
+        <p:nvSpPr>
+          <p:cNvPr id="8" name="TextBox 7"/>
+          <p:cNvSpPr txBox="1"/>
+          <p:nvPr/>
+        </p:nvSpPr>
+        <p:spPr>
+          <a:xfrm>
+            <a:off x="457200" y="6565392"/>
+            <a:ext cx="7315200" cy="256032"/>
+          </a:xfrm>
+          <a:prstGeom prst="rect">
+            <a:avLst/>
+          </a:prstGeom>
+          <a:noFill/>
+        </p:spPr>
+        <p:txBody>
+          <a:bodyPr wrap="none">
+            <a:spAutoFit/>
+          </a:bodyPr>
+          <a:lstStyle/>
+          <a:p>
+            <a:pPr>
+              <a:defRPr sz="900">
+                <a:solidFill>
+                  <a:srgbClr val="607D8B"/>
+                </a:solidFill>
+              </a:defRPr>
+            </a:pPr>
+            <a:r>
+              <a:t>Analiza i wizualizacja danych – Pandas, DataFrame  •  Merito Chorzów</a:t>
+            </a:r>
+          </a:p>
+        </p:txBody>
+      </p:sp>
+      <p:sp>
+        <p:nvSpPr>
+          <p:cNvPr id="9" name="TextBox 8"/>
+          <p:cNvSpPr txBox="1"/>
+          <p:nvPr/>
+        </p:nvSpPr>
+        <p:spPr>
+          <a:xfrm>
+            <a:off x="11094415" y="6565392"/>
+            <a:ext cx="731520" cy="256032"/>
+          </a:xfrm>
+          <a:prstGeom prst="rect">
+            <a:avLst/>
+          </a:prstGeom>
+          <a:noFill/>
+        </p:spPr>
+        <p:txBody>
+          <a:bodyPr wrap="none">
+            <a:spAutoFit/>
+          </a:bodyPr>
+          <a:lstStyle/>
+          <a:p>
+            <a:pPr algn="r">
+              <a:defRPr sz="900">
+                <a:solidFill>
+                  <a:srgbClr val="607D8B"/>
+                </a:solidFill>
+              </a:defRPr>
+            </a:pPr>
+            <a:r>
+              <a:t>12</a:t>
+            </a:r>
+          </a:p>
+        </p:txBody>
+      </p:sp>
+    </p:spTree>
+  </p:cSld>
+  <p:clrMapOvr>
+    <a:masterClrMapping/>
+  </p:clrMapOvr>
+</p:sld>
+</file>
+
+<file path=ppt/slides/slide14.xml><?xml version="1.0" encoding="utf-8"?>
+<p:sld xmlns:a="http://schemas.openxmlformats.org/drawingml/2006/main" xmlns:p="http://schemas.openxmlformats.org/presentationml/2006/main" xmlns:r="http://schemas.openxmlformats.org/officeDocument/2006/relationships">
+  <p:cSld>
+    <p:spTree>
+      <p:nvGrpSpPr>
+        <p:cNvPr id="1" name=""/>
+        <p:cNvGrpSpPr/>
+        <p:nvPr/>
+      </p:nvGrpSpPr>
+      <p:grpSpPr/>
+      <p:sp>
+        <p:nvSpPr>
+          <p:cNvPr id="2" name="Rectangle 1"/>
+          <p:cNvSpPr/>
+          <p:nvPr/>
+        </p:nvSpPr>
+        <p:spPr>
+          <a:xfrm>
+            <a:off x="0" y="0"/>
+            <a:ext cx="12191695" cy="960120"/>
+          </a:xfrm>
+          <a:prstGeom prst="rect">
+            <a:avLst/>
+          </a:prstGeom>
+          <a:solidFill>
+            <a:srgbClr val="1565C0"/>
+          </a:solidFill>
+          <a:ln>
+            <a:noFill/>
+          </a:ln>
+        </p:spPr>
+        <p:style>
+          <a:lnRef idx="1">
+            <a:schemeClr val="accent1"/>
+          </a:lnRef>
+          <a:fillRef idx="3">
+            <a:schemeClr val="accent1"/>
+          </a:fillRef>
+          <a:effectRef idx="2">
+            <a:schemeClr val="accent1"/>
+          </a:effectRef>
+          <a:fontRef idx="minor">
+            <a:schemeClr val="lt1"/>
+          </a:fontRef>
+        </p:style>
+        <p:txBody>
+          <a:bodyPr rtlCol="0" anchor="ctr"/>
+          <a:lstStyle/>
+          <a:p>
+            <a:pPr algn="ctr"/>
+          </a:p>
+        </p:txBody>
+      </p:sp>
+      <p:sp>
+        <p:nvSpPr>
+          <p:cNvPr id="3" name="TextBox 2"/>
+          <p:cNvSpPr txBox="1"/>
+          <p:nvPr/>
+        </p:nvSpPr>
+        <p:spPr>
+          <a:xfrm>
+            <a:off x="502920" y="182880"/>
+            <a:ext cx="10972800" cy="640080"/>
+          </a:xfrm>
+          <a:prstGeom prst="rect">
+            <a:avLst/>
+          </a:prstGeom>
+          <a:noFill/>
+        </p:spPr>
+        <p:txBody>
+          <a:bodyPr wrap="none">
+            <a:spAutoFit/>
+          </a:bodyPr>
+          <a:lstStyle/>
+          <a:p>
+            <a:pPr>
+              <a:defRPr sz="2800" b="1">
+                <a:solidFill>
+                  <a:srgbClr val="FFFFFF"/>
+                </a:solidFill>
+              </a:defRPr>
+            </a:pPr>
+            <a:r>
+              <a:t>Miks energetyczny</a:t>
+            </a:r>
+          </a:p>
+        </p:txBody>
+      </p:sp>
+      <p:pic>
+        <p:nvPicPr>
+          <p:cNvPr id="4" name="Picture 3" descr="04_miks_energetyczny.png"/>
+          <p:cNvPicPr>
+            <a:picLocks noChangeAspect="1"/>
+          </p:cNvPicPr>
+          <p:nvPr/>
+        </p:nvPicPr>
+        <p:blipFill>
+          <a:blip r:embed="rId2"/>
+          <a:stretch>
+            <a:fillRect/>
+          </a:stretch>
+        </p:blipFill>
+        <p:spPr>
+          <a:xfrm>
+            <a:off x="594360" y="1097280"/>
+            <a:ext cx="10972800" cy="5403898"/>
+          </a:xfrm>
+          <a:prstGeom prst="rect">
+            <a:avLst/>
+          </a:prstGeom>
+        </p:spPr>
+      </p:pic>
+      <p:sp>
+        <p:nvSpPr>
+          <p:cNvPr id="5" name="Rectangle 4"/>
+          <p:cNvSpPr/>
+          <p:nvPr/>
+        </p:nvSpPr>
+        <p:spPr>
+          <a:xfrm>
+            <a:off x="594360" y="5989320"/>
+            <a:ext cx="10972800" cy="502920"/>
+          </a:xfrm>
+          <a:prstGeom prst="rect">
+            <a:avLst/>
+          </a:prstGeom>
+          <a:solidFill>
+            <a:srgbClr val="ECEFF1"/>
+          </a:solidFill>
+          <a:ln>
+            <a:noFill/>
+          </a:ln>
+        </p:spPr>
+        <p:style>
+          <a:lnRef idx="1">
+            <a:schemeClr val="accent1"/>
+          </a:lnRef>
+          <a:fillRef idx="3">
+            <a:schemeClr val="accent1"/>
+          </a:fillRef>
+          <a:effectRef idx="2">
+            <a:schemeClr val="accent1"/>
+          </a:effectRef>
+          <a:fontRef idx="minor">
+            <a:schemeClr val="lt1"/>
+          </a:fontRef>
+        </p:style>
+        <p:txBody>
+          <a:bodyPr rtlCol="0" anchor="ctr"/>
+          <a:lstStyle/>
+          <a:p>
+            <a:pPr algn="ctr"/>
+          </a:p>
+        </p:txBody>
+      </p:sp>
+      <p:sp>
+        <p:nvSpPr>
+          <p:cNvPr id="6" name="TextBox 5"/>
+          <p:cNvSpPr txBox="1"/>
+          <p:nvPr/>
+        </p:nvSpPr>
+        <p:spPr>
+          <a:xfrm>
+            <a:off x="777240" y="6053328"/>
+            <a:ext cx="10607040" cy="411480"/>
+          </a:xfrm>
+          <a:prstGeom prst="rect">
+            <a:avLst/>
+          </a:prstGeom>
+          <a:noFill/>
+        </p:spPr>
+        <p:txBody>
+          <a:bodyPr wrap="square">
+            <a:spAutoFit/>
+          </a:bodyPr>
+          <a:lstStyle/>
+          <a:p>
+            <a:pPr algn="ctr">
+              <a:defRPr sz="1200" b="0">
+                <a:solidFill>
+                  <a:srgbClr val="263238"/>
+                </a:solidFill>
+              </a:defRPr>
+            </a:pPr>
+            <a:r>
+              <a:t>Średni udział OZE w produkcji: ok. 37.7% — trend wzrostowy w analizowanym okresie.</a:t>
+            </a:r>
+          </a:p>
+        </p:txBody>
+      </p:sp>
+      <p:sp>
+        <p:nvSpPr>
+          <p:cNvPr id="7" name="Rectangle 6"/>
+          <p:cNvSpPr/>
+          <p:nvPr/>
+        </p:nvSpPr>
+        <p:spPr>
+          <a:xfrm>
+            <a:off x="0" y="6537960"/>
+            <a:ext cx="12191695" cy="320040"/>
+          </a:xfrm>
+          <a:prstGeom prst="rect">
+            <a:avLst/>
+          </a:prstGeom>
+          <a:solidFill>
+            <a:srgbClr val="ECEFF1"/>
+          </a:solidFill>
+          <a:ln>
+            <a:noFill/>
+          </a:ln>
+        </p:spPr>
+        <p:style>
+          <a:lnRef idx="1">
+            <a:schemeClr val="accent1"/>
+          </a:lnRef>
+          <a:fillRef idx="3">
+            <a:schemeClr val="accent1"/>
+          </a:fillRef>
+          <a:effectRef idx="2">
+            <a:schemeClr val="accent1"/>
+          </a:effectRef>
+          <a:fontRef idx="minor">
+            <a:schemeClr val="lt1"/>
+          </a:fontRef>
+        </p:style>
+        <p:txBody>
+          <a:bodyPr rtlCol="0" anchor="ctr"/>
+          <a:lstStyle/>
+          <a:p>
+            <a:pPr algn="ctr"/>
+          </a:p>
+        </p:txBody>
+      </p:sp>
+      <p:sp>
+        <p:nvSpPr>
+          <p:cNvPr id="8" name="TextBox 7"/>
+          <p:cNvSpPr txBox="1"/>
+          <p:nvPr/>
+        </p:nvSpPr>
+        <p:spPr>
+          <a:xfrm>
+            <a:off x="457200" y="6565392"/>
+            <a:ext cx="7315200" cy="256032"/>
+          </a:xfrm>
+          <a:prstGeom prst="rect">
+            <a:avLst/>
+          </a:prstGeom>
+          <a:noFill/>
+        </p:spPr>
+        <p:txBody>
+          <a:bodyPr wrap="none">
+            <a:spAutoFit/>
+          </a:bodyPr>
+          <a:lstStyle/>
+          <a:p>
+            <a:pPr>
+              <a:defRPr sz="900">
+                <a:solidFill>
+                  <a:srgbClr val="607D8B"/>
+                </a:solidFill>
+              </a:defRPr>
+            </a:pPr>
+            <a:r>
+              <a:t>Analiza i wizualizacja danych – Pandas, DataFrame  •  Merito Chorzów</a:t>
+            </a:r>
+          </a:p>
+        </p:txBody>
+      </p:sp>
+      <p:sp>
+        <p:nvSpPr>
+          <p:cNvPr id="9" name="TextBox 8"/>
+          <p:cNvSpPr txBox="1"/>
+          <p:nvPr/>
+        </p:nvSpPr>
+        <p:spPr>
+          <a:xfrm>
+            <a:off x="11094415" y="6565392"/>
+            <a:ext cx="731520" cy="256032"/>
+          </a:xfrm>
+          <a:prstGeom prst="rect">
+            <a:avLst/>
+          </a:prstGeom>
+          <a:noFill/>
+        </p:spPr>
+        <p:txBody>
+          <a:bodyPr wrap="none">
+            <a:spAutoFit/>
+          </a:bodyPr>
+          <a:lstStyle/>
+          <a:p>
+            <a:pPr algn="r">
+              <a:defRPr sz="900">
+                <a:solidFill>
+                  <a:srgbClr val="607D8B"/>
+                </a:solidFill>
+              </a:defRPr>
+            </a:pPr>
+            <a:r>
+              <a:t>13</a:t>
+            </a:r>
+          </a:p>
+        </p:txBody>
+      </p:sp>
+    </p:spTree>
+  </p:cSld>
+  <p:clrMapOvr>
+    <a:masterClrMapping/>
+  </p:clrMapOvr>
+</p:sld>
+</file>
+
+<file path=ppt/slides/slide15.xml><?xml version="1.0" encoding="utf-8"?>
+<p:sld xmlns:a="http://schemas.openxmlformats.org/drawingml/2006/main" xmlns:p="http://schemas.openxmlformats.org/presentationml/2006/main" xmlns:r="http://schemas.openxmlformats.org/officeDocument/2006/relationships">
+  <p:cSld>
+    <p:spTree>
+      <p:nvGrpSpPr>
+        <p:cNvPr id="1" name=""/>
+        <p:cNvGrpSpPr/>
+        <p:nvPr/>
+      </p:nvGrpSpPr>
+      <p:grpSpPr/>
+      <p:sp>
+        <p:nvSpPr>
+          <p:cNvPr id="2" name="Rectangle 1"/>
+          <p:cNvSpPr/>
+          <p:nvPr/>
+        </p:nvSpPr>
+        <p:spPr>
+          <a:xfrm>
+            <a:off x="0" y="0"/>
+            <a:ext cx="12191695" cy="960120"/>
+          </a:xfrm>
+          <a:prstGeom prst="rect">
+            <a:avLst/>
+          </a:prstGeom>
+          <a:solidFill>
+            <a:srgbClr val="1565C0"/>
+          </a:solidFill>
+          <a:ln>
+            <a:noFill/>
+          </a:ln>
+        </p:spPr>
+        <p:style>
+          <a:lnRef idx="1">
+            <a:schemeClr val="accent1"/>
+          </a:lnRef>
+          <a:fillRef idx="3">
+            <a:schemeClr val="accent1"/>
+          </a:fillRef>
+          <a:effectRef idx="2">
+            <a:schemeClr val="accent1"/>
+          </a:effectRef>
+          <a:fontRef idx="minor">
+            <a:schemeClr val="lt1"/>
+          </a:fontRef>
+        </p:style>
+        <p:txBody>
+          <a:bodyPr rtlCol="0" anchor="ctr"/>
+          <a:lstStyle/>
+          <a:p>
+            <a:pPr algn="ctr"/>
+          </a:p>
+        </p:txBody>
+      </p:sp>
+      <p:sp>
+        <p:nvSpPr>
+          <p:cNvPr id="3" name="TextBox 2"/>
+          <p:cNvSpPr txBox="1"/>
+          <p:nvPr/>
+        </p:nvSpPr>
+        <p:spPr>
+          <a:xfrm>
+            <a:off x="502920" y="182880"/>
+            <a:ext cx="10972800" cy="640080"/>
+          </a:xfrm>
+          <a:prstGeom prst="rect">
+            <a:avLst/>
+          </a:prstGeom>
+          <a:noFill/>
+        </p:spPr>
+        <p:txBody>
+          <a:bodyPr wrap="none">
+            <a:spAutoFit/>
+          </a:bodyPr>
+          <a:lstStyle/>
+          <a:p>
+            <a:pPr>
+              <a:defRPr sz="2800" b="1">
+                <a:solidFill>
+                  <a:srgbClr val="FFFFFF"/>
+                </a:solidFill>
+              </a:defRPr>
+            </a:pPr>
+            <a:r>
+              <a:t>Dashboard interaktywny (Plotly)</a:t>
+            </a:r>
+          </a:p>
+        </p:txBody>
+      </p:sp>
+      <p:sp>
+        <p:nvSpPr>
+          <p:cNvPr id="4" name="TextBox 3"/>
+          <p:cNvSpPr txBox="1"/>
+          <p:nvPr/>
+        </p:nvSpPr>
+        <p:spPr>
+          <a:xfrm>
+            <a:off x="685800" y="1143000"/>
+            <a:ext cx="10789920" cy="365760"/>
+          </a:xfrm>
+          <a:prstGeom prst="rect">
+            <a:avLst/>
+          </a:prstGeom>
+          <a:noFill/>
+        </p:spPr>
+        <p:txBody>
+          <a:bodyPr wrap="square">
+            <a:spAutoFit/>
+          </a:bodyPr>
+          <a:lstStyle/>
+          <a:p>
+            <a:pPr algn="l">
+              <a:defRPr sz="1400" b="0">
+                <a:solidFill>
+                  <a:srgbClr val="607D8B"/>
+                </a:solidFill>
+              </a:defRPr>
+            </a:pPr>
+            <a:r>
+              <a:t>Wymaganie: wykresy + dashboard</a:t>
+            </a:r>
+          </a:p>
+        </p:txBody>
+      </p:sp>
+      <p:sp>
+        <p:nvSpPr>
+          <p:cNvPr id="5" name="TextBox 4"/>
+          <p:cNvSpPr txBox="1"/>
+          <p:nvPr/>
+        </p:nvSpPr>
+        <p:spPr>
+          <a:xfrm>
+            <a:off x="685800" y="1600200"/>
+            <a:ext cx="10789920" cy="502920"/>
+          </a:xfrm>
+          <a:prstGeom prst="rect">
+            <a:avLst/>
+          </a:prstGeom>
+          <a:noFill/>
+        </p:spPr>
+        <p:txBody>
+          <a:bodyPr wrap="square">
+            <a:spAutoFit/>
+          </a:bodyPr>
+          <a:lstStyle/>
+          <a:p>
+            <a:pPr algn="l">
+              <a:defRPr sz="1700" b="0">
+                <a:solidFill>
+                  <a:srgbClr val="263238"/>
+                </a:solidFill>
+              </a:defRPr>
+            </a:pPr>
+            <a:r>
+              <a:t>•  W notebooku analiza.ipynb — sekcja 3.8</a:t>
+            </a:r>
+          </a:p>
+        </p:txBody>
+      </p:sp>
+      <p:sp>
+        <p:nvSpPr>
+          <p:cNvPr id="6" name="TextBox 5"/>
+          <p:cNvSpPr txBox="1"/>
+          <p:nvPr/>
+        </p:nvSpPr>
+        <p:spPr>
+          <a:xfrm>
+            <a:off x="685800" y="2039112"/>
+            <a:ext cx="10789920" cy="502920"/>
+          </a:xfrm>
+          <a:prstGeom prst="rect">
+            <a:avLst/>
+          </a:prstGeom>
+          <a:noFill/>
+        </p:spPr>
+        <p:txBody>
+          <a:bodyPr wrap="square">
+            <a:spAutoFit/>
+          </a:bodyPr>
+          <a:lstStyle/>
+          <a:p>
+            <a:pPr algn="l">
+              <a:defRPr sz="1700" b="0">
+                <a:solidFill>
+                  <a:srgbClr val="263238"/>
+                </a:solidFill>
+              </a:defRPr>
+            </a:pPr>
+            <a:r>
+              <a:t>•  Cztery panele: szereg zużycia, profil dobowy, cena vs zużycie, udział OZE</a:t>
+            </a:r>
+          </a:p>
+        </p:txBody>
+      </p:sp>
+      <p:sp>
+        <p:nvSpPr>
+          <p:cNvPr id="7" name="TextBox 6"/>
+          <p:cNvSpPr txBox="1"/>
+          <p:nvPr/>
+        </p:nvSpPr>
+        <p:spPr>
+          <a:xfrm>
+            <a:off x="685800" y="2478024"/>
+            <a:ext cx="10789920" cy="502920"/>
+          </a:xfrm>
+          <a:prstGeom prst="rect">
+            <a:avLst/>
+          </a:prstGeom>
+          <a:noFill/>
+        </p:spPr>
+        <p:txBody>
+          <a:bodyPr wrap="square">
+            <a:spAutoFit/>
+          </a:bodyPr>
+          <a:lstStyle/>
+          <a:p>
+            <a:pPr algn="l">
+              <a:defRPr sz="1700" b="0">
+                <a:solidFill>
+                  <a:srgbClr val="263238"/>
+                </a:solidFill>
+              </a:defRPr>
+            </a:pPr>
+            <a:r>
+              <a:t>•  Interaktywny zoom, hover z wartościami, wspólna oś czasu</a:t>
+            </a:r>
+          </a:p>
+        </p:txBody>
+      </p:sp>
+      <p:sp>
+        <p:nvSpPr>
+          <p:cNvPr id="8" name="TextBox 7"/>
+          <p:cNvSpPr txBox="1"/>
+          <p:nvPr/>
+        </p:nvSpPr>
+        <p:spPr>
+          <a:xfrm>
+            <a:off x="685800" y="2916936"/>
+            <a:ext cx="10789920" cy="502920"/>
+          </a:xfrm>
+          <a:prstGeom prst="rect">
+            <a:avLst/>
+          </a:prstGeom>
+          <a:noFill/>
+        </p:spPr>
+        <p:txBody>
+          <a:bodyPr wrap="square">
+            <a:spAutoFit/>
+          </a:bodyPr>
+          <a:lstStyle/>
+          <a:p>
+            <a:pPr algn="l">
+              <a:defRPr sz="1700" b="0">
+                <a:solidFill>
+                  <a:srgbClr val="263238"/>
+                </a:solidFill>
+              </a:defRPr>
+            </a:pPr>
+            <a:r>
+              <a:t>•  Uzupełnia statyczne wykresy Matplotlib/Seaborn o eksplorację „na żywo”</a:t>
+            </a:r>
+          </a:p>
+        </p:txBody>
+      </p:sp>
+      <p:sp>
+        <p:nvSpPr>
+          <p:cNvPr id="9" name="Rectangle 8"/>
+          <p:cNvSpPr/>
+          <p:nvPr/>
+        </p:nvSpPr>
+        <p:spPr>
+          <a:xfrm>
+            <a:off x="0" y="6537960"/>
+            <a:ext cx="12191695" cy="320040"/>
+          </a:xfrm>
+          <a:prstGeom prst="rect">
+            <a:avLst/>
+          </a:prstGeom>
+          <a:solidFill>
+            <a:srgbClr val="ECEFF1"/>
+          </a:solidFill>
+          <a:ln>
+            <a:noFill/>
+          </a:ln>
+        </p:spPr>
+        <p:style>
+          <a:lnRef idx="1">
+            <a:schemeClr val="accent1"/>
+          </a:lnRef>
+          <a:fillRef idx="3">
+            <a:schemeClr val="accent1"/>
+          </a:fillRef>
+          <a:effectRef idx="2">
+            <a:schemeClr val="accent1"/>
+          </a:effectRef>
+          <a:fontRef idx="minor">
+            <a:schemeClr val="lt1"/>
+          </a:fontRef>
+        </p:style>
+        <p:txBody>
+          <a:bodyPr rtlCol="0" anchor="ctr"/>
+          <a:lstStyle/>
+          <a:p>
+            <a:pPr algn="ctr"/>
+          </a:p>
+        </p:txBody>
+      </p:sp>
+      <p:sp>
+        <p:nvSpPr>
+          <p:cNvPr id="10" name="TextBox 9"/>
+          <p:cNvSpPr txBox="1"/>
+          <p:nvPr/>
+        </p:nvSpPr>
+        <p:spPr>
+          <a:xfrm>
+            <a:off x="457200" y="6565392"/>
+            <a:ext cx="7315200" cy="256032"/>
+          </a:xfrm>
+          <a:prstGeom prst="rect">
+            <a:avLst/>
+          </a:prstGeom>
+          <a:noFill/>
+        </p:spPr>
+        <p:txBody>
+          <a:bodyPr wrap="none">
+            <a:spAutoFit/>
+          </a:bodyPr>
+          <a:lstStyle/>
+          <a:p>
+            <a:pPr>
+              <a:defRPr sz="900">
+                <a:solidFill>
+                  <a:srgbClr val="607D8B"/>
+                </a:solidFill>
+              </a:defRPr>
+            </a:pPr>
+            <a:r>
+              <a:t>Analiza i wizualizacja danych – Pandas, DataFrame  •  Merito Chorzów</a:t>
+            </a:r>
+          </a:p>
+        </p:txBody>
+      </p:sp>
+      <p:sp>
+        <p:nvSpPr>
+          <p:cNvPr id="11" name="TextBox 10"/>
+          <p:cNvSpPr txBox="1"/>
+          <p:nvPr/>
+        </p:nvSpPr>
+        <p:spPr>
+          <a:xfrm>
+            <a:off x="11094415" y="6565392"/>
+            <a:ext cx="731520" cy="256032"/>
+          </a:xfrm>
+          <a:prstGeom prst="rect">
+            <a:avLst/>
+          </a:prstGeom>
+          <a:noFill/>
+        </p:spPr>
+        <p:txBody>
+          <a:bodyPr wrap="none">
+            <a:spAutoFit/>
+          </a:bodyPr>
+          <a:lstStyle/>
+          <a:p>
+            <a:pPr algn="r">
+              <a:defRPr sz="900">
+                <a:solidFill>
+                  <a:srgbClr val="607D8B"/>
+                </a:solidFill>
+              </a:defRPr>
+            </a:pPr>
+            <a:r>
+              <a:t>14</a:t>
+            </a:r>
+          </a:p>
+        </p:txBody>
+      </p:sp>
+    </p:spTree>
+  </p:cSld>
+  <p:clrMapOvr>
+    <a:masterClrMapping/>
+  </p:clrMapOvr>
+</p:sld>
+</file>
+
+<file path=ppt/slides/slide16.xml><?xml version="1.0" encoding="utf-8"?>
+<p:sld xmlns:a="http://schemas.openxmlformats.org/drawingml/2006/main" xmlns:p="http://schemas.openxmlformats.org/presentationml/2006/main" xmlns:r="http://schemas.openxmlformats.org/officeDocument/2006/relationships">
+  <p:cSld>
+    <p:spTree>
+      <p:nvGrpSpPr>
+        <p:cNvPr id="1" name=""/>
+        <p:cNvGrpSpPr/>
+        <p:nvPr/>
+      </p:nvGrpSpPr>
+      <p:grpSpPr/>
+      <p:sp>
+        <p:nvSpPr>
+          <p:cNvPr id="2" name="Rectangle 1"/>
+          <p:cNvSpPr/>
+          <p:nvPr/>
+        </p:nvSpPr>
+        <p:spPr>
+          <a:xfrm>
+            <a:off x="0" y="0"/>
+            <a:ext cx="12191695" cy="6858000"/>
+          </a:xfrm>
+          <a:prstGeom prst="rect">
+            <a:avLst/>
+          </a:prstGeom>
+          <a:solidFill>
+            <a:srgbClr val="263238"/>
+          </a:solidFill>
+          <a:ln>
+            <a:noFill/>
+          </a:ln>
+        </p:spPr>
+        <p:style>
+          <a:lnRef idx="1">
+            <a:schemeClr val="accent1"/>
+          </a:lnRef>
+          <a:fillRef idx="3">
+            <a:schemeClr val="accent1"/>
+          </a:fillRef>
+          <a:effectRef idx="2">
+            <a:schemeClr val="accent1"/>
+          </a:effectRef>
+          <a:fontRef idx="minor">
+            <a:schemeClr val="lt1"/>
+          </a:fontRef>
+        </p:style>
+        <p:txBody>
+          <a:bodyPr rtlCol="0" anchor="ctr"/>
+          <a:lstStyle/>
+          <a:p>
+            <a:pPr algn="ctr"/>
+          </a:p>
+        </p:txBody>
+      </p:sp>
+      <p:sp>
+        <p:nvSpPr>
+          <p:cNvPr id="3" name="TextBox 2"/>
+          <p:cNvSpPr txBox="1"/>
+          <p:nvPr/>
+        </p:nvSpPr>
+        <p:spPr>
+          <a:xfrm>
+            <a:off x="822960" y="2011680"/>
+            <a:ext cx="1828800" cy="1097280"/>
+          </a:xfrm>
+          <a:prstGeom prst="rect">
+            <a:avLst/>
+          </a:prstGeom>
+          <a:noFill/>
+        </p:spPr>
+        <p:txBody>
+          <a:bodyPr wrap="square">
+            <a:spAutoFit/>
+          </a:bodyPr>
+          <a:lstStyle/>
+          <a:p>
+            <a:pPr algn="l">
+              <a:defRPr sz="7200" b="1">
+                <a:solidFill>
+                  <a:srgbClr val="2E7D32"/>
+                </a:solidFill>
+              </a:defRPr>
+            </a:pPr>
+            <a:r>
+              <a:t>04</a:t>
+            </a:r>
+          </a:p>
+        </p:txBody>
+      </p:sp>
+      <p:sp>
+        <p:nvSpPr>
+          <p:cNvPr id="4" name="TextBox 3"/>
+          <p:cNvSpPr txBox="1"/>
+          <p:nvPr/>
+        </p:nvSpPr>
+        <p:spPr>
+          <a:xfrm>
+            <a:off x="822960" y="3200400"/>
             <a:ext cx="10058400" cy="914400"/>
           </a:xfrm>
           <a:prstGeom prst="rect">
@@ -3756,15 +5330,1194 @@
           </a:bodyPr>
           <a:lstStyle/>
           <a:p>
+            <a:pPr algn="l">
+              <a:defRPr sz="3600" b="1">
+                <a:solidFill>
+                  <a:srgbClr val="FFFFFF"/>
+                </a:solidFill>
+              </a:defRPr>
+            </a:pPr>
+            <a:r>
+              <a:t>Analiza statystyczna</a:t>
+            </a:r>
+          </a:p>
+        </p:txBody>
+      </p:sp>
+      <p:sp>
+        <p:nvSpPr>
+          <p:cNvPr id="5" name="Rectangle 4"/>
+          <p:cNvSpPr/>
+          <p:nvPr/>
+        </p:nvSpPr>
+        <p:spPr>
+          <a:xfrm>
+            <a:off x="0" y="6537960"/>
+            <a:ext cx="12191695" cy="320040"/>
+          </a:xfrm>
+          <a:prstGeom prst="rect">
+            <a:avLst/>
+          </a:prstGeom>
+          <a:solidFill>
+            <a:srgbClr val="ECEFF1"/>
+          </a:solidFill>
+          <a:ln>
+            <a:noFill/>
+          </a:ln>
+        </p:spPr>
+        <p:style>
+          <a:lnRef idx="1">
+            <a:schemeClr val="accent1"/>
+          </a:lnRef>
+          <a:fillRef idx="3">
+            <a:schemeClr val="accent1"/>
+          </a:fillRef>
+          <a:effectRef idx="2">
+            <a:schemeClr val="accent1"/>
+          </a:effectRef>
+          <a:fontRef idx="minor">
+            <a:schemeClr val="lt1"/>
+          </a:fontRef>
+        </p:style>
+        <p:txBody>
+          <a:bodyPr rtlCol="0" anchor="ctr"/>
+          <a:lstStyle/>
+          <a:p>
+            <a:pPr algn="ctr"/>
+          </a:p>
+        </p:txBody>
+      </p:sp>
+      <p:sp>
+        <p:nvSpPr>
+          <p:cNvPr id="6" name="TextBox 5"/>
+          <p:cNvSpPr txBox="1"/>
+          <p:nvPr/>
+        </p:nvSpPr>
+        <p:spPr>
+          <a:xfrm>
+            <a:off x="457200" y="6565392"/>
+            <a:ext cx="7315200" cy="256032"/>
+          </a:xfrm>
+          <a:prstGeom prst="rect">
+            <a:avLst/>
+          </a:prstGeom>
+          <a:noFill/>
+        </p:spPr>
+        <p:txBody>
+          <a:bodyPr wrap="none">
+            <a:spAutoFit/>
+          </a:bodyPr>
+          <a:lstStyle/>
+          <a:p>
+            <a:pPr>
+              <a:defRPr sz="900">
+                <a:solidFill>
+                  <a:srgbClr val="607D8B"/>
+                </a:solidFill>
+              </a:defRPr>
+            </a:pPr>
+            <a:r>
+              <a:t>Analiza i wizualizacja danych – Pandas, DataFrame  •  Merito Chorzów</a:t>
+            </a:r>
+          </a:p>
+        </p:txBody>
+      </p:sp>
+      <p:sp>
+        <p:nvSpPr>
+          <p:cNvPr id="7" name="TextBox 6"/>
+          <p:cNvSpPr txBox="1"/>
+          <p:nvPr/>
+        </p:nvSpPr>
+        <p:spPr>
+          <a:xfrm>
+            <a:off x="11094415" y="6565392"/>
+            <a:ext cx="731520" cy="256032"/>
+          </a:xfrm>
+          <a:prstGeom prst="rect">
+            <a:avLst/>
+          </a:prstGeom>
+          <a:noFill/>
+        </p:spPr>
+        <p:txBody>
+          <a:bodyPr wrap="none">
+            <a:spAutoFit/>
+          </a:bodyPr>
+          <a:lstStyle/>
+          <a:p>
+            <a:pPr algn="r">
+              <a:defRPr sz="900">
+                <a:solidFill>
+                  <a:srgbClr val="607D8B"/>
+                </a:solidFill>
+              </a:defRPr>
+            </a:pPr>
+            <a:r>
+              <a:t>15</a:t>
+            </a:r>
+          </a:p>
+        </p:txBody>
+      </p:sp>
+    </p:spTree>
+  </p:cSld>
+  <p:clrMapOvr>
+    <a:masterClrMapping/>
+  </p:clrMapOvr>
+</p:sld>
+</file>
+
+<file path=ppt/slides/slide17.xml><?xml version="1.0" encoding="utf-8"?>
+<p:sld xmlns:a="http://schemas.openxmlformats.org/drawingml/2006/main" xmlns:p="http://schemas.openxmlformats.org/presentationml/2006/main" xmlns:r="http://schemas.openxmlformats.org/officeDocument/2006/relationships">
+  <p:cSld>
+    <p:spTree>
+      <p:nvGrpSpPr>
+        <p:cNvPr id="1" name=""/>
+        <p:cNvGrpSpPr/>
+        <p:nvPr/>
+      </p:nvGrpSpPr>
+      <p:grpSpPr/>
+      <p:sp>
+        <p:nvSpPr>
+          <p:cNvPr id="2" name="Rectangle 1"/>
+          <p:cNvSpPr/>
+          <p:nvPr/>
+        </p:nvSpPr>
+        <p:spPr>
+          <a:xfrm>
+            <a:off x="0" y="0"/>
+            <a:ext cx="12191695" cy="960120"/>
+          </a:xfrm>
+          <a:prstGeom prst="rect">
+            <a:avLst/>
+          </a:prstGeom>
+          <a:solidFill>
+            <a:srgbClr val="1565C0"/>
+          </a:solidFill>
+          <a:ln>
+            <a:noFill/>
+          </a:ln>
+        </p:spPr>
+        <p:style>
+          <a:lnRef idx="1">
+            <a:schemeClr val="accent1"/>
+          </a:lnRef>
+          <a:fillRef idx="3">
+            <a:schemeClr val="accent1"/>
+          </a:fillRef>
+          <a:effectRef idx="2">
+            <a:schemeClr val="accent1"/>
+          </a:effectRef>
+          <a:fontRef idx="minor">
+            <a:schemeClr val="lt1"/>
+          </a:fontRef>
+        </p:style>
+        <p:txBody>
+          <a:bodyPr rtlCol="0" anchor="ctr"/>
+          <a:lstStyle/>
+          <a:p>
+            <a:pPr algn="ctr"/>
+          </a:p>
+        </p:txBody>
+      </p:sp>
+      <p:sp>
+        <p:nvSpPr>
+          <p:cNvPr id="3" name="TextBox 2"/>
+          <p:cNvSpPr txBox="1"/>
+          <p:nvPr/>
+        </p:nvSpPr>
+        <p:spPr>
+          <a:xfrm>
+            <a:off x="502920" y="182880"/>
+            <a:ext cx="10972800" cy="640080"/>
+          </a:xfrm>
+          <a:prstGeom prst="rect">
+            <a:avLst/>
+          </a:prstGeom>
+          <a:noFill/>
+        </p:spPr>
+        <p:txBody>
+          <a:bodyPr wrap="none">
+            <a:spAutoFit/>
+          </a:bodyPr>
+          <a:lstStyle/>
+          <a:p>
+            <a:pPr>
+              <a:defRPr sz="2800" b="1">
+                <a:solidFill>
+                  <a:srgbClr val="FFFFFF"/>
+                </a:solidFill>
+              </a:defRPr>
+            </a:pPr>
+            <a:r>
+              <a:t>Analiza rozkładu</a:t>
+            </a:r>
+          </a:p>
+        </p:txBody>
+      </p:sp>
+      <p:pic>
+        <p:nvPicPr>
+          <p:cNvPr id="4" name="Picture 3" descr="06_rozkład.png"/>
+          <p:cNvPicPr>
+            <a:picLocks noChangeAspect="1"/>
+          </p:cNvPicPr>
+          <p:nvPr/>
+        </p:nvPicPr>
+        <p:blipFill>
+          <a:blip r:embed="rId2"/>
+          <a:stretch>
+            <a:fillRect/>
+          </a:stretch>
+        </p:blipFill>
+        <p:spPr>
+          <a:xfrm>
+            <a:off x="594360" y="1097280"/>
+            <a:ext cx="10972800" cy="5393410"/>
+          </a:xfrm>
+          <a:prstGeom prst="rect">
+            <a:avLst/>
+          </a:prstGeom>
+        </p:spPr>
+      </p:pic>
+      <p:sp>
+        <p:nvSpPr>
+          <p:cNvPr id="5" name="Rectangle 4"/>
+          <p:cNvSpPr/>
+          <p:nvPr/>
+        </p:nvSpPr>
+        <p:spPr>
+          <a:xfrm>
+            <a:off x="594360" y="5989320"/>
+            <a:ext cx="10972800" cy="502920"/>
+          </a:xfrm>
+          <a:prstGeom prst="rect">
+            <a:avLst/>
+          </a:prstGeom>
+          <a:solidFill>
+            <a:srgbClr val="ECEFF1"/>
+          </a:solidFill>
+          <a:ln>
+            <a:noFill/>
+          </a:ln>
+        </p:spPr>
+        <p:style>
+          <a:lnRef idx="1">
+            <a:schemeClr val="accent1"/>
+          </a:lnRef>
+          <a:fillRef idx="3">
+            <a:schemeClr val="accent1"/>
+          </a:fillRef>
+          <a:effectRef idx="2">
+            <a:schemeClr val="accent1"/>
+          </a:effectRef>
+          <a:fontRef idx="minor">
+            <a:schemeClr val="lt1"/>
+          </a:fontRef>
+        </p:style>
+        <p:txBody>
+          <a:bodyPr rtlCol="0" anchor="ctr"/>
+          <a:lstStyle/>
+          <a:p>
+            <a:pPr algn="ctr"/>
+          </a:p>
+        </p:txBody>
+      </p:sp>
+      <p:sp>
+        <p:nvSpPr>
+          <p:cNvPr id="6" name="TextBox 5"/>
+          <p:cNvSpPr txBox="1"/>
+          <p:nvPr/>
+        </p:nvSpPr>
+        <p:spPr>
+          <a:xfrm>
+            <a:off x="777240" y="6053328"/>
+            <a:ext cx="10607040" cy="411480"/>
+          </a:xfrm>
+          <a:prstGeom prst="rect">
+            <a:avLst/>
+          </a:prstGeom>
+          <a:noFill/>
+        </p:spPr>
+        <p:txBody>
+          <a:bodyPr wrap="square">
+            <a:spAutoFit/>
+          </a:bodyPr>
+          <a:lstStyle/>
+          <a:p>
             <a:pPr algn="ctr">
-              <a:defRPr sz="3600" b="1">
+              <a:defRPr sz="1200" b="0">
+                <a:solidFill>
+                  <a:srgbClr val="263238"/>
+                </a:solidFill>
+              </a:defRPr>
+            </a:pPr>
+            <a:r>
+              <a:t>Rozkład dziennych średnich: μ = 28,698 MW, σ = 4,576 MW — lekko skośny.</a:t>
+            </a:r>
+          </a:p>
+        </p:txBody>
+      </p:sp>
+      <p:sp>
+        <p:nvSpPr>
+          <p:cNvPr id="7" name="Rectangle 6"/>
+          <p:cNvSpPr/>
+          <p:nvPr/>
+        </p:nvSpPr>
+        <p:spPr>
+          <a:xfrm>
+            <a:off x="0" y="6537960"/>
+            <a:ext cx="12191695" cy="320040"/>
+          </a:xfrm>
+          <a:prstGeom prst="rect">
+            <a:avLst/>
+          </a:prstGeom>
+          <a:solidFill>
+            <a:srgbClr val="ECEFF1"/>
+          </a:solidFill>
+          <a:ln>
+            <a:noFill/>
+          </a:ln>
+        </p:spPr>
+        <p:style>
+          <a:lnRef idx="1">
+            <a:schemeClr val="accent1"/>
+          </a:lnRef>
+          <a:fillRef idx="3">
+            <a:schemeClr val="accent1"/>
+          </a:fillRef>
+          <a:effectRef idx="2">
+            <a:schemeClr val="accent1"/>
+          </a:effectRef>
+          <a:fontRef idx="minor">
+            <a:schemeClr val="lt1"/>
+          </a:fontRef>
+        </p:style>
+        <p:txBody>
+          <a:bodyPr rtlCol="0" anchor="ctr"/>
+          <a:lstStyle/>
+          <a:p>
+            <a:pPr algn="ctr"/>
+          </a:p>
+        </p:txBody>
+      </p:sp>
+      <p:sp>
+        <p:nvSpPr>
+          <p:cNvPr id="8" name="TextBox 7"/>
+          <p:cNvSpPr txBox="1"/>
+          <p:nvPr/>
+        </p:nvSpPr>
+        <p:spPr>
+          <a:xfrm>
+            <a:off x="457200" y="6565392"/>
+            <a:ext cx="7315200" cy="256032"/>
+          </a:xfrm>
+          <a:prstGeom prst="rect">
+            <a:avLst/>
+          </a:prstGeom>
+          <a:noFill/>
+        </p:spPr>
+        <p:txBody>
+          <a:bodyPr wrap="none">
+            <a:spAutoFit/>
+          </a:bodyPr>
+          <a:lstStyle/>
+          <a:p>
+            <a:pPr>
+              <a:defRPr sz="900">
+                <a:solidFill>
+                  <a:srgbClr val="607D8B"/>
+                </a:solidFill>
+              </a:defRPr>
+            </a:pPr>
+            <a:r>
+              <a:t>Analiza i wizualizacja danych – Pandas, DataFrame  •  Merito Chorzów</a:t>
+            </a:r>
+          </a:p>
+        </p:txBody>
+      </p:sp>
+      <p:sp>
+        <p:nvSpPr>
+          <p:cNvPr id="9" name="TextBox 8"/>
+          <p:cNvSpPr txBox="1"/>
+          <p:nvPr/>
+        </p:nvSpPr>
+        <p:spPr>
+          <a:xfrm>
+            <a:off x="11094415" y="6565392"/>
+            <a:ext cx="731520" cy="256032"/>
+          </a:xfrm>
+          <a:prstGeom prst="rect">
+            <a:avLst/>
+          </a:prstGeom>
+          <a:noFill/>
+        </p:spPr>
+        <p:txBody>
+          <a:bodyPr wrap="none">
+            <a:spAutoFit/>
+          </a:bodyPr>
+          <a:lstStyle/>
+          <a:p>
+            <a:pPr algn="r">
+              <a:defRPr sz="900">
+                <a:solidFill>
+                  <a:srgbClr val="607D8B"/>
+                </a:solidFill>
+              </a:defRPr>
+            </a:pPr>
+            <a:r>
+              <a:t>16</a:t>
+            </a:r>
+          </a:p>
+        </p:txBody>
+      </p:sp>
+    </p:spTree>
+  </p:cSld>
+  <p:clrMapOvr>
+    <a:masterClrMapping/>
+  </p:clrMapOvr>
+</p:sld>
+</file>
+
+<file path=ppt/slides/slide18.xml><?xml version="1.0" encoding="utf-8"?>
+<p:sld xmlns:a="http://schemas.openxmlformats.org/drawingml/2006/main" xmlns:p="http://schemas.openxmlformats.org/presentationml/2006/main" xmlns:r="http://schemas.openxmlformats.org/officeDocument/2006/relationships">
+  <p:cSld>
+    <p:spTree>
+      <p:nvGrpSpPr>
+        <p:cNvPr id="1" name=""/>
+        <p:cNvGrpSpPr/>
+        <p:nvPr/>
+      </p:nvGrpSpPr>
+      <p:grpSpPr/>
+      <p:sp>
+        <p:nvSpPr>
+          <p:cNvPr id="2" name="Rectangle 1"/>
+          <p:cNvSpPr/>
+          <p:nvPr/>
+        </p:nvSpPr>
+        <p:spPr>
+          <a:xfrm>
+            <a:off x="0" y="0"/>
+            <a:ext cx="12191695" cy="960120"/>
+          </a:xfrm>
+          <a:prstGeom prst="rect">
+            <a:avLst/>
+          </a:prstGeom>
+          <a:solidFill>
+            <a:srgbClr val="1565C0"/>
+          </a:solidFill>
+          <a:ln>
+            <a:noFill/>
+          </a:ln>
+        </p:spPr>
+        <p:style>
+          <a:lnRef idx="1">
+            <a:schemeClr val="accent1"/>
+          </a:lnRef>
+          <a:fillRef idx="3">
+            <a:schemeClr val="accent1"/>
+          </a:fillRef>
+          <a:effectRef idx="2">
+            <a:schemeClr val="accent1"/>
+          </a:effectRef>
+          <a:fontRef idx="minor">
+            <a:schemeClr val="lt1"/>
+          </a:fontRef>
+        </p:style>
+        <p:txBody>
+          <a:bodyPr rtlCol="0" anchor="ctr"/>
+          <a:lstStyle/>
+          <a:p>
+            <a:pPr algn="ctr"/>
+          </a:p>
+        </p:txBody>
+      </p:sp>
+      <p:sp>
+        <p:nvSpPr>
+          <p:cNvPr id="3" name="TextBox 2"/>
+          <p:cNvSpPr txBox="1"/>
+          <p:nvPr/>
+        </p:nvSpPr>
+        <p:spPr>
+          <a:xfrm>
+            <a:off x="502920" y="182880"/>
+            <a:ext cx="10972800" cy="640080"/>
+          </a:xfrm>
+          <a:prstGeom prst="rect">
+            <a:avLst/>
+          </a:prstGeom>
+          <a:noFill/>
+        </p:spPr>
+        <p:txBody>
+          <a:bodyPr wrap="none">
+            <a:spAutoFit/>
+          </a:bodyPr>
+          <a:lstStyle/>
+          <a:p>
+            <a:pPr>
+              <a:defRPr sz="2800" b="1">
                 <a:solidFill>
                   <a:srgbClr val="FFFFFF"/>
                 </a:solidFill>
               </a:defRPr>
             </a:pPr>
             <a:r>
-              <a:t>Dziękujemy za uwagę</a:t>
+              <a:t>Statystyki opisowe zużycia</a:t>
+            </a:r>
+          </a:p>
+        </p:txBody>
+      </p:sp>
+      <p:sp>
+        <p:nvSpPr>
+          <p:cNvPr id="4" name="Rounded Rectangle 3"/>
+          <p:cNvSpPr/>
+          <p:nvPr/>
+        </p:nvSpPr>
+        <p:spPr>
+          <a:xfrm>
+            <a:off x="548640" y="1280160"/>
+            <a:ext cx="3469538" cy="4389120"/>
+          </a:xfrm>
+          <a:prstGeom prst="roundRect">
+            <a:avLst/>
+          </a:prstGeom>
+          <a:solidFill>
+            <a:srgbClr val="ECEFF1"/>
+          </a:solidFill>
+          <a:ln>
+            <a:solidFill>
+              <a:srgbClr val="1565C0"/>
+            </a:solidFill>
+          </a:ln>
+        </p:spPr>
+        <p:style>
+          <a:lnRef idx="1">
+            <a:schemeClr val="accent1"/>
+          </a:lnRef>
+          <a:fillRef idx="3">
+            <a:schemeClr val="accent1"/>
+          </a:fillRef>
+          <a:effectRef idx="2">
+            <a:schemeClr val="accent1"/>
+          </a:effectRef>
+          <a:fontRef idx="minor">
+            <a:schemeClr val="lt1"/>
+          </a:fontRef>
+        </p:style>
+        <p:txBody>
+          <a:bodyPr rtlCol="0" anchor="ctr"/>
+          <a:lstStyle/>
+          <a:p>
+            <a:pPr algn="ctr"/>
+          </a:p>
+        </p:txBody>
+      </p:sp>
+      <p:sp>
+        <p:nvSpPr>
+          <p:cNvPr id="5" name="TextBox 4"/>
+          <p:cNvSpPr txBox="1"/>
+          <p:nvPr/>
+        </p:nvSpPr>
+        <p:spPr>
+          <a:xfrm>
+            <a:off x="731520" y="1508760"/>
+            <a:ext cx="3240938" cy="457200"/>
+          </a:xfrm>
+          <a:prstGeom prst="rect">
+            <a:avLst/>
+          </a:prstGeom>
+          <a:noFill/>
+        </p:spPr>
+        <p:txBody>
+          <a:bodyPr wrap="square">
+            <a:spAutoFit/>
+          </a:bodyPr>
+          <a:lstStyle/>
+          <a:p>
+            <a:pPr algn="l">
+              <a:defRPr sz="1300" b="0">
+                <a:solidFill>
+                  <a:srgbClr val="607D8B"/>
+                </a:solidFill>
+              </a:defRPr>
+            </a:pPr>
+            <a:r>
+              <a:t>Średnia</a:t>
+            </a:r>
+          </a:p>
+        </p:txBody>
+      </p:sp>
+      <p:sp>
+        <p:nvSpPr>
+          <p:cNvPr id="6" name="TextBox 5"/>
+          <p:cNvSpPr txBox="1"/>
+          <p:nvPr/>
+        </p:nvSpPr>
+        <p:spPr>
+          <a:xfrm>
+            <a:off x="731520" y="2011680"/>
+            <a:ext cx="3240938" cy="1097280"/>
+          </a:xfrm>
+          <a:prstGeom prst="rect">
+            <a:avLst/>
+          </a:prstGeom>
+          <a:noFill/>
+        </p:spPr>
+        <p:txBody>
+          <a:bodyPr wrap="square">
+            <a:spAutoFit/>
+          </a:bodyPr>
+          <a:lstStyle/>
+          <a:p>
+            <a:pPr algn="l">
+              <a:defRPr sz="2800" b="1">
+                <a:solidFill>
+                  <a:srgbClr val="1565C0"/>
+                </a:solidFill>
+              </a:defRPr>
+            </a:pPr>
+            <a:r>
+              <a:t>28,698 MW</a:t>
+            </a:r>
+          </a:p>
+        </p:txBody>
+      </p:sp>
+      <p:sp>
+        <p:nvSpPr>
+          <p:cNvPr id="7" name="TextBox 6"/>
+          <p:cNvSpPr txBox="1"/>
+          <p:nvPr/>
+        </p:nvSpPr>
+        <p:spPr>
+          <a:xfrm>
+            <a:off x="731520" y="3200400"/>
+            <a:ext cx="3240938" cy="1371600"/>
+          </a:xfrm>
+          <a:prstGeom prst="rect">
+            <a:avLst/>
+          </a:prstGeom>
+          <a:noFill/>
+        </p:spPr>
+        <p:txBody>
+          <a:bodyPr wrap="square">
+            <a:spAutoFit/>
+          </a:bodyPr>
+          <a:lstStyle/>
+          <a:p>
+            <a:pPr algn="l">
+              <a:defRPr sz="1200" b="0">
+                <a:solidFill>
+                  <a:srgbClr val="263238"/>
+                </a:solidFill>
+              </a:defRPr>
+            </a:pPr>
+            <a:r>
+              <a:t>Godzinowe obciążenie</a:t>
+            </a:r>
+          </a:p>
+        </p:txBody>
+      </p:sp>
+      <p:sp>
+        <p:nvSpPr>
+          <p:cNvPr id="8" name="Rounded Rectangle 7"/>
+          <p:cNvSpPr/>
+          <p:nvPr/>
+        </p:nvSpPr>
+        <p:spPr>
+          <a:xfrm>
+            <a:off x="4246778" y="1280160"/>
+            <a:ext cx="3469538" cy="4389120"/>
+          </a:xfrm>
+          <a:prstGeom prst="roundRect">
+            <a:avLst/>
+          </a:prstGeom>
+          <a:solidFill>
+            <a:srgbClr val="ECEFF1"/>
+          </a:solidFill>
+          <a:ln>
+            <a:solidFill>
+              <a:srgbClr val="1565C0"/>
+            </a:solidFill>
+          </a:ln>
+        </p:spPr>
+        <p:style>
+          <a:lnRef idx="1">
+            <a:schemeClr val="accent1"/>
+          </a:lnRef>
+          <a:fillRef idx="3">
+            <a:schemeClr val="accent1"/>
+          </a:fillRef>
+          <a:effectRef idx="2">
+            <a:schemeClr val="accent1"/>
+          </a:effectRef>
+          <a:fontRef idx="minor">
+            <a:schemeClr val="lt1"/>
+          </a:fontRef>
+        </p:style>
+        <p:txBody>
+          <a:bodyPr rtlCol="0" anchor="ctr"/>
+          <a:lstStyle/>
+          <a:p>
+            <a:pPr algn="ctr"/>
+          </a:p>
+        </p:txBody>
+      </p:sp>
+      <p:sp>
+        <p:nvSpPr>
+          <p:cNvPr id="9" name="TextBox 8"/>
+          <p:cNvSpPr txBox="1"/>
+          <p:nvPr/>
+        </p:nvSpPr>
+        <p:spPr>
+          <a:xfrm>
+            <a:off x="4429658" y="1508760"/>
+            <a:ext cx="3240938" cy="457200"/>
+          </a:xfrm>
+          <a:prstGeom prst="rect">
+            <a:avLst/>
+          </a:prstGeom>
+          <a:noFill/>
+        </p:spPr>
+        <p:txBody>
+          <a:bodyPr wrap="square">
+            <a:spAutoFit/>
+          </a:bodyPr>
+          <a:lstStyle/>
+          <a:p>
+            <a:pPr algn="l">
+              <a:defRPr sz="1300" b="0">
+                <a:solidFill>
+                  <a:srgbClr val="607D8B"/>
+                </a:solidFill>
+              </a:defRPr>
+            </a:pPr>
+            <a:r>
+              <a:t>Mediana</a:t>
+            </a:r>
+          </a:p>
+        </p:txBody>
+      </p:sp>
+      <p:sp>
+        <p:nvSpPr>
+          <p:cNvPr id="10" name="TextBox 9"/>
+          <p:cNvSpPr txBox="1"/>
+          <p:nvPr/>
+        </p:nvSpPr>
+        <p:spPr>
+          <a:xfrm>
+            <a:off x="4429658" y="2011680"/>
+            <a:ext cx="3240938" cy="1097280"/>
+          </a:xfrm>
+          <a:prstGeom prst="rect">
+            <a:avLst/>
+          </a:prstGeom>
+          <a:noFill/>
+        </p:spPr>
+        <p:txBody>
+          <a:bodyPr wrap="square">
+            <a:spAutoFit/>
+          </a:bodyPr>
+          <a:lstStyle/>
+          <a:p>
+            <a:pPr algn="l">
+              <a:defRPr sz="2800" b="1">
+                <a:solidFill>
+                  <a:srgbClr val="1565C0"/>
+                </a:solidFill>
+              </a:defRPr>
+            </a:pPr>
+            <a:r>
+              <a:t>28,902 MW</a:t>
+            </a:r>
+          </a:p>
+        </p:txBody>
+      </p:sp>
+      <p:sp>
+        <p:nvSpPr>
+          <p:cNvPr id="11" name="TextBox 10"/>
+          <p:cNvSpPr txBox="1"/>
+          <p:nvPr/>
+        </p:nvSpPr>
+        <p:spPr>
+          <a:xfrm>
+            <a:off x="4429658" y="3200400"/>
+            <a:ext cx="3240938" cy="1371600"/>
+          </a:xfrm>
+          <a:prstGeom prst="rect">
+            <a:avLst/>
+          </a:prstGeom>
+          <a:noFill/>
+        </p:spPr>
+        <p:txBody>
+          <a:bodyPr wrap="square">
+            <a:spAutoFit/>
+          </a:bodyPr>
+          <a:lstStyle/>
+          <a:p>
+            <a:pPr algn="l">
+              <a:defRPr sz="1200" b="0">
+                <a:solidFill>
+                  <a:srgbClr val="263238"/>
+                </a:solidFill>
+              </a:defRPr>
+            </a:pPr>
+            <a:r>
+              <a:t>Odporna na skrajne wartości</a:t>
+            </a:r>
+          </a:p>
+        </p:txBody>
+      </p:sp>
+      <p:sp>
+        <p:nvSpPr>
+          <p:cNvPr id="12" name="Rounded Rectangle 11"/>
+          <p:cNvSpPr/>
+          <p:nvPr/>
+        </p:nvSpPr>
+        <p:spPr>
+          <a:xfrm>
+            <a:off x="7944916" y="1280160"/>
+            <a:ext cx="3469538" cy="4389120"/>
+          </a:xfrm>
+          <a:prstGeom prst="roundRect">
+            <a:avLst/>
+          </a:prstGeom>
+          <a:solidFill>
+            <a:srgbClr val="ECEFF1"/>
+          </a:solidFill>
+          <a:ln>
+            <a:solidFill>
+              <a:srgbClr val="1565C0"/>
+            </a:solidFill>
+          </a:ln>
+        </p:spPr>
+        <p:style>
+          <a:lnRef idx="1">
+            <a:schemeClr val="accent1"/>
+          </a:lnRef>
+          <a:fillRef idx="3">
+            <a:schemeClr val="accent1"/>
+          </a:fillRef>
+          <a:effectRef idx="2">
+            <a:schemeClr val="accent1"/>
+          </a:effectRef>
+          <a:fontRef idx="minor">
+            <a:schemeClr val="lt1"/>
+          </a:fontRef>
+        </p:style>
+        <p:txBody>
+          <a:bodyPr rtlCol="0" anchor="ctr"/>
+          <a:lstStyle/>
+          <a:p>
+            <a:pPr algn="ctr"/>
+          </a:p>
+        </p:txBody>
+      </p:sp>
+      <p:sp>
+        <p:nvSpPr>
+          <p:cNvPr id="13" name="TextBox 12"/>
+          <p:cNvSpPr txBox="1"/>
+          <p:nvPr/>
+        </p:nvSpPr>
+        <p:spPr>
+          <a:xfrm>
+            <a:off x="8127796" y="1508760"/>
+            <a:ext cx="3240938" cy="457200"/>
+          </a:xfrm>
+          <a:prstGeom prst="rect">
+            <a:avLst/>
+          </a:prstGeom>
+          <a:noFill/>
+        </p:spPr>
+        <p:txBody>
+          <a:bodyPr wrap="square">
+            <a:spAutoFit/>
+          </a:bodyPr>
+          <a:lstStyle/>
+          <a:p>
+            <a:pPr algn="l">
+              <a:defRPr sz="1300" b="0">
+                <a:solidFill>
+                  <a:srgbClr val="607D8B"/>
+                </a:solidFill>
+              </a:defRPr>
+            </a:pPr>
+            <a:r>
+              <a:t>Min / Max</a:t>
+            </a:r>
+          </a:p>
+        </p:txBody>
+      </p:sp>
+      <p:sp>
+        <p:nvSpPr>
+          <p:cNvPr id="14" name="TextBox 13"/>
+          <p:cNvSpPr txBox="1"/>
+          <p:nvPr/>
+        </p:nvSpPr>
+        <p:spPr>
+          <a:xfrm>
+            <a:off x="8127796" y="2011680"/>
+            <a:ext cx="3240938" cy="1097280"/>
+          </a:xfrm>
+          <a:prstGeom prst="rect">
+            <a:avLst/>
+          </a:prstGeom>
+          <a:noFill/>
+        </p:spPr>
+        <p:txBody>
+          <a:bodyPr wrap="square">
+            <a:spAutoFit/>
+          </a:bodyPr>
+          <a:lstStyle/>
+          <a:p>
+            <a:pPr algn="l">
+              <a:defRPr sz="2800" b="1">
+                <a:solidFill>
+                  <a:srgbClr val="1565C0"/>
+                </a:solidFill>
+              </a:defRPr>
+            </a:pPr>
+            <a:r>
+              <a:t>18,041 / 41,015</a:t>
+            </a:r>
+          </a:p>
+        </p:txBody>
+      </p:sp>
+      <p:sp>
+        <p:nvSpPr>
+          <p:cNvPr id="15" name="TextBox 14"/>
+          <p:cNvSpPr txBox="1"/>
+          <p:nvPr/>
+        </p:nvSpPr>
+        <p:spPr>
+          <a:xfrm>
+            <a:off x="8127796" y="3200400"/>
+            <a:ext cx="3240938" cy="1371600"/>
+          </a:xfrm>
+          <a:prstGeom prst="rect">
+            <a:avLst/>
+          </a:prstGeom>
+          <a:noFill/>
+        </p:spPr>
+        <p:txBody>
+          <a:bodyPr wrap="square">
+            <a:spAutoFit/>
+          </a:bodyPr>
+          <a:lstStyle/>
+          <a:p>
+            <a:pPr algn="l">
+              <a:defRPr sz="1200" b="0">
+                <a:solidFill>
+                  <a:srgbClr val="263238"/>
+                </a:solidFill>
+              </a:defRPr>
+            </a:pPr>
+            <a:r>
+              <a:t>Zakres 4 lat</a:t>
+            </a:r>
+          </a:p>
+        </p:txBody>
+      </p:sp>
+      <p:sp>
+        <p:nvSpPr>
+          <p:cNvPr id="16" name="Rectangle 15"/>
+          <p:cNvSpPr/>
+          <p:nvPr/>
+        </p:nvSpPr>
+        <p:spPr>
+          <a:xfrm>
+            <a:off x="0" y="6537960"/>
+            <a:ext cx="12191695" cy="320040"/>
+          </a:xfrm>
+          <a:prstGeom prst="rect">
+            <a:avLst/>
+          </a:prstGeom>
+          <a:solidFill>
+            <a:srgbClr val="ECEFF1"/>
+          </a:solidFill>
+          <a:ln>
+            <a:noFill/>
+          </a:ln>
+        </p:spPr>
+        <p:style>
+          <a:lnRef idx="1">
+            <a:schemeClr val="accent1"/>
+          </a:lnRef>
+          <a:fillRef idx="3">
+            <a:schemeClr val="accent1"/>
+          </a:fillRef>
+          <a:effectRef idx="2">
+            <a:schemeClr val="accent1"/>
+          </a:effectRef>
+          <a:fontRef idx="minor">
+            <a:schemeClr val="lt1"/>
+          </a:fontRef>
+        </p:style>
+        <p:txBody>
+          <a:bodyPr rtlCol="0" anchor="ctr"/>
+          <a:lstStyle/>
+          <a:p>
+            <a:pPr algn="ctr"/>
+          </a:p>
+        </p:txBody>
+      </p:sp>
+      <p:sp>
+        <p:nvSpPr>
+          <p:cNvPr id="17" name="TextBox 16"/>
+          <p:cNvSpPr txBox="1"/>
+          <p:nvPr/>
+        </p:nvSpPr>
+        <p:spPr>
+          <a:xfrm>
+            <a:off x="457200" y="6565392"/>
+            <a:ext cx="7315200" cy="256032"/>
+          </a:xfrm>
+          <a:prstGeom prst="rect">
+            <a:avLst/>
+          </a:prstGeom>
+          <a:noFill/>
+        </p:spPr>
+        <p:txBody>
+          <a:bodyPr wrap="none">
+            <a:spAutoFit/>
+          </a:bodyPr>
+          <a:lstStyle/>
+          <a:p>
+            <a:pPr>
+              <a:defRPr sz="900">
+                <a:solidFill>
+                  <a:srgbClr val="607D8B"/>
+                </a:solidFill>
+              </a:defRPr>
+            </a:pPr>
+            <a:r>
+              <a:t>Analiza i wizualizacja danych – Pandas, DataFrame  •  Merito Chorzów</a:t>
+            </a:r>
+          </a:p>
+        </p:txBody>
+      </p:sp>
+      <p:sp>
+        <p:nvSpPr>
+          <p:cNvPr id="18" name="TextBox 17"/>
+          <p:cNvSpPr txBox="1"/>
+          <p:nvPr/>
+        </p:nvSpPr>
+        <p:spPr>
+          <a:xfrm>
+            <a:off x="11094415" y="6565392"/>
+            <a:ext cx="731520" cy="256032"/>
+          </a:xfrm>
+          <a:prstGeom prst="rect">
+            <a:avLst/>
+          </a:prstGeom>
+          <a:noFill/>
+        </p:spPr>
+        <p:txBody>
+          <a:bodyPr wrap="none">
+            <a:spAutoFit/>
+          </a:bodyPr>
+          <a:lstStyle/>
+          <a:p>
+            <a:pPr algn="r">
+              <a:defRPr sz="900">
+                <a:solidFill>
+                  <a:srgbClr val="607D8B"/>
+                </a:solidFill>
+              </a:defRPr>
+            </a:pPr>
+            <a:r>
+              <a:t>17</a:t>
+            </a:r>
+          </a:p>
+        </p:txBody>
+      </p:sp>
+    </p:spTree>
+  </p:cSld>
+  <p:clrMapOvr>
+    <a:masterClrMapping/>
+  </p:clrMapOvr>
+</p:sld>
+</file>
+
+<file path=ppt/slides/slide19.xml><?xml version="1.0" encoding="utf-8"?>
+<p:sld xmlns:a="http://schemas.openxmlformats.org/drawingml/2006/main" xmlns:p="http://schemas.openxmlformats.org/presentationml/2006/main" xmlns:r="http://schemas.openxmlformats.org/officeDocument/2006/relationships">
+  <p:cSld>
+    <p:spTree>
+      <p:nvGrpSpPr>
+        <p:cNvPr id="1" name=""/>
+        <p:cNvGrpSpPr/>
+        <p:nvPr/>
+      </p:nvGrpSpPr>
+      <p:grpSpPr/>
+      <p:sp>
+        <p:nvSpPr>
+          <p:cNvPr id="2" name="Rectangle 1"/>
+          <p:cNvSpPr/>
+          <p:nvPr/>
+        </p:nvSpPr>
+        <p:spPr>
+          <a:xfrm>
+            <a:off x="0" y="0"/>
+            <a:ext cx="12191695" cy="960120"/>
+          </a:xfrm>
+          <a:prstGeom prst="rect">
+            <a:avLst/>
+          </a:prstGeom>
+          <a:solidFill>
+            <a:srgbClr val="1565C0"/>
+          </a:solidFill>
+          <a:ln>
+            <a:noFill/>
+          </a:ln>
+        </p:spPr>
+        <p:style>
+          <a:lnRef idx="1">
+            <a:schemeClr val="accent1"/>
+          </a:lnRef>
+          <a:fillRef idx="3">
+            <a:schemeClr val="accent1"/>
+          </a:fillRef>
+          <a:effectRef idx="2">
+            <a:schemeClr val="accent1"/>
+          </a:effectRef>
+          <a:fontRef idx="minor">
+            <a:schemeClr val="lt1"/>
+          </a:fontRef>
+        </p:style>
+        <p:txBody>
+          <a:bodyPr rtlCol="0" anchor="ctr"/>
+          <a:lstStyle/>
+          <a:p>
+            <a:pPr algn="ctr"/>
+          </a:p>
+        </p:txBody>
+      </p:sp>
+      <p:sp>
+        <p:nvSpPr>
+          <p:cNvPr id="3" name="TextBox 2"/>
+          <p:cNvSpPr txBox="1"/>
+          <p:nvPr/>
+        </p:nvSpPr>
+        <p:spPr>
+          <a:xfrm>
+            <a:off x="502920" y="182880"/>
+            <a:ext cx="10972800" cy="640080"/>
+          </a:xfrm>
+          <a:prstGeom prst="rect">
+            <a:avLst/>
+          </a:prstGeom>
+          <a:noFill/>
+        </p:spPr>
+        <p:txBody>
+          <a:bodyPr wrap="none">
+            <a:spAutoFit/>
+          </a:bodyPr>
+          <a:lstStyle/>
+          <a:p>
+            <a:pPr>
+              <a:defRPr sz="2800" b="1">
+                <a:solidFill>
+                  <a:srgbClr val="FFFFFF"/>
+                </a:solidFill>
+              </a:defRPr>
+            </a:pPr>
+            <a:r>
+              <a:t>Testy statystyczne</a:t>
             </a:r>
           </a:p>
         </p:txBody>
@@ -3777,8 +6530,8 @@
         </p:nvSpPr>
         <p:spPr>
           <a:xfrm>
-            <a:off x="914400" y="3657600"/>
-            <a:ext cx="10058400" cy="457200"/>
+            <a:off x="685800" y="1143000"/>
+            <a:ext cx="10789920" cy="502920"/>
           </a:xfrm>
           <a:prstGeom prst="rect">
             <a:avLst/>
@@ -3791,15 +6544,303 @@
           </a:bodyPr>
           <a:lstStyle/>
           <a:p>
-            <a:pPr algn="ctr">
-              <a:defRPr sz="2200" b="0">
-                <a:solidFill>
-                  <a:srgbClr val="FFFFFF"/>
-                </a:solidFill>
-              </a:defRPr>
-            </a:pPr>
-            <a:r>
-              <a:t>Pytania?</a:t>
+            <a:pPr algn="l">
+              <a:defRPr sz="1700" b="0">
+                <a:solidFill>
+                  <a:srgbClr val="263238"/>
+                </a:solidFill>
+              </a:defRPr>
+            </a:pPr>
+            <a:r>
+              <a:t>•  Shapiro-Wilk (normalność dziennych średnich): p = 9.16e-06 → odrzucamy normalność</a:t>
+            </a:r>
+          </a:p>
+        </p:txBody>
+      </p:sp>
+      <p:sp>
+        <p:nvSpPr>
+          <p:cNvPr id="5" name="TextBox 4"/>
+          <p:cNvSpPr txBox="1"/>
+          <p:nvPr/>
+        </p:nvSpPr>
+        <p:spPr>
+          <a:xfrm>
+            <a:off x="685800" y="1581912"/>
+            <a:ext cx="10789920" cy="502920"/>
+          </a:xfrm>
+          <a:prstGeom prst="rect">
+            <a:avLst/>
+          </a:prstGeom>
+          <a:noFill/>
+        </p:spPr>
+        <p:txBody>
+          <a:bodyPr wrap="square">
+            <a:spAutoFit/>
+          </a:bodyPr>
+          <a:lstStyle/>
+          <a:p>
+            <a:pPr algn="l">
+              <a:defRPr sz="1700" b="0">
+                <a:solidFill>
+                  <a:srgbClr val="263238"/>
+                </a:solidFill>
+              </a:defRPr>
+            </a:pPr>
+            <a:r>
+              <a:t>•  Wniosek: stosujemy testy nieparametryczne i robustne miary</a:t>
+            </a:r>
+          </a:p>
+        </p:txBody>
+      </p:sp>
+      <p:sp>
+        <p:nvSpPr>
+          <p:cNvPr id="6" name="TextBox 5"/>
+          <p:cNvSpPr txBox="1"/>
+          <p:nvPr/>
+        </p:nvSpPr>
+        <p:spPr>
+          <a:xfrm>
+            <a:off x="685800" y="2020824"/>
+            <a:ext cx="10789920" cy="502920"/>
+          </a:xfrm>
+          <a:prstGeom prst="rect">
+            <a:avLst/>
+          </a:prstGeom>
+          <a:noFill/>
+        </p:spPr>
+        <p:txBody>
+          <a:bodyPr wrap="square">
+            <a:spAutoFit/>
+          </a:bodyPr>
+          <a:lstStyle/>
+          <a:p>
+            <a:pPr algn="l">
+              <a:defRPr sz="1700" b="0">
+                <a:solidFill>
+                  <a:srgbClr val="263238"/>
+                </a:solidFill>
+              </a:defRPr>
+            </a:pPr>
+            <a:r>
+              <a:t>•  Mann-Whitney U (weekend vs dzień roboczy): p = 0.00e+00 → różnica istotna</a:t>
+            </a:r>
+          </a:p>
+        </p:txBody>
+      </p:sp>
+      <p:sp>
+        <p:nvSpPr>
+          <p:cNvPr id="7" name="TextBox 6"/>
+          <p:cNvSpPr txBox="1"/>
+          <p:nvPr/>
+        </p:nvSpPr>
+        <p:spPr>
+          <a:xfrm>
+            <a:off x="685800" y="2459736"/>
+            <a:ext cx="10789920" cy="502920"/>
+          </a:xfrm>
+          <a:prstGeom prst="rect">
+            <a:avLst/>
+          </a:prstGeom>
+          <a:noFill/>
+        </p:spPr>
+        <p:txBody>
+          <a:bodyPr wrap="square">
+            <a:spAutoFit/>
+          </a:bodyPr>
+          <a:lstStyle/>
+          <a:p>
+            <a:pPr algn="l">
+              <a:defRPr sz="1700" b="0">
+                <a:solidFill>
+                  <a:srgbClr val="263238"/>
+                </a:solidFill>
+              </a:defRPr>
+            </a:pPr>
+            <a:r>
+              <a:t>•  Średnia roboczy: 29,425 MW  |  weekend: 26,884 MW  (−8.6%)</a:t>
+            </a:r>
+          </a:p>
+        </p:txBody>
+      </p:sp>
+      <p:sp>
+        <p:nvSpPr>
+          <p:cNvPr id="8" name="TextBox 7"/>
+          <p:cNvSpPr txBox="1"/>
+          <p:nvPr/>
+        </p:nvSpPr>
+        <p:spPr>
+          <a:xfrm>
+            <a:off x="685800" y="2898648"/>
+            <a:ext cx="10789920" cy="502920"/>
+          </a:xfrm>
+          <a:prstGeom prst="rect">
+            <a:avLst/>
+          </a:prstGeom>
+          <a:noFill/>
+        </p:spPr>
+        <p:txBody>
+          <a:bodyPr wrap="square">
+            <a:spAutoFit/>
+          </a:bodyPr>
+          <a:lstStyle/>
+          <a:p>
+            <a:pPr algn="l">
+              <a:defRPr sz="1700" b="0">
+                <a:solidFill>
+                  <a:srgbClr val="263238"/>
+                </a:solidFill>
+              </a:defRPr>
+            </a:pPr>
+            <a:r>
+              <a:t>•  Pearson (zużycie–temp.): r = 0.203, p = 0.00e+00</a:t>
+            </a:r>
+          </a:p>
+        </p:txBody>
+      </p:sp>
+      <p:sp>
+        <p:nvSpPr>
+          <p:cNvPr id="9" name="TextBox 8"/>
+          <p:cNvSpPr txBox="1"/>
+          <p:nvPr/>
+        </p:nvSpPr>
+        <p:spPr>
+          <a:xfrm>
+            <a:off x="685800" y="3337560"/>
+            <a:ext cx="10789920" cy="502920"/>
+          </a:xfrm>
+          <a:prstGeom prst="rect">
+            <a:avLst/>
+          </a:prstGeom>
+          <a:noFill/>
+        </p:spPr>
+        <p:txBody>
+          <a:bodyPr wrap="square">
+            <a:spAutoFit/>
+          </a:bodyPr>
+          <a:lstStyle/>
+          <a:p>
+            <a:pPr algn="l">
+              <a:defRPr sz="1700" b="0">
+                <a:solidFill>
+                  <a:srgbClr val="263238"/>
+                </a:solidFill>
+              </a:defRPr>
+            </a:pPr>
+            <a:r>
+              <a:t>•  Spearman (zużycie–temp.): ρ = 0.182 — zależność monotoniczna</a:t>
+            </a:r>
+          </a:p>
+        </p:txBody>
+      </p:sp>
+      <p:sp>
+        <p:nvSpPr>
+          <p:cNvPr id="10" name="Rectangle 9"/>
+          <p:cNvSpPr/>
+          <p:nvPr/>
+        </p:nvSpPr>
+        <p:spPr>
+          <a:xfrm>
+            <a:off x="0" y="6537960"/>
+            <a:ext cx="12191695" cy="320040"/>
+          </a:xfrm>
+          <a:prstGeom prst="rect">
+            <a:avLst/>
+          </a:prstGeom>
+          <a:solidFill>
+            <a:srgbClr val="ECEFF1"/>
+          </a:solidFill>
+          <a:ln>
+            <a:noFill/>
+          </a:ln>
+        </p:spPr>
+        <p:style>
+          <a:lnRef idx="1">
+            <a:schemeClr val="accent1"/>
+          </a:lnRef>
+          <a:fillRef idx="3">
+            <a:schemeClr val="accent1"/>
+          </a:fillRef>
+          <a:effectRef idx="2">
+            <a:schemeClr val="accent1"/>
+          </a:effectRef>
+          <a:fontRef idx="minor">
+            <a:schemeClr val="lt1"/>
+          </a:fontRef>
+        </p:style>
+        <p:txBody>
+          <a:bodyPr rtlCol="0" anchor="ctr"/>
+          <a:lstStyle/>
+          <a:p>
+            <a:pPr algn="ctr"/>
+          </a:p>
+        </p:txBody>
+      </p:sp>
+      <p:sp>
+        <p:nvSpPr>
+          <p:cNvPr id="11" name="TextBox 10"/>
+          <p:cNvSpPr txBox="1"/>
+          <p:nvPr/>
+        </p:nvSpPr>
+        <p:spPr>
+          <a:xfrm>
+            <a:off x="457200" y="6565392"/>
+            <a:ext cx="7315200" cy="256032"/>
+          </a:xfrm>
+          <a:prstGeom prst="rect">
+            <a:avLst/>
+          </a:prstGeom>
+          <a:noFill/>
+        </p:spPr>
+        <p:txBody>
+          <a:bodyPr wrap="none">
+            <a:spAutoFit/>
+          </a:bodyPr>
+          <a:lstStyle/>
+          <a:p>
+            <a:pPr>
+              <a:defRPr sz="900">
+                <a:solidFill>
+                  <a:srgbClr val="607D8B"/>
+                </a:solidFill>
+              </a:defRPr>
+            </a:pPr>
+            <a:r>
+              <a:t>Analiza i wizualizacja danych – Pandas, DataFrame  •  Merito Chorzów</a:t>
+            </a:r>
+          </a:p>
+        </p:txBody>
+      </p:sp>
+      <p:sp>
+        <p:nvSpPr>
+          <p:cNvPr id="12" name="TextBox 11"/>
+          <p:cNvSpPr txBox="1"/>
+          <p:nvPr/>
+        </p:nvSpPr>
+        <p:spPr>
+          <a:xfrm>
+            <a:off x="11094415" y="6565392"/>
+            <a:ext cx="731520" cy="256032"/>
+          </a:xfrm>
+          <a:prstGeom prst="rect">
+            <a:avLst/>
+          </a:prstGeom>
+          <a:noFill/>
+        </p:spPr>
+        <p:txBody>
+          <a:bodyPr wrap="none">
+            <a:spAutoFit/>
+          </a:bodyPr>
+          <a:lstStyle/>
+          <a:p>
+            <a:pPr algn="r">
+              <a:defRPr sz="900">
+                <a:solidFill>
+                  <a:srgbClr val="607D8B"/>
+                </a:solidFill>
+              </a:defRPr>
+            </a:pPr>
+            <a:r>
+              <a:t>18</a:t>
             </a:r>
           </a:p>
         </p:txBody>
@@ -3873,29 +6914,29 @@
         </p:nvSpPr>
         <p:spPr>
           <a:xfrm>
-            <a:off x="502920" y="201168"/>
-            <a:ext cx="10972800" cy="502920"/>
-          </a:xfrm>
-          <a:prstGeom prst="rect">
-            <a:avLst/>
-          </a:prstGeom>
-          <a:noFill/>
-        </p:spPr>
-        <p:txBody>
-          <a:bodyPr wrap="square">
-            <a:spAutoFit/>
-          </a:bodyPr>
-          <a:lstStyle/>
-          <a:p>
-            <a:pPr algn="l">
-              <a:defRPr sz="2600" b="1">
+            <a:off x="502920" y="182880"/>
+            <a:ext cx="10972800" cy="640080"/>
+          </a:xfrm>
+          <a:prstGeom prst="rect">
+            <a:avLst/>
+          </a:prstGeom>
+          <a:noFill/>
+        </p:spPr>
+        <p:txBody>
+          <a:bodyPr wrap="none">
+            <a:spAutoFit/>
+          </a:bodyPr>
+          <a:lstStyle/>
+          <a:p>
+            <a:pPr>
+              <a:defRPr sz="2800" b="1">
                 <a:solidFill>
                   <a:srgbClr val="FFFFFF"/>
                 </a:solidFill>
               </a:defRPr>
             </a:pPr>
             <a:r>
-              <a:t>Cel projektu</a:t>
+              <a:t>Agenda prezentacji</a:t>
             </a:r>
           </a:p>
         </p:txBody>
@@ -3908,8 +6949,8 @@
         </p:nvSpPr>
         <p:spPr>
           <a:xfrm>
-            <a:off x="777240" y="1143000"/>
-            <a:ext cx="10515600" cy="502920"/>
+            <a:off x="685800" y="1143000"/>
+            <a:ext cx="10789920" cy="502920"/>
           </a:xfrm>
           <a:prstGeom prst="rect">
             <a:avLst/>
@@ -3930,7 +6971,7 @@
               </a:defRPr>
             </a:pPr>
             <a:r>
-              <a:t>•  Analiza godzinowego zapotrzebowania na energię w Hiszpanii (2015–2018)</a:t>
+              <a:t>•  Cel i kontekst biznesowy analizy</a:t>
             </a:r>
           </a:p>
         </p:txBody>
@@ -3943,8 +6984,8 @@
         </p:nvSpPr>
         <p:spPr>
           <a:xfrm>
-            <a:off x="777240" y="1618488"/>
-            <a:ext cx="10515600" cy="502920"/>
+            <a:off x="685800" y="1581912"/>
+            <a:ext cx="10789920" cy="502920"/>
           </a:xfrm>
           <a:prstGeom prst="rect">
             <a:avLst/>
@@ -3965,7 +7006,7 @@
               </a:defRPr>
             </a:pPr>
             <a:r>
-              <a:t>•  Identyfikacja wzorców sezonowych, dobowych i tygodniowych</a:t>
+              <a:t>•  Opis publicznego zbioru danych</a:t>
             </a:r>
           </a:p>
         </p:txBody>
@@ -3978,8 +7019,8 @@
         </p:nvSpPr>
         <p:spPr>
           <a:xfrm>
-            <a:off x="777240" y="2093976"/>
-            <a:ext cx="10515600" cy="502920"/>
+            <a:off x="685800" y="2020824"/>
+            <a:ext cx="10789920" cy="502920"/>
           </a:xfrm>
           <a:prstGeom prst="rect">
             <a:avLst/>
@@ -4000,7 +7041,7 @@
               </a:defRPr>
             </a:pPr>
             <a:r>
-              <a:t>•  Badanie wpływu pogody i miksu energetycznego (OZE vs paliwa)</a:t>
+              <a:t>•  Pre-processing w Pandas</a:t>
             </a:r>
           </a:p>
         </p:txBody>
@@ -4013,8 +7054,8 @@
         </p:nvSpPr>
         <p:spPr>
           <a:xfrm>
-            <a:off x="777240" y="2569464"/>
-            <a:ext cx="10515600" cy="502920"/>
+            <a:off x="685800" y="2459736"/>
+            <a:ext cx="10789920" cy="502920"/>
           </a:xfrm>
           <a:prstGeom prst="rect">
             <a:avLst/>
@@ -4035,7 +7076,2890 @@
               </a:defRPr>
             </a:pPr>
             <a:r>
-              <a:t>•  Prognoza zużycia — regresja liniowa (baseline)</a:t>
+              <a:t>•  Analiza wizualna i interaktywny dashboard</a:t>
+            </a:r>
+          </a:p>
+        </p:txBody>
+      </p:sp>
+      <p:sp>
+        <p:nvSpPr>
+          <p:cNvPr id="8" name="TextBox 7"/>
+          <p:cNvSpPr txBox="1"/>
+          <p:nvPr/>
+        </p:nvSpPr>
+        <p:spPr>
+          <a:xfrm>
+            <a:off x="685800" y="2898648"/>
+            <a:ext cx="10789920" cy="502920"/>
+          </a:xfrm>
+          <a:prstGeom prst="rect">
+            <a:avLst/>
+          </a:prstGeom>
+          <a:noFill/>
+        </p:spPr>
+        <p:txBody>
+          <a:bodyPr wrap="square">
+            <a:spAutoFit/>
+          </a:bodyPr>
+          <a:lstStyle/>
+          <a:p>
+            <a:pPr algn="l">
+              <a:defRPr sz="1700" b="0">
+                <a:solidFill>
+                  <a:srgbClr val="263238"/>
+                </a:solidFill>
+              </a:defRPr>
+            </a:pPr>
+            <a:r>
+              <a:t>•  Statystyka, testy hipotez, szeregi czasowe</a:t>
+            </a:r>
+          </a:p>
+        </p:txBody>
+      </p:sp>
+      <p:sp>
+        <p:nvSpPr>
+          <p:cNvPr id="9" name="TextBox 8"/>
+          <p:cNvSpPr txBox="1"/>
+          <p:nvPr/>
+        </p:nvSpPr>
+        <p:spPr>
+          <a:xfrm>
+            <a:off x="685800" y="3337560"/>
+            <a:ext cx="10789920" cy="502920"/>
+          </a:xfrm>
+          <a:prstGeom prst="rect">
+            <a:avLst/>
+          </a:prstGeom>
+          <a:noFill/>
+        </p:spPr>
+        <p:txBody>
+          <a:bodyPr wrap="square">
+            <a:spAutoFit/>
+          </a:bodyPr>
+          <a:lstStyle/>
+          <a:p>
+            <a:pPr algn="l">
+              <a:defRPr sz="1700" b="0">
+                <a:solidFill>
+                  <a:srgbClr val="263238"/>
+                </a:solidFill>
+              </a:defRPr>
+            </a:pPr>
+            <a:r>
+              <a:t>•  Model predykcyjny i wnioski</a:t>
+            </a:r>
+          </a:p>
+        </p:txBody>
+      </p:sp>
+      <p:sp>
+        <p:nvSpPr>
+          <p:cNvPr id="10" name="Rectangle 9"/>
+          <p:cNvSpPr/>
+          <p:nvPr/>
+        </p:nvSpPr>
+        <p:spPr>
+          <a:xfrm>
+            <a:off x="0" y="6537960"/>
+            <a:ext cx="12191695" cy="320040"/>
+          </a:xfrm>
+          <a:prstGeom prst="rect">
+            <a:avLst/>
+          </a:prstGeom>
+          <a:solidFill>
+            <a:srgbClr val="ECEFF1"/>
+          </a:solidFill>
+          <a:ln>
+            <a:noFill/>
+          </a:ln>
+        </p:spPr>
+        <p:style>
+          <a:lnRef idx="1">
+            <a:schemeClr val="accent1"/>
+          </a:lnRef>
+          <a:fillRef idx="3">
+            <a:schemeClr val="accent1"/>
+          </a:fillRef>
+          <a:effectRef idx="2">
+            <a:schemeClr val="accent1"/>
+          </a:effectRef>
+          <a:fontRef idx="minor">
+            <a:schemeClr val="lt1"/>
+          </a:fontRef>
+        </p:style>
+        <p:txBody>
+          <a:bodyPr rtlCol="0" anchor="ctr"/>
+          <a:lstStyle/>
+          <a:p>
+            <a:pPr algn="ctr"/>
+          </a:p>
+        </p:txBody>
+      </p:sp>
+      <p:sp>
+        <p:nvSpPr>
+          <p:cNvPr id="11" name="TextBox 10"/>
+          <p:cNvSpPr txBox="1"/>
+          <p:nvPr/>
+        </p:nvSpPr>
+        <p:spPr>
+          <a:xfrm>
+            <a:off x="457200" y="6565392"/>
+            <a:ext cx="7315200" cy="256032"/>
+          </a:xfrm>
+          <a:prstGeom prst="rect">
+            <a:avLst/>
+          </a:prstGeom>
+          <a:noFill/>
+        </p:spPr>
+        <p:txBody>
+          <a:bodyPr wrap="none">
+            <a:spAutoFit/>
+          </a:bodyPr>
+          <a:lstStyle/>
+          <a:p>
+            <a:pPr>
+              <a:defRPr sz="900">
+                <a:solidFill>
+                  <a:srgbClr val="607D8B"/>
+                </a:solidFill>
+              </a:defRPr>
+            </a:pPr>
+            <a:r>
+              <a:t>Analiza i wizualizacja danych – Pandas, DataFrame  •  Merito Chorzów</a:t>
+            </a:r>
+          </a:p>
+        </p:txBody>
+      </p:sp>
+      <p:sp>
+        <p:nvSpPr>
+          <p:cNvPr id="12" name="TextBox 11"/>
+          <p:cNvSpPr txBox="1"/>
+          <p:nvPr/>
+        </p:nvSpPr>
+        <p:spPr>
+          <a:xfrm>
+            <a:off x="11094415" y="6565392"/>
+            <a:ext cx="731520" cy="256032"/>
+          </a:xfrm>
+          <a:prstGeom prst="rect">
+            <a:avLst/>
+          </a:prstGeom>
+          <a:noFill/>
+        </p:spPr>
+        <p:txBody>
+          <a:bodyPr wrap="none">
+            <a:spAutoFit/>
+          </a:bodyPr>
+          <a:lstStyle/>
+          <a:p>
+            <a:pPr algn="r">
+              <a:defRPr sz="900">
+                <a:solidFill>
+                  <a:srgbClr val="607D8B"/>
+                </a:solidFill>
+              </a:defRPr>
+            </a:pPr>
+            <a:r>
+              <a:t>1</a:t>
+            </a:r>
+          </a:p>
+        </p:txBody>
+      </p:sp>
+    </p:spTree>
+  </p:cSld>
+  <p:clrMapOvr>
+    <a:masterClrMapping/>
+  </p:clrMapOvr>
+</p:sld>
+</file>
+
+<file path=ppt/slides/slide20.xml><?xml version="1.0" encoding="utf-8"?>
+<p:sld xmlns:a="http://schemas.openxmlformats.org/drawingml/2006/main" xmlns:p="http://schemas.openxmlformats.org/presentationml/2006/main" xmlns:r="http://schemas.openxmlformats.org/officeDocument/2006/relationships">
+  <p:cSld>
+    <p:spTree>
+      <p:nvGrpSpPr>
+        <p:cNvPr id="1" name=""/>
+        <p:cNvGrpSpPr/>
+        <p:nvPr/>
+      </p:nvGrpSpPr>
+      <p:grpSpPr/>
+      <p:sp>
+        <p:nvSpPr>
+          <p:cNvPr id="2" name="Rectangle 1"/>
+          <p:cNvSpPr/>
+          <p:nvPr/>
+        </p:nvSpPr>
+        <p:spPr>
+          <a:xfrm>
+            <a:off x="0" y="0"/>
+            <a:ext cx="12191695" cy="960120"/>
+          </a:xfrm>
+          <a:prstGeom prst="rect">
+            <a:avLst/>
+          </a:prstGeom>
+          <a:solidFill>
+            <a:srgbClr val="1565C0"/>
+          </a:solidFill>
+          <a:ln>
+            <a:noFill/>
+          </a:ln>
+        </p:spPr>
+        <p:style>
+          <a:lnRef idx="1">
+            <a:schemeClr val="accent1"/>
+          </a:lnRef>
+          <a:fillRef idx="3">
+            <a:schemeClr val="accent1"/>
+          </a:fillRef>
+          <a:effectRef idx="2">
+            <a:schemeClr val="accent1"/>
+          </a:effectRef>
+          <a:fontRef idx="minor">
+            <a:schemeClr val="lt1"/>
+          </a:fontRef>
+        </p:style>
+        <p:txBody>
+          <a:bodyPr rtlCol="0" anchor="ctr"/>
+          <a:lstStyle/>
+          <a:p>
+            <a:pPr algn="ctr"/>
+          </a:p>
+        </p:txBody>
+      </p:sp>
+      <p:sp>
+        <p:nvSpPr>
+          <p:cNvPr id="3" name="TextBox 2"/>
+          <p:cNvSpPr txBox="1"/>
+          <p:nvPr/>
+        </p:nvSpPr>
+        <p:spPr>
+          <a:xfrm>
+            <a:off x="502920" y="182880"/>
+            <a:ext cx="10972800" cy="640080"/>
+          </a:xfrm>
+          <a:prstGeom prst="rect">
+            <a:avLst/>
+          </a:prstGeom>
+          <a:noFill/>
+        </p:spPr>
+        <p:txBody>
+          <a:bodyPr wrap="none">
+            <a:spAutoFit/>
+          </a:bodyPr>
+          <a:lstStyle/>
+          <a:p>
+            <a:pPr>
+              <a:defRPr sz="2800" b="1">
+                <a:solidFill>
+                  <a:srgbClr val="FFFFFF"/>
+                </a:solidFill>
+              </a:defRPr>
+            </a:pPr>
+            <a:r>
+              <a:t>Weekend vs dzień roboczy</a:t>
+            </a:r>
+          </a:p>
+        </p:txBody>
+      </p:sp>
+      <p:pic>
+        <p:nvPicPr>
+          <p:cNvPr id="4" name="Picture 3" descr="07_weekend_box.png"/>
+          <p:cNvPicPr>
+            <a:picLocks noChangeAspect="1"/>
+          </p:cNvPicPr>
+          <p:nvPr/>
+        </p:nvPicPr>
+        <p:blipFill>
+          <a:blip r:embed="rId2"/>
+          <a:stretch>
+            <a:fillRect/>
+          </a:stretch>
+        </p:blipFill>
+        <p:spPr>
+          <a:xfrm>
+            <a:off x="594360" y="1097280"/>
+            <a:ext cx="10972800" cy="6977849"/>
+          </a:xfrm>
+          <a:prstGeom prst="rect">
+            <a:avLst/>
+          </a:prstGeom>
+        </p:spPr>
+      </p:pic>
+      <p:sp>
+        <p:nvSpPr>
+          <p:cNvPr id="5" name="Rectangle 4"/>
+          <p:cNvSpPr/>
+          <p:nvPr/>
+        </p:nvSpPr>
+        <p:spPr>
+          <a:xfrm>
+            <a:off x="594360" y="5989320"/>
+            <a:ext cx="10972800" cy="502920"/>
+          </a:xfrm>
+          <a:prstGeom prst="rect">
+            <a:avLst/>
+          </a:prstGeom>
+          <a:solidFill>
+            <a:srgbClr val="ECEFF1"/>
+          </a:solidFill>
+          <a:ln>
+            <a:noFill/>
+          </a:ln>
+        </p:spPr>
+        <p:style>
+          <a:lnRef idx="1">
+            <a:schemeClr val="accent1"/>
+          </a:lnRef>
+          <a:fillRef idx="3">
+            <a:schemeClr val="accent1"/>
+          </a:fillRef>
+          <a:effectRef idx="2">
+            <a:schemeClr val="accent1"/>
+          </a:effectRef>
+          <a:fontRef idx="minor">
+            <a:schemeClr val="lt1"/>
+          </a:fontRef>
+        </p:style>
+        <p:txBody>
+          <a:bodyPr rtlCol="0" anchor="ctr"/>
+          <a:lstStyle/>
+          <a:p>
+            <a:pPr algn="ctr"/>
+          </a:p>
+        </p:txBody>
+      </p:sp>
+      <p:sp>
+        <p:nvSpPr>
+          <p:cNvPr id="6" name="TextBox 5"/>
+          <p:cNvSpPr txBox="1"/>
+          <p:nvPr/>
+        </p:nvSpPr>
+        <p:spPr>
+          <a:xfrm>
+            <a:off x="777240" y="6053328"/>
+            <a:ext cx="10607040" cy="411480"/>
+          </a:xfrm>
+          <a:prstGeom prst="rect">
+            <a:avLst/>
+          </a:prstGeom>
+          <a:noFill/>
+        </p:spPr>
+        <p:txBody>
+          <a:bodyPr wrap="square">
+            <a:spAutoFit/>
+          </a:bodyPr>
+          <a:lstStyle/>
+          <a:p>
+            <a:pPr algn="ctr">
+              <a:defRPr sz="1200" b="0">
+                <a:solidFill>
+                  <a:srgbClr val="263238"/>
+                </a:solidFill>
+              </a:defRPr>
+            </a:pPr>
+            <a:r>
+              <a:t>Boxplot potwierdza niższe zużycie i mniejszą zmienność w weekendy.</a:t>
+            </a:r>
+          </a:p>
+        </p:txBody>
+      </p:sp>
+      <p:sp>
+        <p:nvSpPr>
+          <p:cNvPr id="7" name="Rectangle 6"/>
+          <p:cNvSpPr/>
+          <p:nvPr/>
+        </p:nvSpPr>
+        <p:spPr>
+          <a:xfrm>
+            <a:off x="0" y="6537960"/>
+            <a:ext cx="12191695" cy="320040"/>
+          </a:xfrm>
+          <a:prstGeom prst="rect">
+            <a:avLst/>
+          </a:prstGeom>
+          <a:solidFill>
+            <a:srgbClr val="ECEFF1"/>
+          </a:solidFill>
+          <a:ln>
+            <a:noFill/>
+          </a:ln>
+        </p:spPr>
+        <p:style>
+          <a:lnRef idx="1">
+            <a:schemeClr val="accent1"/>
+          </a:lnRef>
+          <a:fillRef idx="3">
+            <a:schemeClr val="accent1"/>
+          </a:fillRef>
+          <a:effectRef idx="2">
+            <a:schemeClr val="accent1"/>
+          </a:effectRef>
+          <a:fontRef idx="minor">
+            <a:schemeClr val="lt1"/>
+          </a:fontRef>
+        </p:style>
+        <p:txBody>
+          <a:bodyPr rtlCol="0" anchor="ctr"/>
+          <a:lstStyle/>
+          <a:p>
+            <a:pPr algn="ctr"/>
+          </a:p>
+        </p:txBody>
+      </p:sp>
+      <p:sp>
+        <p:nvSpPr>
+          <p:cNvPr id="8" name="TextBox 7"/>
+          <p:cNvSpPr txBox="1"/>
+          <p:nvPr/>
+        </p:nvSpPr>
+        <p:spPr>
+          <a:xfrm>
+            <a:off x="457200" y="6565392"/>
+            <a:ext cx="7315200" cy="256032"/>
+          </a:xfrm>
+          <a:prstGeom prst="rect">
+            <a:avLst/>
+          </a:prstGeom>
+          <a:noFill/>
+        </p:spPr>
+        <p:txBody>
+          <a:bodyPr wrap="none">
+            <a:spAutoFit/>
+          </a:bodyPr>
+          <a:lstStyle/>
+          <a:p>
+            <a:pPr>
+              <a:defRPr sz="900">
+                <a:solidFill>
+                  <a:srgbClr val="607D8B"/>
+                </a:solidFill>
+              </a:defRPr>
+            </a:pPr>
+            <a:r>
+              <a:t>Analiza i wizualizacja danych – Pandas, DataFrame  •  Merito Chorzów</a:t>
+            </a:r>
+          </a:p>
+        </p:txBody>
+      </p:sp>
+      <p:sp>
+        <p:nvSpPr>
+          <p:cNvPr id="9" name="TextBox 8"/>
+          <p:cNvSpPr txBox="1"/>
+          <p:nvPr/>
+        </p:nvSpPr>
+        <p:spPr>
+          <a:xfrm>
+            <a:off x="11094415" y="6565392"/>
+            <a:ext cx="731520" cy="256032"/>
+          </a:xfrm>
+          <a:prstGeom prst="rect">
+            <a:avLst/>
+          </a:prstGeom>
+          <a:noFill/>
+        </p:spPr>
+        <p:txBody>
+          <a:bodyPr wrap="none">
+            <a:spAutoFit/>
+          </a:bodyPr>
+          <a:lstStyle/>
+          <a:p>
+            <a:pPr algn="r">
+              <a:defRPr sz="900">
+                <a:solidFill>
+                  <a:srgbClr val="607D8B"/>
+                </a:solidFill>
+              </a:defRPr>
+            </a:pPr>
+            <a:r>
+              <a:t>19</a:t>
+            </a:r>
+          </a:p>
+        </p:txBody>
+      </p:sp>
+    </p:spTree>
+  </p:cSld>
+  <p:clrMapOvr>
+    <a:masterClrMapping/>
+  </p:clrMapOvr>
+</p:sld>
+</file>
+
+<file path=ppt/slides/slide21.xml><?xml version="1.0" encoding="utf-8"?>
+<p:sld xmlns:a="http://schemas.openxmlformats.org/drawingml/2006/main" xmlns:p="http://schemas.openxmlformats.org/presentationml/2006/main" xmlns:r="http://schemas.openxmlformats.org/officeDocument/2006/relationships">
+  <p:cSld>
+    <p:spTree>
+      <p:nvGrpSpPr>
+        <p:cNvPr id="1" name=""/>
+        <p:cNvGrpSpPr/>
+        <p:nvPr/>
+      </p:nvGrpSpPr>
+      <p:grpSpPr/>
+      <p:sp>
+        <p:nvSpPr>
+          <p:cNvPr id="2" name="Rectangle 1"/>
+          <p:cNvSpPr/>
+          <p:nvPr/>
+        </p:nvSpPr>
+        <p:spPr>
+          <a:xfrm>
+            <a:off x="0" y="0"/>
+            <a:ext cx="12191695" cy="6858000"/>
+          </a:xfrm>
+          <a:prstGeom prst="rect">
+            <a:avLst/>
+          </a:prstGeom>
+          <a:solidFill>
+            <a:srgbClr val="263238"/>
+          </a:solidFill>
+          <a:ln>
+            <a:noFill/>
+          </a:ln>
+        </p:spPr>
+        <p:style>
+          <a:lnRef idx="1">
+            <a:schemeClr val="accent1"/>
+          </a:lnRef>
+          <a:fillRef idx="3">
+            <a:schemeClr val="accent1"/>
+          </a:fillRef>
+          <a:effectRef idx="2">
+            <a:schemeClr val="accent1"/>
+          </a:effectRef>
+          <a:fontRef idx="minor">
+            <a:schemeClr val="lt1"/>
+          </a:fontRef>
+        </p:style>
+        <p:txBody>
+          <a:bodyPr rtlCol="0" anchor="ctr"/>
+          <a:lstStyle/>
+          <a:p>
+            <a:pPr algn="ctr"/>
+          </a:p>
+        </p:txBody>
+      </p:sp>
+      <p:sp>
+        <p:nvSpPr>
+          <p:cNvPr id="3" name="TextBox 2"/>
+          <p:cNvSpPr txBox="1"/>
+          <p:nvPr/>
+        </p:nvSpPr>
+        <p:spPr>
+          <a:xfrm>
+            <a:off x="822960" y="2011680"/>
+            <a:ext cx="1828800" cy="1097280"/>
+          </a:xfrm>
+          <a:prstGeom prst="rect">
+            <a:avLst/>
+          </a:prstGeom>
+          <a:noFill/>
+        </p:spPr>
+        <p:txBody>
+          <a:bodyPr wrap="square">
+            <a:spAutoFit/>
+          </a:bodyPr>
+          <a:lstStyle/>
+          <a:p>
+            <a:pPr algn="l">
+              <a:defRPr sz="7200" b="1">
+                <a:solidFill>
+                  <a:srgbClr val="2E7D32"/>
+                </a:solidFill>
+              </a:defRPr>
+            </a:pPr>
+            <a:r>
+              <a:t>05</a:t>
+            </a:r>
+          </a:p>
+        </p:txBody>
+      </p:sp>
+      <p:sp>
+        <p:nvSpPr>
+          <p:cNvPr id="4" name="TextBox 3"/>
+          <p:cNvSpPr txBox="1"/>
+          <p:nvPr/>
+        </p:nvSpPr>
+        <p:spPr>
+          <a:xfrm>
+            <a:off x="822960" y="3200400"/>
+            <a:ext cx="10058400" cy="914400"/>
+          </a:xfrm>
+          <a:prstGeom prst="rect">
+            <a:avLst/>
+          </a:prstGeom>
+          <a:noFill/>
+        </p:spPr>
+        <p:txBody>
+          <a:bodyPr wrap="square">
+            <a:spAutoFit/>
+          </a:bodyPr>
+          <a:lstStyle/>
+          <a:p>
+            <a:pPr algn="l">
+              <a:defRPr sz="3600" b="1">
+                <a:solidFill>
+                  <a:srgbClr val="FFFFFF"/>
+                </a:solidFill>
+              </a:defRPr>
+            </a:pPr>
+            <a:r>
+              <a:t>Analiza zaawansowana</a:t>
+            </a:r>
+          </a:p>
+        </p:txBody>
+      </p:sp>
+      <p:sp>
+        <p:nvSpPr>
+          <p:cNvPr id="5" name="Rectangle 4"/>
+          <p:cNvSpPr/>
+          <p:nvPr/>
+        </p:nvSpPr>
+        <p:spPr>
+          <a:xfrm>
+            <a:off x="0" y="6537960"/>
+            <a:ext cx="12191695" cy="320040"/>
+          </a:xfrm>
+          <a:prstGeom prst="rect">
+            <a:avLst/>
+          </a:prstGeom>
+          <a:solidFill>
+            <a:srgbClr val="ECEFF1"/>
+          </a:solidFill>
+          <a:ln>
+            <a:noFill/>
+          </a:ln>
+        </p:spPr>
+        <p:style>
+          <a:lnRef idx="1">
+            <a:schemeClr val="accent1"/>
+          </a:lnRef>
+          <a:fillRef idx="3">
+            <a:schemeClr val="accent1"/>
+          </a:fillRef>
+          <a:effectRef idx="2">
+            <a:schemeClr val="accent1"/>
+          </a:effectRef>
+          <a:fontRef idx="minor">
+            <a:schemeClr val="lt1"/>
+          </a:fontRef>
+        </p:style>
+        <p:txBody>
+          <a:bodyPr rtlCol="0" anchor="ctr"/>
+          <a:lstStyle/>
+          <a:p>
+            <a:pPr algn="ctr"/>
+          </a:p>
+        </p:txBody>
+      </p:sp>
+      <p:sp>
+        <p:nvSpPr>
+          <p:cNvPr id="6" name="TextBox 5"/>
+          <p:cNvSpPr txBox="1"/>
+          <p:nvPr/>
+        </p:nvSpPr>
+        <p:spPr>
+          <a:xfrm>
+            <a:off x="457200" y="6565392"/>
+            <a:ext cx="7315200" cy="256032"/>
+          </a:xfrm>
+          <a:prstGeom prst="rect">
+            <a:avLst/>
+          </a:prstGeom>
+          <a:noFill/>
+        </p:spPr>
+        <p:txBody>
+          <a:bodyPr wrap="none">
+            <a:spAutoFit/>
+          </a:bodyPr>
+          <a:lstStyle/>
+          <a:p>
+            <a:pPr>
+              <a:defRPr sz="900">
+                <a:solidFill>
+                  <a:srgbClr val="607D8B"/>
+                </a:solidFill>
+              </a:defRPr>
+            </a:pPr>
+            <a:r>
+              <a:t>Analiza i wizualizacja danych – Pandas, DataFrame  •  Merito Chorzów</a:t>
+            </a:r>
+          </a:p>
+        </p:txBody>
+      </p:sp>
+      <p:sp>
+        <p:nvSpPr>
+          <p:cNvPr id="7" name="TextBox 6"/>
+          <p:cNvSpPr txBox="1"/>
+          <p:nvPr/>
+        </p:nvSpPr>
+        <p:spPr>
+          <a:xfrm>
+            <a:off x="11094415" y="6565392"/>
+            <a:ext cx="731520" cy="256032"/>
+          </a:xfrm>
+          <a:prstGeom prst="rect">
+            <a:avLst/>
+          </a:prstGeom>
+          <a:noFill/>
+        </p:spPr>
+        <p:txBody>
+          <a:bodyPr wrap="none">
+            <a:spAutoFit/>
+          </a:bodyPr>
+          <a:lstStyle/>
+          <a:p>
+            <a:pPr algn="r">
+              <a:defRPr sz="900">
+                <a:solidFill>
+                  <a:srgbClr val="607D8B"/>
+                </a:solidFill>
+              </a:defRPr>
+            </a:pPr>
+            <a:r>
+              <a:t>20</a:t>
+            </a:r>
+          </a:p>
+        </p:txBody>
+      </p:sp>
+    </p:spTree>
+  </p:cSld>
+  <p:clrMapOvr>
+    <a:masterClrMapping/>
+  </p:clrMapOvr>
+</p:sld>
+</file>
+
+<file path=ppt/slides/slide22.xml><?xml version="1.0" encoding="utf-8"?>
+<p:sld xmlns:a="http://schemas.openxmlformats.org/drawingml/2006/main" xmlns:p="http://schemas.openxmlformats.org/presentationml/2006/main" xmlns:r="http://schemas.openxmlformats.org/officeDocument/2006/relationships">
+  <p:cSld>
+    <p:spTree>
+      <p:nvGrpSpPr>
+        <p:cNvPr id="1" name=""/>
+        <p:cNvGrpSpPr/>
+        <p:nvPr/>
+      </p:nvGrpSpPr>
+      <p:grpSpPr/>
+      <p:sp>
+        <p:nvSpPr>
+          <p:cNvPr id="2" name="Rectangle 1"/>
+          <p:cNvSpPr/>
+          <p:nvPr/>
+        </p:nvSpPr>
+        <p:spPr>
+          <a:xfrm>
+            <a:off x="0" y="0"/>
+            <a:ext cx="12191695" cy="960120"/>
+          </a:xfrm>
+          <a:prstGeom prst="rect">
+            <a:avLst/>
+          </a:prstGeom>
+          <a:solidFill>
+            <a:srgbClr val="1565C0"/>
+          </a:solidFill>
+          <a:ln>
+            <a:noFill/>
+          </a:ln>
+        </p:spPr>
+        <p:style>
+          <a:lnRef idx="1">
+            <a:schemeClr val="accent1"/>
+          </a:lnRef>
+          <a:fillRef idx="3">
+            <a:schemeClr val="accent1"/>
+          </a:fillRef>
+          <a:effectRef idx="2">
+            <a:schemeClr val="accent1"/>
+          </a:effectRef>
+          <a:fontRef idx="minor">
+            <a:schemeClr val="lt1"/>
+          </a:fontRef>
+        </p:style>
+        <p:txBody>
+          <a:bodyPr rtlCol="0" anchor="ctr"/>
+          <a:lstStyle/>
+          <a:p>
+            <a:pPr algn="ctr"/>
+          </a:p>
+        </p:txBody>
+      </p:sp>
+      <p:sp>
+        <p:nvSpPr>
+          <p:cNvPr id="3" name="TextBox 2"/>
+          <p:cNvSpPr txBox="1"/>
+          <p:nvPr/>
+        </p:nvSpPr>
+        <p:spPr>
+          <a:xfrm>
+            <a:off x="502920" y="182880"/>
+            <a:ext cx="10972800" cy="640080"/>
+          </a:xfrm>
+          <a:prstGeom prst="rect">
+            <a:avLst/>
+          </a:prstGeom>
+          <a:noFill/>
+        </p:spPr>
+        <p:txBody>
+          <a:bodyPr wrap="none">
+            <a:spAutoFit/>
+          </a:bodyPr>
+          <a:lstStyle/>
+          <a:p>
+            <a:pPr>
+              <a:defRPr sz="2800" b="1">
+                <a:solidFill>
+                  <a:srgbClr val="FFFFFF"/>
+                </a:solidFill>
+              </a:defRPr>
+            </a:pPr>
+            <a:r>
+              <a:t>Szereg czasowy — dekompozycja</a:t>
+            </a:r>
+          </a:p>
+        </p:txBody>
+      </p:sp>
+      <p:pic>
+        <p:nvPicPr>
+          <p:cNvPr id="4" name="Picture 3" descr="08_dekompozycja.png"/>
+          <p:cNvPicPr>
+            <a:picLocks noChangeAspect="1"/>
+          </p:cNvPicPr>
+          <p:nvPr/>
+        </p:nvPicPr>
+        <p:blipFill>
+          <a:blip r:embed="rId2"/>
+          <a:stretch>
+            <a:fillRect/>
+          </a:stretch>
+        </p:blipFill>
+        <p:spPr>
+          <a:xfrm>
+            <a:off x="594360" y="1097280"/>
+            <a:ext cx="10972800" cy="8192575"/>
+          </a:xfrm>
+          <a:prstGeom prst="rect">
+            <a:avLst/>
+          </a:prstGeom>
+        </p:spPr>
+      </p:pic>
+      <p:sp>
+        <p:nvSpPr>
+          <p:cNvPr id="5" name="Rectangle 4"/>
+          <p:cNvSpPr/>
+          <p:nvPr/>
+        </p:nvSpPr>
+        <p:spPr>
+          <a:xfrm>
+            <a:off x="594360" y="5989320"/>
+            <a:ext cx="10972800" cy="502920"/>
+          </a:xfrm>
+          <a:prstGeom prst="rect">
+            <a:avLst/>
+          </a:prstGeom>
+          <a:solidFill>
+            <a:srgbClr val="ECEFF1"/>
+          </a:solidFill>
+          <a:ln>
+            <a:noFill/>
+          </a:ln>
+        </p:spPr>
+        <p:style>
+          <a:lnRef idx="1">
+            <a:schemeClr val="accent1"/>
+          </a:lnRef>
+          <a:fillRef idx="3">
+            <a:schemeClr val="accent1"/>
+          </a:fillRef>
+          <a:effectRef idx="2">
+            <a:schemeClr val="accent1"/>
+          </a:effectRef>
+          <a:fontRef idx="minor">
+            <a:schemeClr val="lt1"/>
+          </a:fontRef>
+        </p:style>
+        <p:txBody>
+          <a:bodyPr rtlCol="0" anchor="ctr"/>
+          <a:lstStyle/>
+          <a:p>
+            <a:pPr algn="ctr"/>
+          </a:p>
+        </p:txBody>
+      </p:sp>
+      <p:sp>
+        <p:nvSpPr>
+          <p:cNvPr id="6" name="TextBox 5"/>
+          <p:cNvSpPr txBox="1"/>
+          <p:nvPr/>
+        </p:nvSpPr>
+        <p:spPr>
+          <a:xfrm>
+            <a:off x="777240" y="6053328"/>
+            <a:ext cx="10607040" cy="411480"/>
+          </a:xfrm>
+          <a:prstGeom prst="rect">
+            <a:avLst/>
+          </a:prstGeom>
+          <a:noFill/>
+        </p:spPr>
+        <p:txBody>
+          <a:bodyPr wrap="square">
+            <a:spAutoFit/>
+          </a:bodyPr>
+          <a:lstStyle/>
+          <a:p>
+            <a:pPr algn="ctr">
+              <a:defRPr sz="1200" b="0">
+                <a:solidFill>
+                  <a:srgbClr val="263238"/>
+                </a:solidFill>
+              </a:defRPr>
+            </a:pPr>
+            <a:r>
+              <a:t>Model addytywny (okres 365 dni): trend + sezonowość roczna + składnik losowy.</a:t>
+            </a:r>
+          </a:p>
+        </p:txBody>
+      </p:sp>
+      <p:sp>
+        <p:nvSpPr>
+          <p:cNvPr id="7" name="Rectangle 6"/>
+          <p:cNvSpPr/>
+          <p:nvPr/>
+        </p:nvSpPr>
+        <p:spPr>
+          <a:xfrm>
+            <a:off x="0" y="6537960"/>
+            <a:ext cx="12191695" cy="320040"/>
+          </a:xfrm>
+          <a:prstGeom prst="rect">
+            <a:avLst/>
+          </a:prstGeom>
+          <a:solidFill>
+            <a:srgbClr val="ECEFF1"/>
+          </a:solidFill>
+          <a:ln>
+            <a:noFill/>
+          </a:ln>
+        </p:spPr>
+        <p:style>
+          <a:lnRef idx="1">
+            <a:schemeClr val="accent1"/>
+          </a:lnRef>
+          <a:fillRef idx="3">
+            <a:schemeClr val="accent1"/>
+          </a:fillRef>
+          <a:effectRef idx="2">
+            <a:schemeClr val="accent1"/>
+          </a:effectRef>
+          <a:fontRef idx="minor">
+            <a:schemeClr val="lt1"/>
+          </a:fontRef>
+        </p:style>
+        <p:txBody>
+          <a:bodyPr rtlCol="0" anchor="ctr"/>
+          <a:lstStyle/>
+          <a:p>
+            <a:pPr algn="ctr"/>
+          </a:p>
+        </p:txBody>
+      </p:sp>
+      <p:sp>
+        <p:nvSpPr>
+          <p:cNvPr id="8" name="TextBox 7"/>
+          <p:cNvSpPr txBox="1"/>
+          <p:nvPr/>
+        </p:nvSpPr>
+        <p:spPr>
+          <a:xfrm>
+            <a:off x="457200" y="6565392"/>
+            <a:ext cx="7315200" cy="256032"/>
+          </a:xfrm>
+          <a:prstGeom prst="rect">
+            <a:avLst/>
+          </a:prstGeom>
+          <a:noFill/>
+        </p:spPr>
+        <p:txBody>
+          <a:bodyPr wrap="none">
+            <a:spAutoFit/>
+          </a:bodyPr>
+          <a:lstStyle/>
+          <a:p>
+            <a:pPr>
+              <a:defRPr sz="900">
+                <a:solidFill>
+                  <a:srgbClr val="607D8B"/>
+                </a:solidFill>
+              </a:defRPr>
+            </a:pPr>
+            <a:r>
+              <a:t>Analiza i wizualizacja danych – Pandas, DataFrame  •  Merito Chorzów</a:t>
+            </a:r>
+          </a:p>
+        </p:txBody>
+      </p:sp>
+      <p:sp>
+        <p:nvSpPr>
+          <p:cNvPr id="9" name="TextBox 8"/>
+          <p:cNvSpPr txBox="1"/>
+          <p:nvPr/>
+        </p:nvSpPr>
+        <p:spPr>
+          <a:xfrm>
+            <a:off x="11094415" y="6565392"/>
+            <a:ext cx="731520" cy="256032"/>
+          </a:xfrm>
+          <a:prstGeom prst="rect">
+            <a:avLst/>
+          </a:prstGeom>
+          <a:noFill/>
+        </p:spPr>
+        <p:txBody>
+          <a:bodyPr wrap="none">
+            <a:spAutoFit/>
+          </a:bodyPr>
+          <a:lstStyle/>
+          <a:p>
+            <a:pPr algn="r">
+              <a:defRPr sz="900">
+                <a:solidFill>
+                  <a:srgbClr val="607D8B"/>
+                </a:solidFill>
+              </a:defRPr>
+            </a:pPr>
+            <a:r>
+              <a:t>21</a:t>
+            </a:r>
+          </a:p>
+        </p:txBody>
+      </p:sp>
+    </p:spTree>
+  </p:cSld>
+  <p:clrMapOvr>
+    <a:masterClrMapping/>
+  </p:clrMapOvr>
+</p:sld>
+</file>
+
+<file path=ppt/slides/slide23.xml><?xml version="1.0" encoding="utf-8"?>
+<p:sld xmlns:a="http://schemas.openxmlformats.org/drawingml/2006/main" xmlns:p="http://schemas.openxmlformats.org/presentationml/2006/main" xmlns:r="http://schemas.openxmlformats.org/officeDocument/2006/relationships">
+  <p:cSld>
+    <p:spTree>
+      <p:nvGrpSpPr>
+        <p:cNvPr id="1" name=""/>
+        <p:cNvGrpSpPr/>
+        <p:nvPr/>
+      </p:nvGrpSpPr>
+      <p:grpSpPr/>
+      <p:sp>
+        <p:nvSpPr>
+          <p:cNvPr id="2" name="Rectangle 1"/>
+          <p:cNvSpPr/>
+          <p:nvPr/>
+        </p:nvSpPr>
+        <p:spPr>
+          <a:xfrm>
+            <a:off x="0" y="0"/>
+            <a:ext cx="12191695" cy="960120"/>
+          </a:xfrm>
+          <a:prstGeom prst="rect">
+            <a:avLst/>
+          </a:prstGeom>
+          <a:solidFill>
+            <a:srgbClr val="1565C0"/>
+          </a:solidFill>
+          <a:ln>
+            <a:noFill/>
+          </a:ln>
+        </p:spPr>
+        <p:style>
+          <a:lnRef idx="1">
+            <a:schemeClr val="accent1"/>
+          </a:lnRef>
+          <a:fillRef idx="3">
+            <a:schemeClr val="accent1"/>
+          </a:fillRef>
+          <a:effectRef idx="2">
+            <a:schemeClr val="accent1"/>
+          </a:effectRef>
+          <a:fontRef idx="minor">
+            <a:schemeClr val="lt1"/>
+          </a:fontRef>
+        </p:style>
+        <p:txBody>
+          <a:bodyPr rtlCol="0" anchor="ctr"/>
+          <a:lstStyle/>
+          <a:p>
+            <a:pPr algn="ctr"/>
+          </a:p>
+        </p:txBody>
+      </p:sp>
+      <p:sp>
+        <p:nvSpPr>
+          <p:cNvPr id="3" name="TextBox 2"/>
+          <p:cNvSpPr txBox="1"/>
+          <p:nvPr/>
+        </p:nvSpPr>
+        <p:spPr>
+          <a:xfrm>
+            <a:off x="502920" y="182880"/>
+            <a:ext cx="10972800" cy="640080"/>
+          </a:xfrm>
+          <a:prstGeom prst="rect">
+            <a:avLst/>
+          </a:prstGeom>
+          <a:noFill/>
+        </p:spPr>
+        <p:txBody>
+          <a:bodyPr wrap="none">
+            <a:spAutoFit/>
+          </a:bodyPr>
+          <a:lstStyle/>
+          <a:p>
+            <a:pPr>
+              <a:defRPr sz="2800" b="1">
+                <a:solidFill>
+                  <a:srgbClr val="FFFFFF"/>
+                </a:solidFill>
+              </a:defRPr>
+            </a:pPr>
+            <a:r>
+              <a:t>Prognoza predykcyjna — regresja liniowa</a:t>
+            </a:r>
+          </a:p>
+        </p:txBody>
+      </p:sp>
+      <p:pic>
+        <p:nvPicPr>
+          <p:cNvPr id="4" name="Picture 3" descr="05_prognoza.png"/>
+          <p:cNvPicPr>
+            <a:picLocks noChangeAspect="1"/>
+          </p:cNvPicPr>
+          <p:nvPr/>
+        </p:nvPicPr>
+        <p:blipFill>
+          <a:blip r:embed="rId2"/>
+          <a:stretch>
+            <a:fillRect/>
+          </a:stretch>
+        </p:blipFill>
+        <p:spPr>
+          <a:xfrm>
+            <a:off x="594360" y="1097280"/>
+            <a:ext cx="10972800" cy="3718447"/>
+          </a:xfrm>
+          <a:prstGeom prst="rect">
+            <a:avLst/>
+          </a:prstGeom>
+        </p:spPr>
+      </p:pic>
+      <p:sp>
+        <p:nvSpPr>
+          <p:cNvPr id="5" name="Rectangle 4"/>
+          <p:cNvSpPr/>
+          <p:nvPr/>
+        </p:nvSpPr>
+        <p:spPr>
+          <a:xfrm>
+            <a:off x="594360" y="5989320"/>
+            <a:ext cx="10972800" cy="502920"/>
+          </a:xfrm>
+          <a:prstGeom prst="rect">
+            <a:avLst/>
+          </a:prstGeom>
+          <a:solidFill>
+            <a:srgbClr val="ECEFF1"/>
+          </a:solidFill>
+          <a:ln>
+            <a:noFill/>
+          </a:ln>
+        </p:spPr>
+        <p:style>
+          <a:lnRef idx="1">
+            <a:schemeClr val="accent1"/>
+          </a:lnRef>
+          <a:fillRef idx="3">
+            <a:schemeClr val="accent1"/>
+          </a:fillRef>
+          <a:effectRef idx="2">
+            <a:schemeClr val="accent1"/>
+          </a:effectRef>
+          <a:fontRef idx="minor">
+            <a:schemeClr val="lt1"/>
+          </a:fontRef>
+        </p:style>
+        <p:txBody>
+          <a:bodyPr rtlCol="0" anchor="ctr"/>
+          <a:lstStyle/>
+          <a:p>
+            <a:pPr algn="ctr"/>
+          </a:p>
+        </p:txBody>
+      </p:sp>
+      <p:sp>
+        <p:nvSpPr>
+          <p:cNvPr id="6" name="TextBox 5"/>
+          <p:cNvSpPr txBox="1"/>
+          <p:nvPr/>
+        </p:nvSpPr>
+        <p:spPr>
+          <a:xfrm>
+            <a:off x="777240" y="6053328"/>
+            <a:ext cx="10607040" cy="411480"/>
+          </a:xfrm>
+          <a:prstGeom prst="rect">
+            <a:avLst/>
+          </a:prstGeom>
+          <a:noFill/>
+        </p:spPr>
+        <p:txBody>
+          <a:bodyPr wrap="square">
+            <a:spAutoFit/>
+          </a:bodyPr>
+          <a:lstStyle/>
+          <a:p>
+            <a:pPr algn="ctr">
+              <a:defRPr sz="1200" b="0">
+                <a:solidFill>
+                  <a:srgbClr val="263238"/>
+                </a:solidFill>
+              </a:defRPr>
+            </a:pPr>
+            <a:r>
+              <a:t>Trenowanie: 2015–2017, test: 2018  |  MAE = 3,384 MW  |  MAPE = 11.7%  |  R² = 0.206</a:t>
+            </a:r>
+          </a:p>
+        </p:txBody>
+      </p:sp>
+      <p:sp>
+        <p:nvSpPr>
+          <p:cNvPr id="7" name="Rectangle 6"/>
+          <p:cNvSpPr/>
+          <p:nvPr/>
+        </p:nvSpPr>
+        <p:spPr>
+          <a:xfrm>
+            <a:off x="0" y="6537960"/>
+            <a:ext cx="12191695" cy="320040"/>
+          </a:xfrm>
+          <a:prstGeom prst="rect">
+            <a:avLst/>
+          </a:prstGeom>
+          <a:solidFill>
+            <a:srgbClr val="ECEFF1"/>
+          </a:solidFill>
+          <a:ln>
+            <a:noFill/>
+          </a:ln>
+        </p:spPr>
+        <p:style>
+          <a:lnRef idx="1">
+            <a:schemeClr val="accent1"/>
+          </a:lnRef>
+          <a:fillRef idx="3">
+            <a:schemeClr val="accent1"/>
+          </a:fillRef>
+          <a:effectRef idx="2">
+            <a:schemeClr val="accent1"/>
+          </a:effectRef>
+          <a:fontRef idx="minor">
+            <a:schemeClr val="lt1"/>
+          </a:fontRef>
+        </p:style>
+        <p:txBody>
+          <a:bodyPr rtlCol="0" anchor="ctr"/>
+          <a:lstStyle/>
+          <a:p>
+            <a:pPr algn="ctr"/>
+          </a:p>
+        </p:txBody>
+      </p:sp>
+      <p:sp>
+        <p:nvSpPr>
+          <p:cNvPr id="8" name="TextBox 7"/>
+          <p:cNvSpPr txBox="1"/>
+          <p:nvPr/>
+        </p:nvSpPr>
+        <p:spPr>
+          <a:xfrm>
+            <a:off x="457200" y="6565392"/>
+            <a:ext cx="7315200" cy="256032"/>
+          </a:xfrm>
+          <a:prstGeom prst="rect">
+            <a:avLst/>
+          </a:prstGeom>
+          <a:noFill/>
+        </p:spPr>
+        <p:txBody>
+          <a:bodyPr wrap="none">
+            <a:spAutoFit/>
+          </a:bodyPr>
+          <a:lstStyle/>
+          <a:p>
+            <a:pPr>
+              <a:defRPr sz="900">
+                <a:solidFill>
+                  <a:srgbClr val="607D8B"/>
+                </a:solidFill>
+              </a:defRPr>
+            </a:pPr>
+            <a:r>
+              <a:t>Analiza i wizualizacja danych – Pandas, DataFrame  •  Merito Chorzów</a:t>
+            </a:r>
+          </a:p>
+        </p:txBody>
+      </p:sp>
+      <p:sp>
+        <p:nvSpPr>
+          <p:cNvPr id="9" name="TextBox 8"/>
+          <p:cNvSpPr txBox="1"/>
+          <p:nvPr/>
+        </p:nvSpPr>
+        <p:spPr>
+          <a:xfrm>
+            <a:off x="11094415" y="6565392"/>
+            <a:ext cx="731520" cy="256032"/>
+          </a:xfrm>
+          <a:prstGeom prst="rect">
+            <a:avLst/>
+          </a:prstGeom>
+          <a:noFill/>
+        </p:spPr>
+        <p:txBody>
+          <a:bodyPr wrap="none">
+            <a:spAutoFit/>
+          </a:bodyPr>
+          <a:lstStyle/>
+          <a:p>
+            <a:pPr algn="r">
+              <a:defRPr sz="900">
+                <a:solidFill>
+                  <a:srgbClr val="607D8B"/>
+                </a:solidFill>
+              </a:defRPr>
+            </a:pPr>
+            <a:r>
+              <a:t>22</a:t>
+            </a:r>
+          </a:p>
+        </p:txBody>
+      </p:sp>
+    </p:spTree>
+  </p:cSld>
+  <p:clrMapOvr>
+    <a:masterClrMapping/>
+  </p:clrMapOvr>
+</p:sld>
+</file>
+
+<file path=ppt/slides/slide24.xml><?xml version="1.0" encoding="utf-8"?>
+<p:sld xmlns:a="http://schemas.openxmlformats.org/drawingml/2006/main" xmlns:p="http://schemas.openxmlformats.org/presentationml/2006/main" xmlns:r="http://schemas.openxmlformats.org/officeDocument/2006/relationships">
+  <p:cSld>
+    <p:spTree>
+      <p:nvGrpSpPr>
+        <p:cNvPr id="1" name=""/>
+        <p:cNvGrpSpPr/>
+        <p:nvPr/>
+      </p:nvGrpSpPr>
+      <p:grpSpPr/>
+      <p:sp>
+        <p:nvSpPr>
+          <p:cNvPr id="2" name="Rectangle 1"/>
+          <p:cNvSpPr/>
+          <p:nvPr/>
+        </p:nvSpPr>
+        <p:spPr>
+          <a:xfrm>
+            <a:off x="0" y="0"/>
+            <a:ext cx="12191695" cy="960120"/>
+          </a:xfrm>
+          <a:prstGeom prst="rect">
+            <a:avLst/>
+          </a:prstGeom>
+          <a:solidFill>
+            <a:srgbClr val="1565C0"/>
+          </a:solidFill>
+          <a:ln>
+            <a:noFill/>
+          </a:ln>
+        </p:spPr>
+        <p:style>
+          <a:lnRef idx="1">
+            <a:schemeClr val="accent1"/>
+          </a:lnRef>
+          <a:fillRef idx="3">
+            <a:schemeClr val="accent1"/>
+          </a:fillRef>
+          <a:effectRef idx="2">
+            <a:schemeClr val="accent1"/>
+          </a:effectRef>
+          <a:fontRef idx="minor">
+            <a:schemeClr val="lt1"/>
+          </a:fontRef>
+        </p:style>
+        <p:txBody>
+          <a:bodyPr rtlCol="0" anchor="ctr"/>
+          <a:lstStyle/>
+          <a:p>
+            <a:pPr algn="ctr"/>
+          </a:p>
+        </p:txBody>
+      </p:sp>
+      <p:sp>
+        <p:nvSpPr>
+          <p:cNvPr id="3" name="TextBox 2"/>
+          <p:cNvSpPr txBox="1"/>
+          <p:nvPr/>
+        </p:nvSpPr>
+        <p:spPr>
+          <a:xfrm>
+            <a:off x="502920" y="182880"/>
+            <a:ext cx="10972800" cy="640080"/>
+          </a:xfrm>
+          <a:prstGeom prst="rect">
+            <a:avLst/>
+          </a:prstGeom>
+          <a:noFill/>
+        </p:spPr>
+        <p:txBody>
+          <a:bodyPr wrap="none">
+            <a:spAutoFit/>
+          </a:bodyPr>
+          <a:lstStyle/>
+          <a:p>
+            <a:pPr>
+              <a:defRPr sz="2800" b="1">
+                <a:solidFill>
+                  <a:srgbClr val="FFFFFF"/>
+                </a:solidFill>
+              </a:defRPr>
+            </a:pPr>
+            <a:r>
+              <a:t>Model predykcyjny — szczegóły</a:t>
+            </a:r>
+          </a:p>
+        </p:txBody>
+      </p:sp>
+      <p:sp>
+        <p:nvSpPr>
+          <p:cNvPr id="4" name="TextBox 3"/>
+          <p:cNvSpPr txBox="1"/>
+          <p:nvPr/>
+        </p:nvSpPr>
+        <p:spPr>
+          <a:xfrm>
+            <a:off x="685800" y="1143000"/>
+            <a:ext cx="10789920" cy="502920"/>
+          </a:xfrm>
+          <a:prstGeom prst="rect">
+            <a:avLst/>
+          </a:prstGeom>
+          <a:noFill/>
+        </p:spPr>
+        <p:txBody>
+          <a:bodyPr wrap="square">
+            <a:spAutoFit/>
+          </a:bodyPr>
+          <a:lstStyle/>
+          <a:p>
+            <a:pPr algn="l">
+              <a:defRPr sz="1700" b="0">
+                <a:solidFill>
+                  <a:srgbClr val="263238"/>
+                </a:solidFill>
+              </a:defRPr>
+            </a:pPr>
+            <a:r>
+              <a:t>•  Algorytm: wielomianowa regresja liniowa (scikit-learn LinearRegression)</a:t>
+            </a:r>
+          </a:p>
+        </p:txBody>
+      </p:sp>
+      <p:sp>
+        <p:nvSpPr>
+          <p:cNvPr id="5" name="TextBox 4"/>
+          <p:cNvSpPr txBox="1"/>
+          <p:nvPr/>
+        </p:nvSpPr>
+        <p:spPr>
+          <a:xfrm>
+            <a:off x="685800" y="1581912"/>
+            <a:ext cx="10789920" cy="502920"/>
+          </a:xfrm>
+          <a:prstGeom prst="rect">
+            <a:avLst/>
+          </a:prstGeom>
+          <a:noFill/>
+        </p:spPr>
+        <p:txBody>
+          <a:bodyPr wrap="square">
+            <a:spAutoFit/>
+          </a:bodyPr>
+          <a:lstStyle/>
+          <a:p>
+            <a:pPr algn="l">
+              <a:defRPr sz="1700" b="0">
+                <a:solidFill>
+                  <a:srgbClr val="263238"/>
+                </a:solidFill>
+              </a:defRPr>
+            </a:pPr>
+            <a:r>
+              <a:t>•  Cechy: godzina, dzień tygodnia, miesiąc, flaga weekend, temperatura</a:t>
+            </a:r>
+          </a:p>
+        </p:txBody>
+      </p:sp>
+      <p:sp>
+        <p:nvSpPr>
+          <p:cNvPr id="6" name="TextBox 5"/>
+          <p:cNvSpPr txBox="1"/>
+          <p:nvPr/>
+        </p:nvSpPr>
+        <p:spPr>
+          <a:xfrm>
+            <a:off x="685800" y="2020824"/>
+            <a:ext cx="10789920" cy="502920"/>
+          </a:xfrm>
+          <a:prstGeom prst="rect">
+            <a:avLst/>
+          </a:prstGeom>
+          <a:noFill/>
+        </p:spPr>
+        <p:txBody>
+          <a:bodyPr wrap="square">
+            <a:spAutoFit/>
+          </a:bodyPr>
+          <a:lstStyle/>
+          <a:p>
+            <a:pPr algn="l">
+              <a:defRPr sz="1700" b="0">
+                <a:solidFill>
+                  <a:srgbClr val="263238"/>
+                </a:solidFill>
+              </a:defRPr>
+            </a:pPr>
+            <a:r>
+              <a:t>•  Największy wpływ: godzina (coef ≈ 239.1)</a:t>
+            </a:r>
+          </a:p>
+        </p:txBody>
+      </p:sp>
+      <p:sp>
+        <p:nvSpPr>
+          <p:cNvPr id="7" name="TextBox 6"/>
+          <p:cNvSpPr txBox="1"/>
+          <p:nvPr/>
+        </p:nvSpPr>
+        <p:spPr>
+          <a:xfrm>
+            <a:off x="685800" y="2459736"/>
+            <a:ext cx="10789920" cy="502920"/>
+          </a:xfrm>
+          <a:prstGeom prst="rect">
+            <a:avLst/>
+          </a:prstGeom>
+          <a:noFill/>
+        </p:spPr>
+        <p:txBody>
+          <a:bodyPr wrap="square">
+            <a:spAutoFit/>
+          </a:bodyPr>
+          <a:lstStyle/>
+          <a:p>
+            <a:pPr algn="l">
+              <a:defRPr sz="1700" b="0">
+                <a:solidFill>
+                  <a:srgbClr val="263238"/>
+                </a:solidFill>
+              </a:defRPr>
+            </a:pPr>
+            <a:r>
+              <a:t>•  Baseline pod modele ARIMA / uczenie maszynowe (notebook opcjonalny)</a:t>
+            </a:r>
+          </a:p>
+        </p:txBody>
+      </p:sp>
+      <p:sp>
+        <p:nvSpPr>
+          <p:cNvPr id="8" name="TextBox 7"/>
+          <p:cNvSpPr txBox="1"/>
+          <p:nvPr/>
+        </p:nvSpPr>
+        <p:spPr>
+          <a:xfrm>
+            <a:off x="685800" y="2898648"/>
+            <a:ext cx="10789920" cy="502920"/>
+          </a:xfrm>
+          <a:prstGeom prst="rect">
+            <a:avLst/>
+          </a:prstGeom>
+          <a:noFill/>
+        </p:spPr>
+        <p:txBody>
+          <a:bodyPr wrap="square">
+            <a:spAutoFit/>
+          </a:bodyPr>
+          <a:lstStyle/>
+          <a:p>
+            <a:pPr algn="l">
+              <a:defRPr sz="1700" b="0">
+                <a:solidFill>
+                  <a:srgbClr val="263238"/>
+                </a:solidFill>
+              </a:defRPr>
+            </a:pPr>
+            <a:r>
+              <a:t>•  Big Data / Spark: nie wymagane — wymaganie „zaawansowane” spełnia szereg czasowy + ML</a:t>
+            </a:r>
+          </a:p>
+        </p:txBody>
+      </p:sp>
+      <p:sp>
+        <p:nvSpPr>
+          <p:cNvPr id="9" name="Rectangle 8"/>
+          <p:cNvSpPr/>
+          <p:nvPr/>
+        </p:nvSpPr>
+        <p:spPr>
+          <a:xfrm>
+            <a:off x="0" y="6537960"/>
+            <a:ext cx="12191695" cy="320040"/>
+          </a:xfrm>
+          <a:prstGeom prst="rect">
+            <a:avLst/>
+          </a:prstGeom>
+          <a:solidFill>
+            <a:srgbClr val="ECEFF1"/>
+          </a:solidFill>
+          <a:ln>
+            <a:noFill/>
+          </a:ln>
+        </p:spPr>
+        <p:style>
+          <a:lnRef idx="1">
+            <a:schemeClr val="accent1"/>
+          </a:lnRef>
+          <a:fillRef idx="3">
+            <a:schemeClr val="accent1"/>
+          </a:fillRef>
+          <a:effectRef idx="2">
+            <a:schemeClr val="accent1"/>
+          </a:effectRef>
+          <a:fontRef idx="minor">
+            <a:schemeClr val="lt1"/>
+          </a:fontRef>
+        </p:style>
+        <p:txBody>
+          <a:bodyPr rtlCol="0" anchor="ctr"/>
+          <a:lstStyle/>
+          <a:p>
+            <a:pPr algn="ctr"/>
+          </a:p>
+        </p:txBody>
+      </p:sp>
+      <p:sp>
+        <p:nvSpPr>
+          <p:cNvPr id="10" name="TextBox 9"/>
+          <p:cNvSpPr txBox="1"/>
+          <p:nvPr/>
+        </p:nvSpPr>
+        <p:spPr>
+          <a:xfrm>
+            <a:off x="457200" y="6565392"/>
+            <a:ext cx="7315200" cy="256032"/>
+          </a:xfrm>
+          <a:prstGeom prst="rect">
+            <a:avLst/>
+          </a:prstGeom>
+          <a:noFill/>
+        </p:spPr>
+        <p:txBody>
+          <a:bodyPr wrap="none">
+            <a:spAutoFit/>
+          </a:bodyPr>
+          <a:lstStyle/>
+          <a:p>
+            <a:pPr>
+              <a:defRPr sz="900">
+                <a:solidFill>
+                  <a:srgbClr val="607D8B"/>
+                </a:solidFill>
+              </a:defRPr>
+            </a:pPr>
+            <a:r>
+              <a:t>Analiza i wizualizacja danych – Pandas, DataFrame  •  Merito Chorzów</a:t>
+            </a:r>
+          </a:p>
+        </p:txBody>
+      </p:sp>
+      <p:sp>
+        <p:nvSpPr>
+          <p:cNvPr id="11" name="TextBox 10"/>
+          <p:cNvSpPr txBox="1"/>
+          <p:nvPr/>
+        </p:nvSpPr>
+        <p:spPr>
+          <a:xfrm>
+            <a:off x="11094415" y="6565392"/>
+            <a:ext cx="731520" cy="256032"/>
+          </a:xfrm>
+          <a:prstGeom prst="rect">
+            <a:avLst/>
+          </a:prstGeom>
+          <a:noFill/>
+        </p:spPr>
+        <p:txBody>
+          <a:bodyPr wrap="none">
+            <a:spAutoFit/>
+          </a:bodyPr>
+          <a:lstStyle/>
+          <a:p>
+            <a:pPr algn="r">
+              <a:defRPr sz="900">
+                <a:solidFill>
+                  <a:srgbClr val="607D8B"/>
+                </a:solidFill>
+              </a:defRPr>
+            </a:pPr>
+            <a:r>
+              <a:t>23</a:t>
+            </a:r>
+          </a:p>
+        </p:txBody>
+      </p:sp>
+    </p:spTree>
+  </p:cSld>
+  <p:clrMapOvr>
+    <a:masterClrMapping/>
+  </p:clrMapOvr>
+</p:sld>
+</file>
+
+<file path=ppt/slides/slide25.xml><?xml version="1.0" encoding="utf-8"?>
+<p:sld xmlns:a="http://schemas.openxmlformats.org/drawingml/2006/main" xmlns:p="http://schemas.openxmlformats.org/presentationml/2006/main" xmlns:r="http://schemas.openxmlformats.org/officeDocument/2006/relationships">
+  <p:cSld>
+    <p:spTree>
+      <p:nvGrpSpPr>
+        <p:cNvPr id="1" name=""/>
+        <p:cNvGrpSpPr/>
+        <p:nvPr/>
+      </p:nvGrpSpPr>
+      <p:grpSpPr/>
+      <p:sp>
+        <p:nvSpPr>
+          <p:cNvPr id="2" name="Rectangle 1"/>
+          <p:cNvSpPr/>
+          <p:nvPr/>
+        </p:nvSpPr>
+        <p:spPr>
+          <a:xfrm>
+            <a:off x="0" y="0"/>
+            <a:ext cx="12191695" cy="960120"/>
+          </a:xfrm>
+          <a:prstGeom prst="rect">
+            <a:avLst/>
+          </a:prstGeom>
+          <a:solidFill>
+            <a:srgbClr val="1565C0"/>
+          </a:solidFill>
+          <a:ln>
+            <a:noFill/>
+          </a:ln>
+        </p:spPr>
+        <p:style>
+          <a:lnRef idx="1">
+            <a:schemeClr val="accent1"/>
+          </a:lnRef>
+          <a:fillRef idx="3">
+            <a:schemeClr val="accent1"/>
+          </a:fillRef>
+          <a:effectRef idx="2">
+            <a:schemeClr val="accent1"/>
+          </a:effectRef>
+          <a:fontRef idx="minor">
+            <a:schemeClr val="lt1"/>
+          </a:fontRef>
+        </p:style>
+        <p:txBody>
+          <a:bodyPr rtlCol="0" anchor="ctr"/>
+          <a:lstStyle/>
+          <a:p>
+            <a:pPr algn="ctr"/>
+          </a:p>
+        </p:txBody>
+      </p:sp>
+      <p:sp>
+        <p:nvSpPr>
+          <p:cNvPr id="3" name="TextBox 2"/>
+          <p:cNvSpPr txBox="1"/>
+          <p:nvPr/>
+        </p:nvSpPr>
+        <p:spPr>
+          <a:xfrm>
+            <a:off x="502920" y="182880"/>
+            <a:ext cx="10972800" cy="640080"/>
+          </a:xfrm>
+          <a:prstGeom prst="rect">
+            <a:avLst/>
+          </a:prstGeom>
+          <a:noFill/>
+        </p:spPr>
+        <p:txBody>
+          <a:bodyPr wrap="none">
+            <a:spAutoFit/>
+          </a:bodyPr>
+          <a:lstStyle/>
+          <a:p>
+            <a:pPr>
+              <a:defRPr sz="2800" b="1">
+                <a:solidFill>
+                  <a:srgbClr val="FFFFFF"/>
+                </a:solidFill>
+              </a:defRPr>
+            </a:pPr>
+            <a:r>
+              <a:t>Mapowanie wymagań zaliczeniowych</a:t>
+            </a:r>
+          </a:p>
+        </p:txBody>
+      </p:sp>
+      <p:graphicFrame>
+        <p:nvGraphicFramePr>
+          <p:cNvPr id="4" name="Table 3"/>
+          <p:cNvGraphicFramePr>
+            <a:graphicFrameLocks noGrp="1"/>
+          </p:cNvGraphicFramePr>
+          <p:nvPr/>
+        </p:nvGraphicFramePr>
+        <p:xfrm>
+          <a:off x="594360" y="1188720"/>
+          <a:ext cx="10972800" cy="2880360"/>
+        </p:xfrm>
+        <a:graphic>
+          <a:graphicData uri="http://schemas.openxmlformats.org/drawingml/2006/table">
+            <a:tbl>
+              <a:tblPr firstRow="1" bandRow="1">
+                <a:tableStyleId>{5C22544A-7EE6-4342-B048-85BDC9FD1C3A}</a:tableStyleId>
+              </a:tblPr>
+              <a:tblGrid>
+                <a:gridCol w="3657600"/>
+                <a:gridCol w="3657600"/>
+                <a:gridCol w="3657600"/>
+              </a:tblGrid>
+              <a:tr h="411480">
+                <a:tc>
+                  <a:txBody>
+                    <a:bodyPr/>
+                    <a:lstStyle/>
+                    <a:p>
+                      <a:pPr>
+                        <a:defRPr sz="1100" b="1">
+                          <a:solidFill>
+                            <a:srgbClr val="FFFFFF"/>
+                          </a:solidFill>
+                        </a:defRPr>
+                      </a:pPr>
+                      <a:r>
+                        <a:t>Wymaganie</a:t>
+                      </a:r>
+                    </a:p>
+                  </a:txBody>
+                  <a:tcPr>
+                    <a:solidFill>
+                      <a:srgbClr val="1565C0"/>
+                    </a:solidFill>
+                  </a:tcPr>
+                </a:tc>
+                <a:tc>
+                  <a:txBody>
+                    <a:bodyPr/>
+                    <a:lstStyle/>
+                    <a:p>
+                      <a:pPr>
+                        <a:defRPr sz="1100" b="1">
+                          <a:solidFill>
+                            <a:srgbClr val="FFFFFF"/>
+                          </a:solidFill>
+                        </a:defRPr>
+                      </a:pPr>
+                      <a:r>
+                        <a:t>Realizacja</a:t>
+                      </a:r>
+                    </a:p>
+                  </a:txBody>
+                  <a:tcPr>
+                    <a:solidFill>
+                      <a:srgbClr val="1565C0"/>
+                    </a:solidFill>
+                  </a:tcPr>
+                </a:tc>
+                <a:tc>
+                  <a:txBody>
+                    <a:bodyPr/>
+                    <a:lstStyle/>
+                    <a:p>
+                      <a:pPr>
+                        <a:defRPr sz="1100" b="1">
+                          <a:solidFill>
+                            <a:srgbClr val="FFFFFF"/>
+                          </a:solidFill>
+                        </a:defRPr>
+                      </a:pPr>
+                      <a:r>
+                        <a:t>Gdzie</a:t>
+                      </a:r>
+                    </a:p>
+                  </a:txBody>
+                  <a:tcPr>
+                    <a:solidFill>
+                      <a:srgbClr val="1565C0"/>
+                    </a:solidFill>
+                  </a:tcPr>
+                </a:tc>
+              </a:tr>
+              <a:tr h="411480">
+                <a:tc>
+                  <a:txBody>
+                    <a:bodyPr/>
+                    <a:lstStyle/>
+                    <a:p>
+                      <a:pPr>
+                        <a:defRPr sz="1000"/>
+                      </a:pPr>
+                      <a:r>
+                        <a:t>DataFrame + praktyki</a:t>
+                      </a:r>
+                    </a:p>
+                  </a:txBody>
+                  <a:tcPr/>
+                </a:tc>
+                <a:tc>
+                  <a:txBody>
+                    <a:bodyPr/>
+                    <a:lstStyle/>
+                    <a:p>
+                      <a:pPr>
+                        <a:defRPr sz="1000"/>
+                      </a:pPr>
+                      <a:r>
+                        <a:t>read_csv, index czasowy, typy</a:t>
+                      </a:r>
+                    </a:p>
+                  </a:txBody>
+                  <a:tcPr/>
+                </a:tc>
+                <a:tc>
+                  <a:txBody>
+                    <a:bodyPr/>
+                    <a:lstStyle/>
+                    <a:p>
+                      <a:pPr>
+                        <a:defRPr sz="1000"/>
+                      </a:pPr>
+                      <a:r>
+                        <a:t>analiza.ipynb §1–2</a:t>
+                      </a:r>
+                    </a:p>
+                  </a:txBody>
+                  <a:tcPr/>
+                </a:tc>
+              </a:tr>
+              <a:tr h="411480">
+                <a:tc>
+                  <a:txBody>
+                    <a:bodyPr/>
+                    <a:lstStyle/>
+                    <a:p>
+                      <a:pPr>
+                        <a:defRPr sz="1000"/>
+                      </a:pPr>
+                      <a:r>
+                        <a:t>Pre-processing</a:t>
+                      </a:r>
+                    </a:p>
+                  </a:txBody>
+                  <a:tcPr/>
+                </a:tc>
+                <a:tc>
+                  <a:txBody>
+                    <a:bodyPr/>
+                    <a:lstStyle/>
+                    <a:p>
+                      <a:pPr>
+                        <a:defRPr sz="1000"/>
+                      </a:pPr>
+                      <a:r>
+                        <a:t>czyszczenie, join, cechy</a:t>
+                      </a:r>
+                    </a:p>
+                  </a:txBody>
+                  <a:tcPr/>
+                </a:tc>
+                <a:tc>
+                  <a:txBody>
+                    <a:bodyPr/>
+                    <a:lstStyle/>
+                    <a:p>
+                      <a:pPr>
+                        <a:defRPr sz="1000"/>
+                      </a:pPr>
+                      <a:r>
+                        <a:t>analiza.ipynb §2</a:t>
+                      </a:r>
+                    </a:p>
+                  </a:txBody>
+                  <a:tcPr/>
+                </a:tc>
+              </a:tr>
+              <a:tr h="411480">
+                <a:tc>
+                  <a:txBody>
+                    <a:bodyPr/>
+                    <a:lstStyle/>
+                    <a:p>
+                      <a:pPr>
+                        <a:defRPr sz="1000"/>
+                      </a:pPr>
+                      <a:r>
+                        <a:t>Wizualizacja + dashboard</a:t>
+                      </a:r>
+                    </a:p>
+                  </a:txBody>
+                  <a:tcPr/>
+                </a:tc>
+                <a:tc>
+                  <a:txBody>
+                    <a:bodyPr/>
+                    <a:lstStyle/>
+                    <a:p>
+                      <a:pPr>
+                        <a:defRPr sz="1000"/>
+                      </a:pPr>
+                      <a:r>
+                        <a:t>Matplotlib, Plotly</a:t>
+                      </a:r>
+                    </a:p>
+                  </a:txBody>
+                  <a:tcPr/>
+                </a:tc>
+                <a:tc>
+                  <a:txBody>
+                    <a:bodyPr/>
+                    <a:lstStyle/>
+                    <a:p>
+                      <a:pPr>
+                        <a:defRPr sz="1000"/>
+                      </a:pPr>
+                      <a:r>
+                        <a:t>analiza.ipynb §3</a:t>
+                      </a:r>
+                    </a:p>
+                  </a:txBody>
+                  <a:tcPr/>
+                </a:tc>
+              </a:tr>
+              <a:tr h="411480">
+                <a:tc>
+                  <a:txBody>
+                    <a:bodyPr/>
+                    <a:lstStyle/>
+                    <a:p>
+                      <a:pPr>
+                        <a:defRPr sz="1000"/>
+                      </a:pPr>
+                      <a:r>
+                        <a:t>Statystyka + testy</a:t>
+                      </a:r>
+                    </a:p>
+                  </a:txBody>
+                  <a:tcPr/>
+                </a:tc>
+                <a:tc>
+                  <a:txBody>
+                    <a:bodyPr/>
+                    <a:lstStyle/>
+                    <a:p>
+                      <a:pPr>
+                        <a:defRPr sz="1000"/>
+                      </a:pPr>
+                      <a:r>
+                        <a:t>describe, Shapiro, Mann-Whitney</a:t>
+                      </a:r>
+                    </a:p>
+                  </a:txBody>
+                  <a:tcPr/>
+                </a:tc>
+                <a:tc>
+                  <a:txBody>
+                    <a:bodyPr/>
+                    <a:lstStyle/>
+                    <a:p>
+                      <a:pPr>
+                        <a:defRPr sz="1000"/>
+                      </a:pPr>
+                      <a:r>
+                        <a:t>analiza.ipynb §4</a:t>
+                      </a:r>
+                    </a:p>
+                  </a:txBody>
+                  <a:tcPr/>
+                </a:tc>
+              </a:tr>
+              <a:tr h="411480">
+                <a:tc>
+                  <a:txBody>
+                    <a:bodyPr/>
+                    <a:lstStyle/>
+                    <a:p>
+                      <a:pPr>
+                        <a:defRPr sz="1000"/>
+                      </a:pPr>
+                      <a:r>
+                        <a:t>Zaawansowane</a:t>
+                      </a:r>
+                    </a:p>
+                  </a:txBody>
+                  <a:tcPr/>
+                </a:tc>
+                <a:tc>
+                  <a:txBody>
+                    <a:bodyPr/>
+                    <a:lstStyle/>
+                    <a:p>
+                      <a:pPr>
+                        <a:defRPr sz="1000"/>
+                      </a:pPr>
+                      <a:r>
+                        <a:t>dekompozycja, regresja</a:t>
+                      </a:r>
+                    </a:p>
+                  </a:txBody>
+                  <a:tcPr/>
+                </a:tc>
+                <a:tc>
+                  <a:txBody>
+                    <a:bodyPr/>
+                    <a:lstStyle/>
+                    <a:p>
+                      <a:pPr>
+                        <a:defRPr sz="1000"/>
+                      </a:pPr>
+                      <a:r>
+                        <a:t>analiza.ipynb §5</a:t>
+                      </a:r>
+                    </a:p>
+                  </a:txBody>
+                  <a:tcPr/>
+                </a:tc>
+              </a:tr>
+              <a:tr h="411480">
+                <a:tc>
+                  <a:txBody>
+                    <a:bodyPr/>
+                    <a:lstStyle/>
+                    <a:p>
+                      <a:pPr>
+                        <a:defRPr sz="1000"/>
+                      </a:pPr>
+                      <a:r>
+                        <a:t>Dokumentacja</a:t>
+                      </a:r>
+                    </a:p>
+                  </a:txBody>
+                  <a:tcPr/>
+                </a:tc>
+                <a:tc>
+                  <a:txBody>
+                    <a:bodyPr/>
+                    <a:lstStyle/>
+                    <a:p>
+                      <a:pPr>
+                        <a:defRPr sz="1000"/>
+                      </a:pPr>
+                      <a:r>
+                        <a:t>raport, PPT, kod</a:t>
+                      </a:r>
+                    </a:p>
+                  </a:txBody>
+                  <a:tcPr/>
+                </a:tc>
+                <a:tc>
+                  <a:txBody>
+                    <a:bodyPr/>
+                    <a:lstStyle/>
+                    <a:p>
+                      <a:pPr>
+                        <a:defRPr sz="1000"/>
+                      </a:pPr>
+                      <a:r>
+                        <a:t>docs/, repo GitHub</a:t>
+                      </a:r>
+                    </a:p>
+                  </a:txBody>
+                  <a:tcPr/>
+                </a:tc>
+              </a:tr>
+            </a:tbl>
+          </a:graphicData>
+        </a:graphic>
+      </p:graphicFrame>
+      <p:sp>
+        <p:nvSpPr>
+          <p:cNvPr id="5" name="Rectangle 4"/>
+          <p:cNvSpPr/>
+          <p:nvPr/>
+        </p:nvSpPr>
+        <p:spPr>
+          <a:xfrm>
+            <a:off x="0" y="6537960"/>
+            <a:ext cx="12191695" cy="320040"/>
+          </a:xfrm>
+          <a:prstGeom prst="rect">
+            <a:avLst/>
+          </a:prstGeom>
+          <a:solidFill>
+            <a:srgbClr val="ECEFF1"/>
+          </a:solidFill>
+          <a:ln>
+            <a:noFill/>
+          </a:ln>
+        </p:spPr>
+        <p:style>
+          <a:lnRef idx="1">
+            <a:schemeClr val="accent1"/>
+          </a:lnRef>
+          <a:fillRef idx="3">
+            <a:schemeClr val="accent1"/>
+          </a:fillRef>
+          <a:effectRef idx="2">
+            <a:schemeClr val="accent1"/>
+          </a:effectRef>
+          <a:fontRef idx="minor">
+            <a:schemeClr val="lt1"/>
+          </a:fontRef>
+        </p:style>
+        <p:txBody>
+          <a:bodyPr rtlCol="0" anchor="ctr"/>
+          <a:lstStyle/>
+          <a:p>
+            <a:pPr algn="ctr"/>
+          </a:p>
+        </p:txBody>
+      </p:sp>
+      <p:sp>
+        <p:nvSpPr>
+          <p:cNvPr id="6" name="TextBox 5"/>
+          <p:cNvSpPr txBox="1"/>
+          <p:nvPr/>
+        </p:nvSpPr>
+        <p:spPr>
+          <a:xfrm>
+            <a:off x="457200" y="6565392"/>
+            <a:ext cx="7315200" cy="256032"/>
+          </a:xfrm>
+          <a:prstGeom prst="rect">
+            <a:avLst/>
+          </a:prstGeom>
+          <a:noFill/>
+        </p:spPr>
+        <p:txBody>
+          <a:bodyPr wrap="none">
+            <a:spAutoFit/>
+          </a:bodyPr>
+          <a:lstStyle/>
+          <a:p>
+            <a:pPr>
+              <a:defRPr sz="900">
+                <a:solidFill>
+                  <a:srgbClr val="607D8B"/>
+                </a:solidFill>
+              </a:defRPr>
+            </a:pPr>
+            <a:r>
+              <a:t>Analiza i wizualizacja danych – Pandas, DataFrame  •  Merito Chorzów</a:t>
+            </a:r>
+          </a:p>
+        </p:txBody>
+      </p:sp>
+      <p:sp>
+        <p:nvSpPr>
+          <p:cNvPr id="7" name="TextBox 6"/>
+          <p:cNvSpPr txBox="1"/>
+          <p:nvPr/>
+        </p:nvSpPr>
+        <p:spPr>
+          <a:xfrm>
+            <a:off x="11094415" y="6565392"/>
+            <a:ext cx="731520" cy="256032"/>
+          </a:xfrm>
+          <a:prstGeom prst="rect">
+            <a:avLst/>
+          </a:prstGeom>
+          <a:noFill/>
+        </p:spPr>
+        <p:txBody>
+          <a:bodyPr wrap="none">
+            <a:spAutoFit/>
+          </a:bodyPr>
+          <a:lstStyle/>
+          <a:p>
+            <a:pPr algn="r">
+              <a:defRPr sz="900">
+                <a:solidFill>
+                  <a:srgbClr val="607D8B"/>
+                </a:solidFill>
+              </a:defRPr>
+            </a:pPr>
+            <a:r>
+              <a:t>24</a:t>
+            </a:r>
+          </a:p>
+        </p:txBody>
+      </p:sp>
+    </p:spTree>
+  </p:cSld>
+  <p:clrMapOvr>
+    <a:masterClrMapping/>
+  </p:clrMapOvr>
+</p:sld>
+</file>
+
+<file path=ppt/slides/slide26.xml><?xml version="1.0" encoding="utf-8"?>
+<p:sld xmlns:a="http://schemas.openxmlformats.org/drawingml/2006/main" xmlns:p="http://schemas.openxmlformats.org/presentationml/2006/main" xmlns:r="http://schemas.openxmlformats.org/officeDocument/2006/relationships">
+  <p:cSld>
+    <p:spTree>
+      <p:nvGrpSpPr>
+        <p:cNvPr id="1" name=""/>
+        <p:cNvGrpSpPr/>
+        <p:nvPr/>
+      </p:nvGrpSpPr>
+      <p:grpSpPr/>
+      <p:sp>
+        <p:nvSpPr>
+          <p:cNvPr id="2" name="Rectangle 1"/>
+          <p:cNvSpPr/>
+          <p:nvPr/>
+        </p:nvSpPr>
+        <p:spPr>
+          <a:xfrm>
+            <a:off x="0" y="0"/>
+            <a:ext cx="12191695" cy="960120"/>
+          </a:xfrm>
+          <a:prstGeom prst="rect">
+            <a:avLst/>
+          </a:prstGeom>
+          <a:solidFill>
+            <a:srgbClr val="1565C0"/>
+          </a:solidFill>
+          <a:ln>
+            <a:noFill/>
+          </a:ln>
+        </p:spPr>
+        <p:style>
+          <a:lnRef idx="1">
+            <a:schemeClr val="accent1"/>
+          </a:lnRef>
+          <a:fillRef idx="3">
+            <a:schemeClr val="accent1"/>
+          </a:fillRef>
+          <a:effectRef idx="2">
+            <a:schemeClr val="accent1"/>
+          </a:effectRef>
+          <a:fontRef idx="minor">
+            <a:schemeClr val="lt1"/>
+          </a:fontRef>
+        </p:style>
+        <p:txBody>
+          <a:bodyPr rtlCol="0" anchor="ctr"/>
+          <a:lstStyle/>
+          <a:p>
+            <a:pPr algn="ctr"/>
+          </a:p>
+        </p:txBody>
+      </p:sp>
+      <p:sp>
+        <p:nvSpPr>
+          <p:cNvPr id="3" name="TextBox 2"/>
+          <p:cNvSpPr txBox="1"/>
+          <p:nvPr/>
+        </p:nvSpPr>
+        <p:spPr>
+          <a:xfrm>
+            <a:off x="502920" y="182880"/>
+            <a:ext cx="10972800" cy="640080"/>
+          </a:xfrm>
+          <a:prstGeom prst="rect">
+            <a:avLst/>
+          </a:prstGeom>
+          <a:noFill/>
+        </p:spPr>
+        <p:txBody>
+          <a:bodyPr wrap="none">
+            <a:spAutoFit/>
+          </a:bodyPr>
+          <a:lstStyle/>
+          <a:p>
+            <a:pPr>
+              <a:defRPr sz="2800" b="1">
+                <a:solidFill>
+                  <a:srgbClr val="FFFFFF"/>
+                </a:solidFill>
+              </a:defRPr>
+            </a:pPr>
+            <a:r>
+              <a:t>Wnioski końcowe</a:t>
+            </a:r>
+          </a:p>
+        </p:txBody>
+      </p:sp>
+      <p:sp>
+        <p:nvSpPr>
+          <p:cNvPr id="4" name="TextBox 3"/>
+          <p:cNvSpPr txBox="1"/>
+          <p:nvPr/>
+        </p:nvSpPr>
+        <p:spPr>
+          <a:xfrm>
+            <a:off x="685800" y="1143000"/>
+            <a:ext cx="10789920" cy="502920"/>
+          </a:xfrm>
+          <a:prstGeom prst="rect">
+            <a:avLst/>
+          </a:prstGeom>
+          <a:noFill/>
+        </p:spPr>
+        <p:txBody>
+          <a:bodyPr wrap="square">
+            <a:spAutoFit/>
+          </a:bodyPr>
+          <a:lstStyle/>
+          <a:p>
+            <a:pPr algn="l">
+              <a:defRPr sz="1700" b="0">
+                <a:solidFill>
+                  <a:srgbClr val="263238"/>
+                </a:solidFill>
+              </a:defRPr>
+            </a:pPr>
+            <a:r>
+              <a:t>•  Zużycie energii w Hiszpanii ma silną sezonowość roczną i tygodniową.</a:t>
+            </a:r>
+          </a:p>
+        </p:txBody>
+      </p:sp>
+      <p:sp>
+        <p:nvSpPr>
+          <p:cNvPr id="5" name="TextBox 4"/>
+          <p:cNvSpPr txBox="1"/>
+          <p:nvPr/>
+        </p:nvSpPr>
+        <p:spPr>
+          <a:xfrm>
+            <a:off x="685800" y="1581912"/>
+            <a:ext cx="10789920" cy="502920"/>
+          </a:xfrm>
+          <a:prstGeom prst="rect">
+            <a:avLst/>
+          </a:prstGeom>
+          <a:noFill/>
+        </p:spPr>
+        <p:txBody>
+          <a:bodyPr wrap="square">
+            <a:spAutoFit/>
+          </a:bodyPr>
+          <a:lstStyle/>
+          <a:p>
+            <a:pPr algn="l">
+              <a:defRPr sz="1700" b="0">
+                <a:solidFill>
+                  <a:srgbClr val="263238"/>
+                </a:solidFill>
+              </a:defRPr>
+            </a:pPr>
+            <a:r>
+              <a:t>•  Weekendy charakteryzują się istotnie niższym obciążeniem (~9% vs dni robocze).</a:t>
+            </a:r>
+          </a:p>
+        </p:txBody>
+      </p:sp>
+      <p:sp>
+        <p:nvSpPr>
+          <p:cNvPr id="6" name="TextBox 5"/>
+          <p:cNvSpPr txBox="1"/>
+          <p:nvPr/>
+        </p:nvSpPr>
+        <p:spPr>
+          <a:xfrm>
+            <a:off x="685800" y="2020824"/>
+            <a:ext cx="10789920" cy="502920"/>
+          </a:xfrm>
+          <a:prstGeom prst="rect">
+            <a:avLst/>
+          </a:prstGeom>
+          <a:noFill/>
+        </p:spPr>
+        <p:txBody>
+          <a:bodyPr wrap="square">
+            <a:spAutoFit/>
+          </a:bodyPr>
+          <a:lstStyle/>
+          <a:p>
+            <a:pPr algn="l">
+              <a:defRPr sz="1700" b="0">
+                <a:solidFill>
+                  <a:srgbClr val="263238"/>
+                </a:solidFill>
+              </a:defRPr>
+            </a:pPr>
+            <a:r>
+              <a:t>•  Temperatura jest istotnym predyktorem (korelacja ze zużyciem).</a:t>
+            </a:r>
+          </a:p>
+        </p:txBody>
+      </p:sp>
+      <p:sp>
+        <p:nvSpPr>
+          <p:cNvPr id="7" name="TextBox 6"/>
+          <p:cNvSpPr txBox="1"/>
+          <p:nvPr/>
+        </p:nvSpPr>
+        <p:spPr>
+          <a:xfrm>
+            <a:off x="685800" y="2459736"/>
+            <a:ext cx="10789920" cy="502920"/>
+          </a:xfrm>
+          <a:prstGeom prst="rect">
+            <a:avLst/>
+          </a:prstGeom>
+          <a:noFill/>
+        </p:spPr>
+        <p:txBody>
+          <a:bodyPr wrap="square">
+            <a:spAutoFit/>
+          </a:bodyPr>
+          <a:lstStyle/>
+          <a:p>
+            <a:pPr algn="l">
+              <a:defRPr sz="1700" b="0">
+                <a:solidFill>
+                  <a:srgbClr val="263238"/>
+                </a:solidFill>
+              </a:defRPr>
+            </a:pPr>
+            <a:r>
+              <a:t>•  Model regresji liniowej osiąga MAPE ≈ 11.7% — sensowny punkt odniesienia.</a:t>
+            </a:r>
+          </a:p>
+        </p:txBody>
+      </p:sp>
+      <p:sp>
+        <p:nvSpPr>
+          <p:cNvPr id="8" name="TextBox 7"/>
+          <p:cNvSpPr txBox="1"/>
+          <p:nvPr/>
+        </p:nvSpPr>
+        <p:spPr>
+          <a:xfrm>
+            <a:off x="685800" y="2898648"/>
+            <a:ext cx="10789920" cy="502920"/>
+          </a:xfrm>
+          <a:prstGeom prst="rect">
+            <a:avLst/>
+          </a:prstGeom>
+          <a:noFill/>
+        </p:spPr>
+        <p:txBody>
+          <a:bodyPr wrap="square">
+            <a:spAutoFit/>
+          </a:bodyPr>
+          <a:lstStyle/>
+          <a:p>
+            <a:pPr algn="l">
+              <a:defRPr sz="1700" b="0">
+                <a:solidFill>
+                  <a:srgbClr val="263238"/>
+                </a:solidFill>
+              </a:defRPr>
+            </a:pPr>
+            <a:r>
+              <a:t>•  Rekomendacja: modele sezonowe (SARIMA) lub ML z lagami dla produkcji.</a:t>
+            </a:r>
+          </a:p>
+        </p:txBody>
+      </p:sp>
+      <p:sp>
+        <p:nvSpPr>
+          <p:cNvPr id="9" name="Rectangle 8"/>
+          <p:cNvSpPr/>
+          <p:nvPr/>
+        </p:nvSpPr>
+        <p:spPr>
+          <a:xfrm>
+            <a:off x="0" y="6537960"/>
+            <a:ext cx="12191695" cy="320040"/>
+          </a:xfrm>
+          <a:prstGeom prst="rect">
+            <a:avLst/>
+          </a:prstGeom>
+          <a:solidFill>
+            <a:srgbClr val="ECEFF1"/>
+          </a:solidFill>
+          <a:ln>
+            <a:noFill/>
+          </a:ln>
+        </p:spPr>
+        <p:style>
+          <a:lnRef idx="1">
+            <a:schemeClr val="accent1"/>
+          </a:lnRef>
+          <a:fillRef idx="3">
+            <a:schemeClr val="accent1"/>
+          </a:fillRef>
+          <a:effectRef idx="2">
+            <a:schemeClr val="accent1"/>
+          </a:effectRef>
+          <a:fontRef idx="minor">
+            <a:schemeClr val="lt1"/>
+          </a:fontRef>
+        </p:style>
+        <p:txBody>
+          <a:bodyPr rtlCol="0" anchor="ctr"/>
+          <a:lstStyle/>
+          <a:p>
+            <a:pPr algn="ctr"/>
+          </a:p>
+        </p:txBody>
+      </p:sp>
+      <p:sp>
+        <p:nvSpPr>
+          <p:cNvPr id="10" name="TextBox 9"/>
+          <p:cNvSpPr txBox="1"/>
+          <p:nvPr/>
+        </p:nvSpPr>
+        <p:spPr>
+          <a:xfrm>
+            <a:off x="457200" y="6565392"/>
+            <a:ext cx="7315200" cy="256032"/>
+          </a:xfrm>
+          <a:prstGeom prst="rect">
+            <a:avLst/>
+          </a:prstGeom>
+          <a:noFill/>
+        </p:spPr>
+        <p:txBody>
+          <a:bodyPr wrap="none">
+            <a:spAutoFit/>
+          </a:bodyPr>
+          <a:lstStyle/>
+          <a:p>
+            <a:pPr>
+              <a:defRPr sz="900">
+                <a:solidFill>
+                  <a:srgbClr val="607D8B"/>
+                </a:solidFill>
+              </a:defRPr>
+            </a:pPr>
+            <a:r>
+              <a:t>Analiza i wizualizacja danych – Pandas, DataFrame  •  Merito Chorzów</a:t>
+            </a:r>
+          </a:p>
+        </p:txBody>
+      </p:sp>
+      <p:sp>
+        <p:nvSpPr>
+          <p:cNvPr id="11" name="TextBox 10"/>
+          <p:cNvSpPr txBox="1"/>
+          <p:nvPr/>
+        </p:nvSpPr>
+        <p:spPr>
+          <a:xfrm>
+            <a:off x="11094415" y="6565392"/>
+            <a:ext cx="731520" cy="256032"/>
+          </a:xfrm>
+          <a:prstGeom prst="rect">
+            <a:avLst/>
+          </a:prstGeom>
+          <a:noFill/>
+        </p:spPr>
+        <p:txBody>
+          <a:bodyPr wrap="none">
+            <a:spAutoFit/>
+          </a:bodyPr>
+          <a:lstStyle/>
+          <a:p>
+            <a:pPr algn="r">
+              <a:defRPr sz="900">
+                <a:solidFill>
+                  <a:srgbClr val="607D8B"/>
+                </a:solidFill>
+              </a:defRPr>
+            </a:pPr>
+            <a:r>
+              <a:t>25</a:t>
+            </a:r>
+          </a:p>
+        </p:txBody>
+      </p:sp>
+    </p:spTree>
+  </p:cSld>
+  <p:clrMapOvr>
+    <a:masterClrMapping/>
+  </p:clrMapOvr>
+</p:sld>
+</file>
+
+<file path=ppt/slides/slide27.xml><?xml version="1.0" encoding="utf-8"?>
+<p:sld xmlns:a="http://schemas.openxmlformats.org/drawingml/2006/main" xmlns:p="http://schemas.openxmlformats.org/presentationml/2006/main" xmlns:r="http://schemas.openxmlformats.org/officeDocument/2006/relationships">
+  <p:cSld>
+    <p:spTree>
+      <p:nvGrpSpPr>
+        <p:cNvPr id="1" name=""/>
+        <p:cNvGrpSpPr/>
+        <p:nvPr/>
+      </p:nvGrpSpPr>
+      <p:grpSpPr/>
+      <p:sp>
+        <p:nvSpPr>
+          <p:cNvPr id="2" name="Rectangle 1"/>
+          <p:cNvSpPr/>
+          <p:nvPr/>
+        </p:nvSpPr>
+        <p:spPr>
+          <a:xfrm>
+            <a:off x="0" y="0"/>
+            <a:ext cx="12191695" cy="6858000"/>
+          </a:xfrm>
+          <a:prstGeom prst="rect">
+            <a:avLst/>
+          </a:prstGeom>
+          <a:solidFill>
+            <a:srgbClr val="2E7D32"/>
+          </a:solidFill>
+          <a:ln>
+            <a:noFill/>
+          </a:ln>
+        </p:spPr>
+        <p:style>
+          <a:lnRef idx="1">
+            <a:schemeClr val="accent1"/>
+          </a:lnRef>
+          <a:fillRef idx="3">
+            <a:schemeClr val="accent1"/>
+          </a:fillRef>
+          <a:effectRef idx="2">
+            <a:schemeClr val="accent1"/>
+          </a:effectRef>
+          <a:fontRef idx="minor">
+            <a:schemeClr val="lt1"/>
+          </a:fontRef>
+        </p:style>
+        <p:txBody>
+          <a:bodyPr rtlCol="0" anchor="ctr"/>
+          <a:lstStyle/>
+          <a:p>
+            <a:pPr algn="ctr"/>
+          </a:p>
+        </p:txBody>
+      </p:sp>
+      <p:sp>
+        <p:nvSpPr>
+          <p:cNvPr id="3" name="TextBox 2"/>
+          <p:cNvSpPr txBox="1"/>
+          <p:nvPr/>
+        </p:nvSpPr>
+        <p:spPr>
+          <a:xfrm>
+            <a:off x="914400" y="2286000"/>
+            <a:ext cx="10058400" cy="914400"/>
+          </a:xfrm>
+          <a:prstGeom prst="rect">
+            <a:avLst/>
+          </a:prstGeom>
+          <a:noFill/>
+        </p:spPr>
+        <p:txBody>
+          <a:bodyPr wrap="square">
+            <a:spAutoFit/>
+          </a:bodyPr>
+          <a:lstStyle/>
+          <a:p>
+            <a:pPr algn="ctr">
+              <a:defRPr sz="4000" b="1">
+                <a:solidFill>
+                  <a:srgbClr val="FFFFFF"/>
+                </a:solidFill>
+              </a:defRPr>
+            </a:pPr>
+            <a:r>
+              <a:t>Dziękujemy za uwagę</a:t>
+            </a:r>
+          </a:p>
+        </p:txBody>
+      </p:sp>
+      <p:sp>
+        <p:nvSpPr>
+          <p:cNvPr id="4" name="TextBox 3"/>
+          <p:cNvSpPr txBox="1"/>
+          <p:nvPr/>
+        </p:nvSpPr>
+        <p:spPr>
+          <a:xfrm>
+            <a:off x="914400" y="3291840"/>
+            <a:ext cx="10058400" cy="548640"/>
+          </a:xfrm>
+          <a:prstGeom prst="rect">
+            <a:avLst/>
+          </a:prstGeom>
+          <a:noFill/>
+        </p:spPr>
+        <p:txBody>
+          <a:bodyPr wrap="square">
+            <a:spAutoFit/>
+          </a:bodyPr>
+          <a:lstStyle/>
+          <a:p>
+            <a:pPr algn="ctr">
+              <a:defRPr sz="2200" b="0">
+                <a:solidFill>
+                  <a:srgbClr val="FFFFFF"/>
+                </a:solidFill>
+              </a:defRPr>
+            </a:pPr>
+            <a:r>
+              <a:t>Pytania i dyskusja</a:t>
+            </a:r>
+          </a:p>
+        </p:txBody>
+      </p:sp>
+      <p:sp>
+        <p:nvSpPr>
+          <p:cNvPr id="5" name="TextBox 4"/>
+          <p:cNvSpPr txBox="1"/>
+          <p:nvPr/>
+        </p:nvSpPr>
+        <p:spPr>
+          <a:xfrm>
+            <a:off x="914400" y="4114800"/>
+            <a:ext cx="10058400" cy="457200"/>
+          </a:xfrm>
+          <a:prstGeom prst="rect">
+            <a:avLst/>
+          </a:prstGeom>
+          <a:noFill/>
+        </p:spPr>
+        <p:txBody>
+          <a:bodyPr wrap="square">
+            <a:spAutoFit/>
+          </a:bodyPr>
+          <a:lstStyle/>
+          <a:p>
+            <a:pPr algn="ctr">
+              <a:defRPr sz="1200" b="0">
+                <a:solidFill>
+                  <a:srgbClr val="FFFFFF"/>
+                </a:solidFill>
+              </a:defRPr>
+            </a:pPr>
+            <a:r>
+              <a:t>https://github.com/BartoszBugla/prognoza-zapotrzebowania-na-energie</a:t>
             </a:r>
           </a:p>
         </p:txBody>
@@ -4109,8 +10033,43 @@
         </p:nvSpPr>
         <p:spPr>
           <a:xfrm>
-            <a:off x="502920" y="201168"/>
-            <a:ext cx="10972800" cy="502920"/>
+            <a:off x="502920" y="182880"/>
+            <a:ext cx="10972800" cy="640080"/>
+          </a:xfrm>
+          <a:prstGeom prst="rect">
+            <a:avLst/>
+          </a:prstGeom>
+          <a:noFill/>
+        </p:spPr>
+        <p:txBody>
+          <a:bodyPr wrap="none">
+            <a:spAutoFit/>
+          </a:bodyPr>
+          <a:lstStyle/>
+          <a:p>
+            <a:pPr>
+              <a:defRPr sz="2800" b="1">
+                <a:solidFill>
+                  <a:srgbClr val="FFFFFF"/>
+                </a:solidFill>
+              </a:defRPr>
+            </a:pPr>
+            <a:r>
+              <a:t>Problem badawczy</a:t>
+            </a:r>
+          </a:p>
+        </p:txBody>
+      </p:sp>
+      <p:sp>
+        <p:nvSpPr>
+          <p:cNvPr id="4" name="TextBox 3"/>
+          <p:cNvSpPr txBox="1"/>
+          <p:nvPr/>
+        </p:nvSpPr>
+        <p:spPr>
+          <a:xfrm>
+            <a:off x="685800" y="1143000"/>
+            <a:ext cx="10789920" cy="365760"/>
           </a:xfrm>
           <a:prstGeom prst="rect">
             <a:avLst/>
@@ -4124,28 +10083,28 @@
           <a:lstStyle/>
           <a:p>
             <a:pPr algn="l">
-              <a:defRPr sz="2600" b="1">
-                <a:solidFill>
-                  <a:srgbClr val="FFFFFF"/>
-                </a:solidFill>
-              </a:defRPr>
-            </a:pPr>
-            <a:r>
-              <a:t>Zbiór danych</a:t>
-            </a:r>
-          </a:p>
-        </p:txBody>
-      </p:sp>
-      <p:sp>
-        <p:nvSpPr>
-          <p:cNvPr id="4" name="TextBox 3"/>
-          <p:cNvSpPr txBox="1"/>
-          <p:nvPr/>
-        </p:nvSpPr>
-        <p:spPr>
-          <a:xfrm>
-            <a:off x="777240" y="1143000"/>
-            <a:ext cx="10515600" cy="502920"/>
+              <a:defRPr sz="1400" b="0">
+                <a:solidFill>
+                  <a:srgbClr val="607D8B"/>
+                </a:solidFill>
+              </a:defRPr>
+            </a:pPr>
+            <a:r>
+              <a:t>Projekt zaliczeniowy — Python + Pandas</a:t>
+            </a:r>
+          </a:p>
+        </p:txBody>
+      </p:sp>
+      <p:sp>
+        <p:nvSpPr>
+          <p:cNvPr id="5" name="TextBox 4"/>
+          <p:cNvSpPr txBox="1"/>
+          <p:nvPr/>
+        </p:nvSpPr>
+        <p:spPr>
+          <a:xfrm>
+            <a:off x="685800" y="1600200"/>
+            <a:ext cx="10789920" cy="502920"/>
           </a:xfrm>
           <a:prstGeom prst="rect">
             <a:avLst/>
@@ -4166,21 +10125,21 @@
               </a:defRPr>
             </a:pPr>
             <a:r>
-              <a:t>•  35,064 obserwacji godzinowych  •  2014-12-31 – 2018-12-31</a:t>
-            </a:r>
-          </a:p>
-        </p:txBody>
-      </p:sp>
-      <p:sp>
-        <p:nvSpPr>
-          <p:cNvPr id="5" name="TextBox 4"/>
-          <p:cNvSpPr txBox="1"/>
-          <p:nvPr/>
-        </p:nvSpPr>
-        <p:spPr>
-          <a:xfrm>
-            <a:off x="777240" y="1618488"/>
-            <a:ext cx="10515600" cy="502920"/>
+              <a:t>•  System elektroenergetyczny wymaga bilansowania produkcji i zużycia w każdej godzinie.</a:t>
+            </a:r>
+          </a:p>
+        </p:txBody>
+      </p:sp>
+      <p:sp>
+        <p:nvSpPr>
+          <p:cNvPr id="6" name="TextBox 5"/>
+          <p:cNvSpPr txBox="1"/>
+          <p:nvPr/>
+        </p:nvSpPr>
+        <p:spPr>
+          <a:xfrm>
+            <a:off x="685800" y="2039112"/>
+            <a:ext cx="10789920" cy="502920"/>
           </a:xfrm>
           <a:prstGeom prst="rect">
             <a:avLst/>
@@ -4201,21 +10160,21 @@
               </a:defRPr>
             </a:pPr>
             <a:r>
-              <a:t>•  Zużycie, produkcja ze źródeł, ceny, pogoda (5 miast)</a:t>
-            </a:r>
-          </a:p>
-        </p:txBody>
-      </p:sp>
-      <p:sp>
-        <p:nvSpPr>
-          <p:cNvPr id="6" name="TextBox 5"/>
-          <p:cNvSpPr txBox="1"/>
-          <p:nvPr/>
-        </p:nvSpPr>
-        <p:spPr>
-          <a:xfrm>
-            <a:off x="777240" y="2093976"/>
-            <a:ext cx="10515600" cy="502920"/>
+              <a:t>•  Operatorzy i traderzy potrzebują prognoz obciążenia (load forecasting).</a:t>
+            </a:r>
+          </a:p>
+        </p:txBody>
+      </p:sp>
+      <p:sp>
+        <p:nvSpPr>
+          <p:cNvPr id="7" name="TextBox 6"/>
+          <p:cNvSpPr txBox="1"/>
+          <p:nvPr/>
+        </p:nvSpPr>
+        <p:spPr>
+          <a:xfrm>
+            <a:off x="685800" y="2478024"/>
+            <a:ext cx="10789920" cy="502920"/>
           </a:xfrm>
           <a:prstGeom prst="rect">
             <a:avLst/>
@@ -4236,21 +10195,21 @@
               </a:defRPr>
             </a:pPr>
             <a:r>
-              <a:t>•  Źródło: Kaggle / ENTSO-E, Red Eléctrica</a:t>
-            </a:r>
-          </a:p>
-        </p:txBody>
-      </p:sp>
-      <p:sp>
-        <p:nvSpPr>
-          <p:cNvPr id="7" name="TextBox 6"/>
-          <p:cNvSpPr txBox="1"/>
-          <p:nvPr/>
-        </p:nvSpPr>
-        <p:spPr>
-          <a:xfrm>
-            <a:off x="777240" y="2569464"/>
-            <a:ext cx="10515600" cy="502920"/>
+              <a:t>•  Cel projektu: zrozumieć wzorce zużycia w Hiszpanii (2015–2018) i zbudować baseline predykcyjny.</a:t>
+            </a:r>
+          </a:p>
+        </p:txBody>
+      </p:sp>
+      <p:sp>
+        <p:nvSpPr>
+          <p:cNvPr id="8" name="TextBox 7"/>
+          <p:cNvSpPr txBox="1"/>
+          <p:nvPr/>
+        </p:nvSpPr>
+        <p:spPr>
+          <a:xfrm>
+            <a:off x="685800" y="2916936"/>
+            <a:ext cx="10789920" cy="502920"/>
           </a:xfrm>
           <a:prstGeom prst="rect">
             <a:avLst/>
@@ -4271,7 +10230,120 @@
               </a:defRPr>
             </a:pPr>
             <a:r>
-              <a:t>•  Narzędzia: Python, Pandas, Matplotlib, Seaborn, Plotly, scikit-learn</a:t>
+              <a:t>•  Hipotezy: sezonowość, niższe zużycie w weekendy, związek zużycia z temperaturą.</a:t>
+            </a:r>
+          </a:p>
+        </p:txBody>
+      </p:sp>
+      <p:sp>
+        <p:nvSpPr>
+          <p:cNvPr id="9" name="Rectangle 8"/>
+          <p:cNvSpPr/>
+          <p:nvPr/>
+        </p:nvSpPr>
+        <p:spPr>
+          <a:xfrm>
+            <a:off x="0" y="6537960"/>
+            <a:ext cx="12191695" cy="320040"/>
+          </a:xfrm>
+          <a:prstGeom prst="rect">
+            <a:avLst/>
+          </a:prstGeom>
+          <a:solidFill>
+            <a:srgbClr val="ECEFF1"/>
+          </a:solidFill>
+          <a:ln>
+            <a:noFill/>
+          </a:ln>
+        </p:spPr>
+        <p:style>
+          <a:lnRef idx="1">
+            <a:schemeClr val="accent1"/>
+          </a:lnRef>
+          <a:fillRef idx="3">
+            <a:schemeClr val="accent1"/>
+          </a:fillRef>
+          <a:effectRef idx="2">
+            <a:schemeClr val="accent1"/>
+          </a:effectRef>
+          <a:fontRef idx="minor">
+            <a:schemeClr val="lt1"/>
+          </a:fontRef>
+        </p:style>
+        <p:txBody>
+          <a:bodyPr rtlCol="0" anchor="ctr"/>
+          <a:lstStyle/>
+          <a:p>
+            <a:pPr algn="ctr"/>
+          </a:p>
+        </p:txBody>
+      </p:sp>
+      <p:sp>
+        <p:nvSpPr>
+          <p:cNvPr id="10" name="TextBox 9"/>
+          <p:cNvSpPr txBox="1"/>
+          <p:nvPr/>
+        </p:nvSpPr>
+        <p:spPr>
+          <a:xfrm>
+            <a:off x="457200" y="6565392"/>
+            <a:ext cx="7315200" cy="256032"/>
+          </a:xfrm>
+          <a:prstGeom prst="rect">
+            <a:avLst/>
+          </a:prstGeom>
+          <a:noFill/>
+        </p:spPr>
+        <p:txBody>
+          <a:bodyPr wrap="none">
+            <a:spAutoFit/>
+          </a:bodyPr>
+          <a:lstStyle/>
+          <a:p>
+            <a:pPr>
+              <a:defRPr sz="900">
+                <a:solidFill>
+                  <a:srgbClr val="607D8B"/>
+                </a:solidFill>
+              </a:defRPr>
+            </a:pPr>
+            <a:r>
+              <a:t>Analiza i wizualizacja danych – Pandas, DataFrame  •  Merito Chorzów</a:t>
+            </a:r>
+          </a:p>
+        </p:txBody>
+      </p:sp>
+      <p:sp>
+        <p:nvSpPr>
+          <p:cNvPr id="11" name="TextBox 10"/>
+          <p:cNvSpPr txBox="1"/>
+          <p:nvPr/>
+        </p:nvSpPr>
+        <p:spPr>
+          <a:xfrm>
+            <a:off x="11094415" y="6565392"/>
+            <a:ext cx="731520" cy="256032"/>
+          </a:xfrm>
+          <a:prstGeom prst="rect">
+            <a:avLst/>
+          </a:prstGeom>
+          <a:noFill/>
+        </p:spPr>
+        <p:txBody>
+          <a:bodyPr wrap="none">
+            <a:spAutoFit/>
+          </a:bodyPr>
+          <a:lstStyle/>
+          <a:p>
+            <a:pPr algn="r">
+              <a:defRPr sz="900">
+                <a:solidFill>
+                  <a:srgbClr val="607D8B"/>
+                </a:solidFill>
+              </a:defRPr>
+            </a:pPr>
+            <a:r>
+              <a:t>2</a:t>
             </a:r>
           </a:p>
         </p:txBody>
@@ -4345,8 +10417,43 @@
         </p:nvSpPr>
         <p:spPr>
           <a:xfrm>
-            <a:off x="502920" y="201168"/>
-            <a:ext cx="10972800" cy="502920"/>
+            <a:off x="502920" y="182880"/>
+            <a:ext cx="10972800" cy="640080"/>
+          </a:xfrm>
+          <a:prstGeom prst="rect">
+            <a:avLst/>
+          </a:prstGeom>
+          <a:noFill/>
+        </p:spPr>
+        <p:txBody>
+          <a:bodyPr wrap="none">
+            <a:spAutoFit/>
+          </a:bodyPr>
+          <a:lstStyle/>
+          <a:p>
+            <a:pPr>
+              <a:defRPr sz="2800" b="1">
+                <a:solidFill>
+                  <a:srgbClr val="FFFFFF"/>
+                </a:solidFill>
+              </a:defRPr>
+            </a:pPr>
+            <a:r>
+              <a:t>Zespół i repozytorium</a:t>
+            </a:r>
+          </a:p>
+        </p:txBody>
+      </p:sp>
+      <p:sp>
+        <p:nvSpPr>
+          <p:cNvPr id="4" name="TextBox 3"/>
+          <p:cNvSpPr txBox="1"/>
+          <p:nvPr/>
+        </p:nvSpPr>
+        <p:spPr>
+          <a:xfrm>
+            <a:off x="502920" y="1097280"/>
+            <a:ext cx="5303520" cy="320040"/>
           </a:xfrm>
           <a:prstGeom prst="rect">
             <a:avLst/>
@@ -4360,28 +10467,28 @@
           <a:lstStyle/>
           <a:p>
             <a:pPr algn="l">
-              <a:defRPr sz="2600" b="1">
-                <a:solidFill>
-                  <a:srgbClr val="FFFFFF"/>
-                </a:solidFill>
-              </a:defRPr>
-            </a:pPr>
-            <a:r>
-              <a:t>Przygotowanie danych</a:t>
-            </a:r>
-          </a:p>
-        </p:txBody>
-      </p:sp>
-      <p:sp>
-        <p:nvSpPr>
-          <p:cNvPr id="4" name="TextBox 3"/>
-          <p:cNvSpPr txBox="1"/>
-          <p:nvPr/>
-        </p:nvSpPr>
-        <p:spPr>
-          <a:xfrm>
-            <a:off x="777240" y="1143000"/>
-            <a:ext cx="10515600" cy="502920"/>
+              <a:defRPr sz="1300" b="1">
+                <a:solidFill>
+                  <a:srgbClr val="1565C0"/>
+                </a:solidFill>
+              </a:defRPr>
+            </a:pPr>
+            <a:r>
+              <a:t>Kluczowe informacje</a:t>
+            </a:r>
+          </a:p>
+        </p:txBody>
+      </p:sp>
+      <p:sp>
+        <p:nvSpPr>
+          <p:cNvPr id="5" name="TextBox 4"/>
+          <p:cNvSpPr txBox="1"/>
+          <p:nvPr/>
+        </p:nvSpPr>
+        <p:spPr>
+          <a:xfrm>
+            <a:off x="6309360" y="1097280"/>
+            <a:ext cx="5303520" cy="320040"/>
           </a:xfrm>
           <a:prstGeom prst="rect">
             <a:avLst/>
@@ -4395,28 +10502,63 @@
           <a:lstStyle/>
           <a:p>
             <a:pPr algn="l">
-              <a:defRPr sz="1700" b="0">
+              <a:defRPr sz="1300" b="1">
+                <a:solidFill>
+                  <a:srgbClr val="2E7D32"/>
+                </a:solidFill>
+              </a:defRPr>
+            </a:pPr>
+            <a:r>
+              <a:t>Metody / narzędzia</a:t>
+            </a:r>
+          </a:p>
+        </p:txBody>
+      </p:sp>
+      <p:sp>
+        <p:nvSpPr>
+          <p:cNvPr id="6" name="TextBox 5"/>
+          <p:cNvSpPr txBox="1"/>
+          <p:nvPr/>
+        </p:nvSpPr>
+        <p:spPr>
+          <a:xfrm>
+            <a:off x="502920" y="1417320"/>
+            <a:ext cx="5394960" cy="502920"/>
+          </a:xfrm>
+          <a:prstGeom prst="rect">
+            <a:avLst/>
+          </a:prstGeom>
+          <a:noFill/>
+        </p:spPr>
+        <p:txBody>
+          <a:bodyPr wrap="square">
+            <a:spAutoFit/>
+          </a:bodyPr>
+          <a:lstStyle/>
+          <a:p>
+            <a:pPr algn="l">
+              <a:defRPr sz="1500" b="0">
                 <a:solidFill>
                   <a:srgbClr val="263238"/>
                 </a:solidFill>
               </a:defRPr>
             </a:pPr>
             <a:r>
-              <a:t>•  Wczytanie CSV → DataFrame z indeksem czasowym (UTC)</a:t>
-            </a:r>
-          </a:p>
-        </p:txBody>
-      </p:sp>
-      <p:sp>
-        <p:nvSpPr>
-          <p:cNvPr id="5" name="TextBox 4"/>
-          <p:cNvSpPr txBox="1"/>
-          <p:nvPr/>
-        </p:nvSpPr>
-        <p:spPr>
-          <a:xfrm>
-            <a:off x="777240" y="1618488"/>
-            <a:ext cx="10515600" cy="502920"/>
+              <a:t>•  Dawid Hetmańczyk — album 126674</a:t>
+            </a:r>
+          </a:p>
+        </p:txBody>
+      </p:sp>
+      <p:sp>
+        <p:nvSpPr>
+          <p:cNvPr id="7" name="TextBox 6"/>
+          <p:cNvSpPr txBox="1"/>
+          <p:nvPr/>
+        </p:nvSpPr>
+        <p:spPr>
+          <a:xfrm>
+            <a:off x="502920" y="1819656"/>
+            <a:ext cx="5394960" cy="502920"/>
           </a:xfrm>
           <a:prstGeom prst="rect">
             <a:avLst/>
@@ -4430,28 +10572,28 @@
           <a:lstStyle/>
           <a:p>
             <a:pPr algn="l">
-              <a:defRPr sz="1700" b="0">
+              <a:defRPr sz="1500" b="0">
                 <a:solidFill>
                   <a:srgbClr val="263238"/>
                 </a:solidFill>
               </a:defRPr>
             </a:pPr>
             <a:r>
-              <a:t>•  Usunięcie pustych kolumn, uzupełnienie braków (ffill/bfill)</a:t>
-            </a:r>
-          </a:p>
-        </p:txBody>
-      </p:sp>
-      <p:sp>
-        <p:nvSpPr>
-          <p:cNvPr id="6" name="TextBox 5"/>
-          <p:cNvSpPr txBox="1"/>
-          <p:nvPr/>
-        </p:nvSpPr>
-        <p:spPr>
-          <a:xfrm>
-            <a:off x="777240" y="2093976"/>
-            <a:ext cx="10515600" cy="502920"/>
+              <a:t>•  Bartosz Bugla — album 180737</a:t>
+            </a:r>
+          </a:p>
+        </p:txBody>
+      </p:sp>
+      <p:sp>
+        <p:nvSpPr>
+          <p:cNvPr id="8" name="TextBox 7"/>
+          <p:cNvSpPr txBox="1"/>
+          <p:nvPr/>
+        </p:nvSpPr>
+        <p:spPr>
+          <a:xfrm>
+            <a:off x="6309360" y="1417320"/>
+            <a:ext cx="5394960" cy="502920"/>
           </a:xfrm>
           <a:prstGeom prst="rect">
             <a:avLst/>
@@ -4465,14 +10607,232 @@
           <a:lstStyle/>
           <a:p>
             <a:pPr algn="l">
-              <a:defRPr sz="1700" b="0">
+              <a:defRPr sz="1500" b="0">
                 <a:solidFill>
                   <a:srgbClr val="263238"/>
                 </a:solidFill>
               </a:defRPr>
             </a:pPr>
             <a:r>
-              <a:t>•  Scalenie energii + pogody, cechy: godzina, weekend, udział OZE</a:t>
+              <a:t>•  GitHub: https://github.com/BartoszBugla/prognoza-zapotrzebowania-na-energie</a:t>
+            </a:r>
+          </a:p>
+        </p:txBody>
+      </p:sp>
+      <p:sp>
+        <p:nvSpPr>
+          <p:cNvPr id="9" name="TextBox 8"/>
+          <p:cNvSpPr txBox="1"/>
+          <p:nvPr/>
+        </p:nvSpPr>
+        <p:spPr>
+          <a:xfrm>
+            <a:off x="6309360" y="1819656"/>
+            <a:ext cx="5394960" cy="502920"/>
+          </a:xfrm>
+          <a:prstGeom prst="rect">
+            <a:avLst/>
+          </a:prstGeom>
+          <a:noFill/>
+        </p:spPr>
+        <p:txBody>
+          <a:bodyPr wrap="square">
+            <a:spAutoFit/>
+          </a:bodyPr>
+          <a:lstStyle/>
+          <a:p>
+            <a:pPr algn="l">
+              <a:defRPr sz="1500" b="0">
+                <a:solidFill>
+                  <a:srgbClr val="263238"/>
+                </a:solidFill>
+              </a:defRPr>
+            </a:pPr>
+            <a:r>
+              <a:t>•  Kod: analiza.ipynb (główna analiza)</a:t>
+            </a:r>
+          </a:p>
+        </p:txBody>
+      </p:sp>
+      <p:sp>
+        <p:nvSpPr>
+          <p:cNvPr id="10" name="TextBox 9"/>
+          <p:cNvSpPr txBox="1"/>
+          <p:nvPr/>
+        </p:nvSpPr>
+        <p:spPr>
+          <a:xfrm>
+            <a:off x="6309360" y="2221992"/>
+            <a:ext cx="5394960" cy="502920"/>
+          </a:xfrm>
+          <a:prstGeom prst="rect">
+            <a:avLst/>
+          </a:prstGeom>
+          <a:noFill/>
+        </p:spPr>
+        <p:txBody>
+          <a:bodyPr wrap="square">
+            <a:spAutoFit/>
+          </a:bodyPr>
+          <a:lstStyle/>
+          <a:p>
+            <a:pPr algn="l">
+              <a:defRPr sz="1500" b="0">
+                <a:solidFill>
+                  <a:srgbClr val="263238"/>
+                </a:solidFill>
+              </a:defRPr>
+            </a:pPr>
+            <a:r>
+              <a:t>•  Raport: docs/raport.docx</a:t>
+            </a:r>
+          </a:p>
+        </p:txBody>
+      </p:sp>
+      <p:sp>
+        <p:nvSpPr>
+          <p:cNvPr id="11" name="TextBox 10"/>
+          <p:cNvSpPr txBox="1"/>
+          <p:nvPr/>
+        </p:nvSpPr>
+        <p:spPr>
+          <a:xfrm>
+            <a:off x="6309360" y="2624328"/>
+            <a:ext cx="5394960" cy="502920"/>
+          </a:xfrm>
+          <a:prstGeom prst="rect">
+            <a:avLst/>
+          </a:prstGeom>
+          <a:noFill/>
+        </p:spPr>
+        <p:txBody>
+          <a:bodyPr wrap="square">
+            <a:spAutoFit/>
+          </a:bodyPr>
+          <a:lstStyle/>
+          <a:p>
+            <a:pPr algn="l">
+              <a:defRPr sz="1500" b="0">
+                <a:solidFill>
+                  <a:srgbClr val="263238"/>
+                </a:solidFill>
+              </a:defRPr>
+            </a:pPr>
+            <a:r>
+              <a:t>•  Udostępnienie prowadzącej: akkosan</a:t>
+            </a:r>
+          </a:p>
+        </p:txBody>
+      </p:sp>
+      <p:sp>
+        <p:nvSpPr>
+          <p:cNvPr id="12" name="Rectangle 11"/>
+          <p:cNvSpPr/>
+          <p:nvPr/>
+        </p:nvSpPr>
+        <p:spPr>
+          <a:xfrm>
+            <a:off x="0" y="6537960"/>
+            <a:ext cx="12191695" cy="320040"/>
+          </a:xfrm>
+          <a:prstGeom prst="rect">
+            <a:avLst/>
+          </a:prstGeom>
+          <a:solidFill>
+            <a:srgbClr val="ECEFF1"/>
+          </a:solidFill>
+          <a:ln>
+            <a:noFill/>
+          </a:ln>
+        </p:spPr>
+        <p:style>
+          <a:lnRef idx="1">
+            <a:schemeClr val="accent1"/>
+          </a:lnRef>
+          <a:fillRef idx="3">
+            <a:schemeClr val="accent1"/>
+          </a:fillRef>
+          <a:effectRef idx="2">
+            <a:schemeClr val="accent1"/>
+          </a:effectRef>
+          <a:fontRef idx="minor">
+            <a:schemeClr val="lt1"/>
+          </a:fontRef>
+        </p:style>
+        <p:txBody>
+          <a:bodyPr rtlCol="0" anchor="ctr"/>
+          <a:lstStyle/>
+          <a:p>
+            <a:pPr algn="ctr"/>
+          </a:p>
+        </p:txBody>
+      </p:sp>
+      <p:sp>
+        <p:nvSpPr>
+          <p:cNvPr id="13" name="TextBox 12"/>
+          <p:cNvSpPr txBox="1"/>
+          <p:nvPr/>
+        </p:nvSpPr>
+        <p:spPr>
+          <a:xfrm>
+            <a:off x="457200" y="6565392"/>
+            <a:ext cx="7315200" cy="256032"/>
+          </a:xfrm>
+          <a:prstGeom prst="rect">
+            <a:avLst/>
+          </a:prstGeom>
+          <a:noFill/>
+        </p:spPr>
+        <p:txBody>
+          <a:bodyPr wrap="none">
+            <a:spAutoFit/>
+          </a:bodyPr>
+          <a:lstStyle/>
+          <a:p>
+            <a:pPr>
+              <a:defRPr sz="900">
+                <a:solidFill>
+                  <a:srgbClr val="607D8B"/>
+                </a:solidFill>
+              </a:defRPr>
+            </a:pPr>
+            <a:r>
+              <a:t>Analiza i wizualizacja danych – Pandas, DataFrame  •  Merito Chorzów</a:t>
+            </a:r>
+          </a:p>
+        </p:txBody>
+      </p:sp>
+      <p:sp>
+        <p:nvSpPr>
+          <p:cNvPr id="14" name="TextBox 13"/>
+          <p:cNvSpPr txBox="1"/>
+          <p:nvPr/>
+        </p:nvSpPr>
+        <p:spPr>
+          <a:xfrm>
+            <a:off x="11094415" y="6565392"/>
+            <a:ext cx="731520" cy="256032"/>
+          </a:xfrm>
+          <a:prstGeom prst="rect">
+            <a:avLst/>
+          </a:prstGeom>
+          <a:noFill/>
+        </p:spPr>
+        <p:txBody>
+          <a:bodyPr wrap="none">
+            <a:spAutoFit/>
+          </a:bodyPr>
+          <a:lstStyle/>
+          <a:p>
+            <a:pPr algn="r">
+              <a:defRPr sz="900">
+                <a:solidFill>
+                  <a:srgbClr val="607D8B"/>
+                </a:solidFill>
+              </a:defRPr>
+            </a:pPr>
+            <a:r>
+              <a:t>3</a:t>
             </a:r>
           </a:p>
         </p:txBody>
@@ -4504,13 +10864,13 @@
         <p:spPr>
           <a:xfrm>
             <a:off x="0" y="0"/>
-            <a:ext cx="12191695" cy="960120"/>
+            <a:ext cx="12191695" cy="6858000"/>
           </a:xfrm>
           <a:prstGeom prst="rect">
             <a:avLst/>
           </a:prstGeom>
           <a:solidFill>
-            <a:srgbClr val="1565C0"/>
+            <a:srgbClr val="263238"/>
           </a:solidFill>
           <a:ln>
             <a:noFill/>
@@ -4546,8 +10906,8 @@
         </p:nvSpPr>
         <p:spPr>
           <a:xfrm>
-            <a:off x="502920" y="201168"/>
-            <a:ext cx="10972800" cy="502920"/>
+            <a:off x="822960" y="2011680"/>
+            <a:ext cx="1828800" cy="1097280"/>
           </a:xfrm>
           <a:prstGeom prst="rect">
             <a:avLst/>
@@ -4561,73 +10921,162 @@
           <a:lstStyle/>
           <a:p>
             <a:pPr algn="l">
-              <a:defRPr sz="2400" b="1">
+              <a:defRPr sz="7200" b="1">
+                <a:solidFill>
+                  <a:srgbClr val="2E7D32"/>
+                </a:solidFill>
+              </a:defRPr>
+            </a:pPr>
+            <a:r>
+              <a:t>01</a:t>
+            </a:r>
+          </a:p>
+        </p:txBody>
+      </p:sp>
+      <p:sp>
+        <p:nvSpPr>
+          <p:cNvPr id="4" name="TextBox 3"/>
+          <p:cNvSpPr txBox="1"/>
+          <p:nvPr/>
+        </p:nvSpPr>
+        <p:spPr>
+          <a:xfrm>
+            <a:off x="822960" y="3200400"/>
+            <a:ext cx="10058400" cy="914400"/>
+          </a:xfrm>
+          <a:prstGeom prst="rect">
+            <a:avLst/>
+          </a:prstGeom>
+          <a:noFill/>
+        </p:spPr>
+        <p:txBody>
+          <a:bodyPr wrap="square">
+            <a:spAutoFit/>
+          </a:bodyPr>
+          <a:lstStyle/>
+          <a:p>
+            <a:pPr algn="l">
+              <a:defRPr sz="3600" b="1">
                 <a:solidFill>
                   <a:srgbClr val="FFFFFF"/>
                 </a:solidFill>
               </a:defRPr>
             </a:pPr>
             <a:r>
-              <a:t>Zużycie energii w czasie</a:t>
-            </a:r>
-          </a:p>
-        </p:txBody>
-      </p:sp>
-      <p:pic>
-        <p:nvPicPr>
-          <p:cNvPr id="4" name="Picture 3" descr="01_zuzycie_czas.png"/>
-          <p:cNvPicPr>
-            <a:picLocks noChangeAspect="1"/>
-          </p:cNvPicPr>
-          <p:nvPr/>
-        </p:nvPicPr>
-        <p:blipFill>
-          <a:blip r:embed="rId2"/>
-          <a:stretch>
-            <a:fillRect/>
-          </a:stretch>
-        </p:blipFill>
-        <p:spPr>
-          <a:xfrm>
-            <a:off x="594360" y="1051560"/>
-            <a:ext cx="10972800" cy="3702479"/>
-          </a:xfrm>
-          <a:prstGeom prst="rect">
-            <a:avLst/>
-          </a:prstGeom>
-        </p:spPr>
-      </p:pic>
-      <p:sp>
-        <p:nvSpPr>
-          <p:cNvPr id="5" name="TextBox 4"/>
-          <p:cNvSpPr txBox="1"/>
-          <p:nvPr/>
-        </p:nvSpPr>
-        <p:spPr>
-          <a:xfrm>
-            <a:off x="594360" y="6263640"/>
-            <a:ext cx="10972800" cy="320040"/>
-          </a:xfrm>
-          <a:prstGeom prst="rect">
-            <a:avLst/>
-          </a:prstGeom>
-          <a:noFill/>
-        </p:spPr>
-        <p:txBody>
-          <a:bodyPr wrap="square">
-            <a:spAutoFit/>
-          </a:bodyPr>
-          <a:lstStyle/>
-          <a:p>
-            <a:pPr algn="ctr">
-              <a:defRPr sz="1100" b="0">
+              <a:t>Zbiór danych</a:t>
+            </a:r>
+          </a:p>
+        </p:txBody>
+      </p:sp>
+      <p:sp>
+        <p:nvSpPr>
+          <p:cNvPr id="5" name="Rectangle 4"/>
+          <p:cNvSpPr/>
+          <p:nvPr/>
+        </p:nvSpPr>
+        <p:spPr>
+          <a:xfrm>
+            <a:off x="0" y="6537960"/>
+            <a:ext cx="12191695" cy="320040"/>
+          </a:xfrm>
+          <a:prstGeom prst="rect">
+            <a:avLst/>
+          </a:prstGeom>
+          <a:solidFill>
+            <a:srgbClr val="ECEFF1"/>
+          </a:solidFill>
+          <a:ln>
+            <a:noFill/>
+          </a:ln>
+        </p:spPr>
+        <p:style>
+          <a:lnRef idx="1">
+            <a:schemeClr val="accent1"/>
+          </a:lnRef>
+          <a:fillRef idx="3">
+            <a:schemeClr val="accent1"/>
+          </a:fillRef>
+          <a:effectRef idx="2">
+            <a:schemeClr val="accent1"/>
+          </a:effectRef>
+          <a:fontRef idx="minor">
+            <a:schemeClr val="lt1"/>
+          </a:fontRef>
+        </p:style>
+        <p:txBody>
+          <a:bodyPr rtlCol="0" anchor="ctr"/>
+          <a:lstStyle/>
+          <a:p>
+            <a:pPr algn="ctr"/>
+          </a:p>
+        </p:txBody>
+      </p:sp>
+      <p:sp>
+        <p:nvSpPr>
+          <p:cNvPr id="6" name="TextBox 5"/>
+          <p:cNvSpPr txBox="1"/>
+          <p:nvPr/>
+        </p:nvSpPr>
+        <p:spPr>
+          <a:xfrm>
+            <a:off x="457200" y="6565392"/>
+            <a:ext cx="7315200" cy="256032"/>
+          </a:xfrm>
+          <a:prstGeom prst="rect">
+            <a:avLst/>
+          </a:prstGeom>
+          <a:noFill/>
+        </p:spPr>
+        <p:txBody>
+          <a:bodyPr wrap="none">
+            <a:spAutoFit/>
+          </a:bodyPr>
+          <a:lstStyle/>
+          <a:p>
+            <a:pPr>
+              <a:defRPr sz="900">
                 <a:solidFill>
                   <a:srgbClr val="607D8B"/>
                 </a:solidFill>
               </a:defRPr>
             </a:pPr>
             <a:r>
-              <a:t>Wyraźna sezonowość — wyższe zużycie zimą i latem.</a:t>
+              <a:t>Analiza i wizualizacja danych – Pandas, DataFrame  •  Merito Chorzów</a:t>
+            </a:r>
+          </a:p>
+        </p:txBody>
+      </p:sp>
+      <p:sp>
+        <p:nvSpPr>
+          <p:cNvPr id="7" name="TextBox 6"/>
+          <p:cNvSpPr txBox="1"/>
+          <p:nvPr/>
+        </p:nvSpPr>
+        <p:spPr>
+          <a:xfrm>
+            <a:off x="11094415" y="6565392"/>
+            <a:ext cx="731520" cy="256032"/>
+          </a:xfrm>
+          <a:prstGeom prst="rect">
+            <a:avLst/>
+          </a:prstGeom>
+          <a:noFill/>
+        </p:spPr>
+        <p:txBody>
+          <a:bodyPr wrap="none">
+            <a:spAutoFit/>
+          </a:bodyPr>
+          <a:lstStyle/>
+          <a:p>
+            <a:pPr algn="r">
+              <a:defRPr sz="900">
+                <a:solidFill>
+                  <a:srgbClr val="607D8B"/>
+                </a:solidFill>
+              </a:defRPr>
+            </a:pPr>
+            <a:r>
+              <a:t>4</a:t>
             </a:r>
           </a:p>
         </p:txBody>
@@ -4701,8 +11150,88 @@
         </p:nvSpPr>
         <p:spPr>
           <a:xfrm>
-            <a:off x="502920" y="201168"/>
-            <a:ext cx="10972800" cy="502920"/>
+            <a:off x="502920" y="182880"/>
+            <a:ext cx="10972800" cy="640080"/>
+          </a:xfrm>
+          <a:prstGeom prst="rect">
+            <a:avLst/>
+          </a:prstGeom>
+          <a:noFill/>
+        </p:spPr>
+        <p:txBody>
+          <a:bodyPr wrap="none">
+            <a:spAutoFit/>
+          </a:bodyPr>
+          <a:lstStyle/>
+          <a:p>
+            <a:pPr>
+              <a:defRPr sz="2800" b="1">
+                <a:solidFill>
+                  <a:srgbClr val="FFFFFF"/>
+                </a:solidFill>
+              </a:defRPr>
+            </a:pPr>
+            <a:r>
+              <a:t>Charakterystyka zbioru</a:t>
+            </a:r>
+          </a:p>
+        </p:txBody>
+      </p:sp>
+      <p:sp>
+        <p:nvSpPr>
+          <p:cNvPr id="4" name="Rounded Rectangle 3"/>
+          <p:cNvSpPr/>
+          <p:nvPr/>
+        </p:nvSpPr>
+        <p:spPr>
+          <a:xfrm>
+            <a:off x="548640" y="1280160"/>
+            <a:ext cx="3469538" cy="4389120"/>
+          </a:xfrm>
+          <a:prstGeom prst="roundRect">
+            <a:avLst/>
+          </a:prstGeom>
+          <a:solidFill>
+            <a:srgbClr val="ECEFF1"/>
+          </a:solidFill>
+          <a:ln>
+            <a:solidFill>
+              <a:srgbClr val="1565C0"/>
+            </a:solidFill>
+          </a:ln>
+        </p:spPr>
+        <p:style>
+          <a:lnRef idx="1">
+            <a:schemeClr val="accent1"/>
+          </a:lnRef>
+          <a:fillRef idx="3">
+            <a:schemeClr val="accent1"/>
+          </a:fillRef>
+          <a:effectRef idx="2">
+            <a:schemeClr val="accent1"/>
+          </a:effectRef>
+          <a:fontRef idx="minor">
+            <a:schemeClr val="lt1"/>
+          </a:fontRef>
+        </p:style>
+        <p:txBody>
+          <a:bodyPr rtlCol="0" anchor="ctr"/>
+          <a:lstStyle/>
+          <a:p>
+            <a:pPr algn="ctr"/>
+          </a:p>
+        </p:txBody>
+      </p:sp>
+      <p:sp>
+        <p:nvSpPr>
+          <p:cNvPr id="5" name="TextBox 4"/>
+          <p:cNvSpPr txBox="1"/>
+          <p:nvPr/>
+        </p:nvSpPr>
+        <p:spPr>
+          <a:xfrm>
+            <a:off x="731520" y="1508760"/>
+            <a:ext cx="3240938" cy="457200"/>
           </a:xfrm>
           <a:prstGeom prst="rect">
             <a:avLst/>
@@ -4716,52 +11245,28 @@
           <a:lstStyle/>
           <a:p>
             <a:pPr algn="l">
-              <a:defRPr sz="2400" b="1">
-                <a:solidFill>
-                  <a:srgbClr val="FFFFFF"/>
-                </a:solidFill>
-              </a:defRPr>
-            </a:pPr>
-            <a:r>
-              <a:t>Profil dobowy</a:t>
-            </a:r>
-          </a:p>
-        </p:txBody>
-      </p:sp>
-      <p:pic>
-        <p:nvPicPr>
-          <p:cNvPr id="4" name="Picture 3" descr="02_profil_dobowy.png"/>
-          <p:cNvPicPr>
-            <a:picLocks noChangeAspect="1"/>
-          </p:cNvPicPr>
-          <p:nvPr/>
-        </p:nvPicPr>
-        <p:blipFill>
-          <a:blip r:embed="rId2"/>
-          <a:stretch>
-            <a:fillRect/>
-          </a:stretch>
-        </p:blipFill>
-        <p:spPr>
-          <a:xfrm>
-            <a:off x="594360" y="1051560"/>
-            <a:ext cx="10972800" cy="5403898"/>
-          </a:xfrm>
-          <a:prstGeom prst="rect">
-            <a:avLst/>
-          </a:prstGeom>
-        </p:spPr>
-      </p:pic>
-      <p:sp>
-        <p:nvSpPr>
-          <p:cNvPr id="5" name="TextBox 4"/>
-          <p:cNvSpPr txBox="1"/>
-          <p:nvPr/>
-        </p:nvSpPr>
-        <p:spPr>
-          <a:xfrm>
-            <a:off x="594360" y="6263640"/>
-            <a:ext cx="10972800" cy="320040"/>
+              <a:defRPr sz="1300" b="0">
+                <a:solidFill>
+                  <a:srgbClr val="607D8B"/>
+                </a:solidFill>
+              </a:defRPr>
+            </a:pPr>
+            <a:r>
+              <a:t>Obserwacje</a:t>
+            </a:r>
+          </a:p>
+        </p:txBody>
+      </p:sp>
+      <p:sp>
+        <p:nvSpPr>
+          <p:cNvPr id="6" name="TextBox 5"/>
+          <p:cNvSpPr txBox="1"/>
+          <p:nvPr/>
+        </p:nvSpPr>
+        <p:spPr>
+          <a:xfrm>
+            <a:off x="731520" y="2011680"/>
+            <a:ext cx="3240938" cy="1097280"/>
           </a:xfrm>
           <a:prstGeom prst="rect">
             <a:avLst/>
@@ -4774,15 +11279,467 @@
           </a:bodyPr>
           <a:lstStyle/>
           <a:p>
-            <a:pPr algn="ctr">
-              <a:defRPr sz="1100" b="0">
+            <a:pPr algn="l">
+              <a:defRPr sz="2800" b="1">
+                <a:solidFill>
+                  <a:srgbClr val="1565C0"/>
+                </a:solidFill>
+              </a:defRPr>
+            </a:pPr>
+            <a:r>
+              <a:t>35,064</a:t>
+            </a:r>
+          </a:p>
+        </p:txBody>
+      </p:sp>
+      <p:sp>
+        <p:nvSpPr>
+          <p:cNvPr id="7" name="TextBox 6"/>
+          <p:cNvSpPr txBox="1"/>
+          <p:nvPr/>
+        </p:nvSpPr>
+        <p:spPr>
+          <a:xfrm>
+            <a:off x="731520" y="3200400"/>
+            <a:ext cx="3240938" cy="1371600"/>
+          </a:xfrm>
+          <a:prstGeom prst="rect">
+            <a:avLst/>
+          </a:prstGeom>
+          <a:noFill/>
+        </p:spPr>
+        <p:txBody>
+          <a:bodyPr wrap="square">
+            <a:spAutoFit/>
+          </a:bodyPr>
+          <a:lstStyle/>
+          <a:p>
+            <a:pPr algn="l">
+              <a:defRPr sz="1200" b="0">
+                <a:solidFill>
+                  <a:srgbClr val="263238"/>
+                </a:solidFill>
+              </a:defRPr>
+            </a:pPr>
+            <a:r>
+              <a:t>Godzinowe rekordy</a:t>
+            </a:r>
+          </a:p>
+        </p:txBody>
+      </p:sp>
+      <p:sp>
+        <p:nvSpPr>
+          <p:cNvPr id="8" name="Rounded Rectangle 7"/>
+          <p:cNvSpPr/>
+          <p:nvPr/>
+        </p:nvSpPr>
+        <p:spPr>
+          <a:xfrm>
+            <a:off x="4246778" y="1280160"/>
+            <a:ext cx="3469538" cy="4389120"/>
+          </a:xfrm>
+          <a:prstGeom prst="roundRect">
+            <a:avLst/>
+          </a:prstGeom>
+          <a:solidFill>
+            <a:srgbClr val="ECEFF1"/>
+          </a:solidFill>
+          <a:ln>
+            <a:solidFill>
+              <a:srgbClr val="1565C0"/>
+            </a:solidFill>
+          </a:ln>
+        </p:spPr>
+        <p:style>
+          <a:lnRef idx="1">
+            <a:schemeClr val="accent1"/>
+          </a:lnRef>
+          <a:fillRef idx="3">
+            <a:schemeClr val="accent1"/>
+          </a:fillRef>
+          <a:effectRef idx="2">
+            <a:schemeClr val="accent1"/>
+          </a:effectRef>
+          <a:fontRef idx="minor">
+            <a:schemeClr val="lt1"/>
+          </a:fontRef>
+        </p:style>
+        <p:txBody>
+          <a:bodyPr rtlCol="0" anchor="ctr"/>
+          <a:lstStyle/>
+          <a:p>
+            <a:pPr algn="ctr"/>
+          </a:p>
+        </p:txBody>
+      </p:sp>
+      <p:sp>
+        <p:nvSpPr>
+          <p:cNvPr id="9" name="TextBox 8"/>
+          <p:cNvSpPr txBox="1"/>
+          <p:nvPr/>
+        </p:nvSpPr>
+        <p:spPr>
+          <a:xfrm>
+            <a:off x="4429658" y="1508760"/>
+            <a:ext cx="3240938" cy="457200"/>
+          </a:xfrm>
+          <a:prstGeom prst="rect">
+            <a:avLst/>
+          </a:prstGeom>
+          <a:noFill/>
+        </p:spPr>
+        <p:txBody>
+          <a:bodyPr wrap="square">
+            <a:spAutoFit/>
+          </a:bodyPr>
+          <a:lstStyle/>
+          <a:p>
+            <a:pPr algn="l">
+              <a:defRPr sz="1300" b="0">
                 <a:solidFill>
                   <a:srgbClr val="607D8B"/>
                 </a:solidFill>
               </a:defRPr>
             </a:pPr>
             <a:r>
-              <a:t>Dwa szczyty w dni robocze; niższe i płstsze zużycie w weekendy.</a:t>
+              <a:t>Okres</a:t>
+            </a:r>
+          </a:p>
+        </p:txBody>
+      </p:sp>
+      <p:sp>
+        <p:nvSpPr>
+          <p:cNvPr id="10" name="TextBox 9"/>
+          <p:cNvSpPr txBox="1"/>
+          <p:nvPr/>
+        </p:nvSpPr>
+        <p:spPr>
+          <a:xfrm>
+            <a:off x="4429658" y="2011680"/>
+            <a:ext cx="3240938" cy="1097280"/>
+          </a:xfrm>
+          <a:prstGeom prst="rect">
+            <a:avLst/>
+          </a:prstGeom>
+          <a:noFill/>
+        </p:spPr>
+        <p:txBody>
+          <a:bodyPr wrap="square">
+            <a:spAutoFit/>
+          </a:bodyPr>
+          <a:lstStyle/>
+          <a:p>
+            <a:pPr algn="l">
+              <a:defRPr sz="2800" b="1">
+                <a:solidFill>
+                  <a:srgbClr val="1565C0"/>
+                </a:solidFill>
+              </a:defRPr>
+            </a:pPr>
+            <a:r>
+              <a:t>2014-12-31</a:t>
+            </a:r>
+            <a:br/>
+            <a:r>
+              <a:t>– 2018-12-31</a:t>
+            </a:r>
+          </a:p>
+        </p:txBody>
+      </p:sp>
+      <p:sp>
+        <p:nvSpPr>
+          <p:cNvPr id="11" name="TextBox 10"/>
+          <p:cNvSpPr txBox="1"/>
+          <p:nvPr/>
+        </p:nvSpPr>
+        <p:spPr>
+          <a:xfrm>
+            <a:off x="4429658" y="3200400"/>
+            <a:ext cx="3240938" cy="1371600"/>
+          </a:xfrm>
+          <a:prstGeom prst="rect">
+            <a:avLst/>
+          </a:prstGeom>
+          <a:noFill/>
+        </p:spPr>
+        <p:txBody>
+          <a:bodyPr wrap="square">
+            <a:spAutoFit/>
+          </a:bodyPr>
+          <a:lstStyle/>
+          <a:p>
+            <a:pPr algn="l">
+              <a:defRPr sz="1200" b="0">
+                <a:solidFill>
+                  <a:srgbClr val="263238"/>
+                </a:solidFill>
+              </a:defRPr>
+            </a:pPr>
+            <a:r>
+              <a:t>4 lata danych</a:t>
+            </a:r>
+          </a:p>
+        </p:txBody>
+      </p:sp>
+      <p:sp>
+        <p:nvSpPr>
+          <p:cNvPr id="12" name="Rounded Rectangle 11"/>
+          <p:cNvSpPr/>
+          <p:nvPr/>
+        </p:nvSpPr>
+        <p:spPr>
+          <a:xfrm>
+            <a:off x="7944916" y="1280160"/>
+            <a:ext cx="3469538" cy="4389120"/>
+          </a:xfrm>
+          <a:prstGeom prst="roundRect">
+            <a:avLst/>
+          </a:prstGeom>
+          <a:solidFill>
+            <a:srgbClr val="ECEFF1"/>
+          </a:solidFill>
+          <a:ln>
+            <a:solidFill>
+              <a:srgbClr val="1565C0"/>
+            </a:solidFill>
+          </a:ln>
+        </p:spPr>
+        <p:style>
+          <a:lnRef idx="1">
+            <a:schemeClr val="accent1"/>
+          </a:lnRef>
+          <a:fillRef idx="3">
+            <a:schemeClr val="accent1"/>
+          </a:fillRef>
+          <a:effectRef idx="2">
+            <a:schemeClr val="accent1"/>
+          </a:effectRef>
+          <a:fontRef idx="minor">
+            <a:schemeClr val="lt1"/>
+          </a:fontRef>
+        </p:style>
+        <p:txBody>
+          <a:bodyPr rtlCol="0" anchor="ctr"/>
+          <a:lstStyle/>
+          <a:p>
+            <a:pPr algn="ctr"/>
+          </a:p>
+        </p:txBody>
+      </p:sp>
+      <p:sp>
+        <p:nvSpPr>
+          <p:cNvPr id="13" name="TextBox 12"/>
+          <p:cNvSpPr txBox="1"/>
+          <p:nvPr/>
+        </p:nvSpPr>
+        <p:spPr>
+          <a:xfrm>
+            <a:off x="8127796" y="1508760"/>
+            <a:ext cx="3240938" cy="457200"/>
+          </a:xfrm>
+          <a:prstGeom prst="rect">
+            <a:avLst/>
+          </a:prstGeom>
+          <a:noFill/>
+        </p:spPr>
+        <p:txBody>
+          <a:bodyPr wrap="square">
+            <a:spAutoFit/>
+          </a:bodyPr>
+          <a:lstStyle/>
+          <a:p>
+            <a:pPr algn="l">
+              <a:defRPr sz="1300" b="0">
+                <a:solidFill>
+                  <a:srgbClr val="607D8B"/>
+                </a:solidFill>
+              </a:defRPr>
+            </a:pPr>
+            <a:r>
+              <a:t>Zmienne</a:t>
+            </a:r>
+          </a:p>
+        </p:txBody>
+      </p:sp>
+      <p:sp>
+        <p:nvSpPr>
+          <p:cNvPr id="14" name="TextBox 13"/>
+          <p:cNvSpPr txBox="1"/>
+          <p:nvPr/>
+        </p:nvSpPr>
+        <p:spPr>
+          <a:xfrm>
+            <a:off x="8127796" y="2011680"/>
+            <a:ext cx="3240938" cy="1097280"/>
+          </a:xfrm>
+          <a:prstGeom prst="rect">
+            <a:avLst/>
+          </a:prstGeom>
+          <a:noFill/>
+        </p:spPr>
+        <p:txBody>
+          <a:bodyPr wrap="square">
+            <a:spAutoFit/>
+          </a:bodyPr>
+          <a:lstStyle/>
+          <a:p>
+            <a:pPr algn="l">
+              <a:defRPr sz="2800" b="1">
+                <a:solidFill>
+                  <a:srgbClr val="1565C0"/>
+                </a:solidFill>
+              </a:defRPr>
+            </a:pPr>
+            <a:r>
+              <a:t>41</a:t>
+            </a:r>
+          </a:p>
+        </p:txBody>
+      </p:sp>
+      <p:sp>
+        <p:nvSpPr>
+          <p:cNvPr id="15" name="TextBox 14"/>
+          <p:cNvSpPr txBox="1"/>
+          <p:nvPr/>
+        </p:nvSpPr>
+        <p:spPr>
+          <a:xfrm>
+            <a:off x="8127796" y="3200400"/>
+            <a:ext cx="3240938" cy="1371600"/>
+          </a:xfrm>
+          <a:prstGeom prst="rect">
+            <a:avLst/>
+          </a:prstGeom>
+          <a:noFill/>
+        </p:spPr>
+        <p:txBody>
+          <a:bodyPr wrap="square">
+            <a:spAutoFit/>
+          </a:bodyPr>
+          <a:lstStyle/>
+          <a:p>
+            <a:pPr algn="l">
+              <a:defRPr sz="1200" b="0">
+                <a:solidFill>
+                  <a:srgbClr val="263238"/>
+                </a:solidFill>
+              </a:defRPr>
+            </a:pPr>
+            <a:r>
+              <a:t>Po scaleniu energia + pogoda</a:t>
+            </a:r>
+          </a:p>
+        </p:txBody>
+      </p:sp>
+      <p:sp>
+        <p:nvSpPr>
+          <p:cNvPr id="16" name="Rectangle 15"/>
+          <p:cNvSpPr/>
+          <p:nvPr/>
+        </p:nvSpPr>
+        <p:spPr>
+          <a:xfrm>
+            <a:off x="0" y="6537960"/>
+            <a:ext cx="12191695" cy="320040"/>
+          </a:xfrm>
+          <a:prstGeom prst="rect">
+            <a:avLst/>
+          </a:prstGeom>
+          <a:solidFill>
+            <a:srgbClr val="ECEFF1"/>
+          </a:solidFill>
+          <a:ln>
+            <a:noFill/>
+          </a:ln>
+        </p:spPr>
+        <p:style>
+          <a:lnRef idx="1">
+            <a:schemeClr val="accent1"/>
+          </a:lnRef>
+          <a:fillRef idx="3">
+            <a:schemeClr val="accent1"/>
+          </a:fillRef>
+          <a:effectRef idx="2">
+            <a:schemeClr val="accent1"/>
+          </a:effectRef>
+          <a:fontRef idx="minor">
+            <a:schemeClr val="lt1"/>
+          </a:fontRef>
+        </p:style>
+        <p:txBody>
+          <a:bodyPr rtlCol="0" anchor="ctr"/>
+          <a:lstStyle/>
+          <a:p>
+            <a:pPr algn="ctr"/>
+          </a:p>
+        </p:txBody>
+      </p:sp>
+      <p:sp>
+        <p:nvSpPr>
+          <p:cNvPr id="17" name="TextBox 16"/>
+          <p:cNvSpPr txBox="1"/>
+          <p:nvPr/>
+        </p:nvSpPr>
+        <p:spPr>
+          <a:xfrm>
+            <a:off x="457200" y="6565392"/>
+            <a:ext cx="7315200" cy="256032"/>
+          </a:xfrm>
+          <a:prstGeom prst="rect">
+            <a:avLst/>
+          </a:prstGeom>
+          <a:noFill/>
+        </p:spPr>
+        <p:txBody>
+          <a:bodyPr wrap="none">
+            <a:spAutoFit/>
+          </a:bodyPr>
+          <a:lstStyle/>
+          <a:p>
+            <a:pPr>
+              <a:defRPr sz="900">
+                <a:solidFill>
+                  <a:srgbClr val="607D8B"/>
+                </a:solidFill>
+              </a:defRPr>
+            </a:pPr>
+            <a:r>
+              <a:t>Analiza i wizualizacja danych – Pandas, DataFrame  •  Merito Chorzów</a:t>
+            </a:r>
+          </a:p>
+        </p:txBody>
+      </p:sp>
+      <p:sp>
+        <p:nvSpPr>
+          <p:cNvPr id="18" name="TextBox 17"/>
+          <p:cNvSpPr txBox="1"/>
+          <p:nvPr/>
+        </p:nvSpPr>
+        <p:spPr>
+          <a:xfrm>
+            <a:off x="11094415" y="6565392"/>
+            <a:ext cx="731520" cy="256032"/>
+          </a:xfrm>
+          <a:prstGeom prst="rect">
+            <a:avLst/>
+          </a:prstGeom>
+          <a:noFill/>
+        </p:spPr>
+        <p:txBody>
+          <a:bodyPr wrap="none">
+            <a:spAutoFit/>
+          </a:bodyPr>
+          <a:lstStyle/>
+          <a:p>
+            <a:pPr algn="r">
+              <a:defRPr sz="900">
+                <a:solidFill>
+                  <a:srgbClr val="607D8B"/>
+                </a:solidFill>
+              </a:defRPr>
+            </a:pPr>
+            <a:r>
+              <a:t>5</a:t>
             </a:r>
           </a:p>
         </p:txBody>
@@ -4856,57 +11813,432 @@
         </p:nvSpPr>
         <p:spPr>
           <a:xfrm>
-            <a:off x="502920" y="201168"/>
-            <a:ext cx="10972800" cy="502920"/>
-          </a:xfrm>
-          <a:prstGeom prst="rect">
-            <a:avLst/>
-          </a:prstGeom>
-          <a:noFill/>
-        </p:spPr>
-        <p:txBody>
-          <a:bodyPr wrap="square">
-            <a:spAutoFit/>
-          </a:bodyPr>
-          <a:lstStyle/>
-          <a:p>
-            <a:pPr algn="l">
-              <a:defRPr sz="2400" b="1">
+            <a:off x="502920" y="182880"/>
+            <a:ext cx="10972800" cy="640080"/>
+          </a:xfrm>
+          <a:prstGeom prst="rect">
+            <a:avLst/>
+          </a:prstGeom>
+          <a:noFill/>
+        </p:spPr>
+        <p:txBody>
+          <a:bodyPr wrap="none">
+            <a:spAutoFit/>
+          </a:bodyPr>
+          <a:lstStyle/>
+          <a:p>
+            <a:pPr>
+              <a:defRPr sz="2800" b="1">
                 <a:solidFill>
                   <a:srgbClr val="FFFFFF"/>
                 </a:solidFill>
               </a:defRPr>
             </a:pPr>
             <a:r>
-              <a:t>Heatmapa: godzina × miesiąc</a:t>
-            </a:r>
-          </a:p>
-        </p:txBody>
-      </p:sp>
-      <p:pic>
-        <p:nvPicPr>
-          <p:cNvPr id="4" name="Picture 3" descr="03_heatmapa.png"/>
-          <p:cNvPicPr>
-            <a:picLocks noChangeAspect="1"/>
-          </p:cNvPicPr>
-          <p:nvPr/>
-        </p:nvPicPr>
-        <p:blipFill>
-          <a:blip r:embed="rId2"/>
-          <a:stretch>
-            <a:fillRect/>
-          </a:stretch>
-        </p:blipFill>
-        <p:spPr>
-          <a:xfrm>
-            <a:off x="594360" y="1051560"/>
-            <a:ext cx="10972800" cy="6204604"/>
-          </a:xfrm>
-          <a:prstGeom prst="rect">
-            <a:avLst/>
-          </a:prstGeom>
-        </p:spPr>
-      </p:pic>
+              <a:t>Źródła i zakres zmiennych</a:t>
+            </a:r>
+          </a:p>
+        </p:txBody>
+      </p:sp>
+      <p:graphicFrame>
+        <p:nvGraphicFramePr>
+          <p:cNvPr id="4" name="Table 3"/>
+          <p:cNvGraphicFramePr>
+            <a:graphicFrameLocks noGrp="1"/>
+          </p:cNvGraphicFramePr>
+          <p:nvPr/>
+        </p:nvGraphicFramePr>
+        <p:xfrm>
+          <a:off x="594360" y="1188720"/>
+          <a:ext cx="10972800" cy="2057400"/>
+        </p:xfrm>
+        <a:graphic>
+          <a:graphicData uri="http://schemas.openxmlformats.org/drawingml/2006/table">
+            <a:tbl>
+              <a:tblPr firstRow="1" bandRow="1">
+                <a:tableStyleId>{5C22544A-7EE6-4342-B048-85BDC9FD1C3A}</a:tableStyleId>
+              </a:tblPr>
+              <a:tblGrid>
+                <a:gridCol w="3657600"/>
+                <a:gridCol w="3657600"/>
+                <a:gridCol w="3657600"/>
+              </a:tblGrid>
+              <a:tr h="411480">
+                <a:tc>
+                  <a:txBody>
+                    <a:bodyPr/>
+                    <a:lstStyle/>
+                    <a:p>
+                      <a:pPr>
+                        <a:defRPr sz="1100" b="1">
+                          <a:solidFill>
+                            <a:srgbClr val="FFFFFF"/>
+                          </a:solidFill>
+                        </a:defRPr>
+                      </a:pPr>
+                      <a:r>
+                        <a:t>Kategoria</a:t>
+                      </a:r>
+                    </a:p>
+                  </a:txBody>
+                  <a:tcPr>
+                    <a:solidFill>
+                      <a:srgbClr val="1565C0"/>
+                    </a:solidFill>
+                  </a:tcPr>
+                </a:tc>
+                <a:tc>
+                  <a:txBody>
+                    <a:bodyPr/>
+                    <a:lstStyle/>
+                    <a:p>
+                      <a:pPr>
+                        <a:defRPr sz="1100" b="1">
+                          <a:solidFill>
+                            <a:srgbClr val="FFFFFF"/>
+                          </a:solidFill>
+                        </a:defRPr>
+                      </a:pPr>
+                      <a:r>
+                        <a:t>Przykłady</a:t>
+                      </a:r>
+                    </a:p>
+                  </a:txBody>
+                  <a:tcPr>
+                    <a:solidFill>
+                      <a:srgbClr val="1565C0"/>
+                    </a:solidFill>
+                  </a:tcPr>
+                </a:tc>
+                <a:tc>
+                  <a:txBody>
+                    <a:bodyPr/>
+                    <a:lstStyle/>
+                    <a:p>
+                      <a:pPr>
+                        <a:defRPr sz="1100" b="1">
+                          <a:solidFill>
+                            <a:srgbClr val="FFFFFF"/>
+                          </a:solidFill>
+                        </a:defRPr>
+                      </a:pPr>
+                      <a:r>
+                        <a:t>Opis</a:t>
+                      </a:r>
+                    </a:p>
+                  </a:txBody>
+                  <a:tcPr>
+                    <a:solidFill>
+                      <a:srgbClr val="1565C0"/>
+                    </a:solidFill>
+                  </a:tcPr>
+                </a:tc>
+              </a:tr>
+              <a:tr h="411480">
+                <a:tc>
+                  <a:txBody>
+                    <a:bodyPr/>
+                    <a:lstStyle/>
+                    <a:p>
+                      <a:pPr>
+                        <a:defRPr sz="1000"/>
+                      </a:pPr>
+                      <a:r>
+                        <a:t>Zużycie</a:t>
+                      </a:r>
+                    </a:p>
+                  </a:txBody>
+                  <a:tcPr/>
+                </a:tc>
+                <a:tc>
+                  <a:txBody>
+                    <a:bodyPr/>
+                    <a:lstStyle/>
+                    <a:p>
+                      <a:pPr>
+                        <a:defRPr sz="1000"/>
+                      </a:pPr>
+                      <a:r>
+                        <a:t>total load actual/forecast</a:t>
+                      </a:r>
+                    </a:p>
+                  </a:txBody>
+                  <a:tcPr/>
+                </a:tc>
+                <a:tc>
+                  <a:txBody>
+                    <a:bodyPr/>
+                    <a:lstStyle/>
+                    <a:p>
+                      <a:pPr>
+                        <a:defRPr sz="1000"/>
+                      </a:pPr>
+                      <a:r>
+                        <a:t>Obciążenie sieci [MW]</a:t>
+                      </a:r>
+                    </a:p>
+                  </a:txBody>
+                  <a:tcPr/>
+                </a:tc>
+              </a:tr>
+              <a:tr h="411480">
+                <a:tc>
+                  <a:txBody>
+                    <a:bodyPr/>
+                    <a:lstStyle/>
+                    <a:p>
+                      <a:pPr>
+                        <a:defRPr sz="1000"/>
+                      </a:pPr>
+                      <a:r>
+                        <a:t>Produkcja</a:t>
+                      </a:r>
+                    </a:p>
+                  </a:txBody>
+                  <a:tcPr/>
+                </a:tc>
+                <a:tc>
+                  <a:txBody>
+                    <a:bodyPr/>
+                    <a:lstStyle/>
+                    <a:p>
+                      <a:pPr>
+                        <a:defRPr sz="1000"/>
+                      </a:pPr>
+                      <a:r>
+                        <a:t>20 źródeł</a:t>
+                      </a:r>
+                    </a:p>
+                  </a:txBody>
+                  <a:tcPr/>
+                </a:tc>
+                <a:tc>
+                  <a:txBody>
+                    <a:bodyPr/>
+                    <a:lstStyle/>
+                    <a:p>
+                      <a:pPr>
+                        <a:defRPr sz="1000"/>
+                      </a:pPr>
+                      <a:r>
+                        <a:t>OZE, węgiel, gaz, atom...</a:t>
+                      </a:r>
+                    </a:p>
+                  </a:txBody>
+                  <a:tcPr/>
+                </a:tc>
+              </a:tr>
+              <a:tr h="411480">
+                <a:tc>
+                  <a:txBody>
+                    <a:bodyPr/>
+                    <a:lstStyle/>
+                    <a:p>
+                      <a:pPr>
+                        <a:defRPr sz="1000"/>
+                      </a:pPr>
+                      <a:r>
+                        <a:t>Ceny</a:t>
+                      </a:r>
+                    </a:p>
+                  </a:txBody>
+                  <a:tcPr/>
+                </a:tc>
+                <a:tc>
+                  <a:txBody>
+                    <a:bodyPr/>
+                    <a:lstStyle/>
+                    <a:p>
+                      <a:pPr>
+                        <a:defRPr sz="1000"/>
+                      </a:pPr>
+                      <a:r>
+                        <a:t>price day ahead / actual</a:t>
+                      </a:r>
+                    </a:p>
+                  </a:txBody>
+                  <a:tcPr/>
+                </a:tc>
+                <a:tc>
+                  <a:txBody>
+                    <a:bodyPr/>
+                    <a:lstStyle/>
+                    <a:p>
+                      <a:pPr>
+                        <a:defRPr sz="1000"/>
+                      </a:pPr>
+                      <a:r>
+                        <a:t>Rynek dnia następnego</a:t>
+                      </a:r>
+                    </a:p>
+                  </a:txBody>
+                  <a:tcPr/>
+                </a:tc>
+              </a:tr>
+              <a:tr h="411480">
+                <a:tc>
+                  <a:txBody>
+                    <a:bodyPr/>
+                    <a:lstStyle/>
+                    <a:p>
+                      <a:pPr>
+                        <a:defRPr sz="1000"/>
+                      </a:pPr>
+                      <a:r>
+                        <a:t>Pogoda</a:t>
+                      </a:r>
+                    </a:p>
+                  </a:txBody>
+                  <a:tcPr/>
+                </a:tc>
+                <a:tc>
+                  <a:txBody>
+                    <a:bodyPr/>
+                    <a:lstStyle/>
+                    <a:p>
+                      <a:pPr>
+                        <a:defRPr sz="1000"/>
+                      </a:pPr>
+                      <a:r>
+                        <a:t>temp, humidity, wind...</a:t>
+                      </a:r>
+                    </a:p>
+                  </a:txBody>
+                  <a:tcPr/>
+                </a:tc>
+                <a:tc>
+                  <a:txBody>
+                    <a:bodyPr/>
+                    <a:lstStyle/>
+                    <a:p>
+                      <a:pPr>
+                        <a:defRPr sz="1000"/>
+                      </a:pPr>
+                      <a:r>
+                        <a:t>Średnia z 5 miast Hiszpanii</a:t>
+                      </a:r>
+                    </a:p>
+                  </a:txBody>
+                  <a:tcPr/>
+                </a:tc>
+              </a:tr>
+            </a:tbl>
+          </a:graphicData>
+        </a:graphic>
+      </p:graphicFrame>
+      <p:sp>
+        <p:nvSpPr>
+          <p:cNvPr id="5" name="Rectangle 4"/>
+          <p:cNvSpPr/>
+          <p:nvPr/>
+        </p:nvSpPr>
+        <p:spPr>
+          <a:xfrm>
+            <a:off x="0" y="6537960"/>
+            <a:ext cx="12191695" cy="320040"/>
+          </a:xfrm>
+          <a:prstGeom prst="rect">
+            <a:avLst/>
+          </a:prstGeom>
+          <a:solidFill>
+            <a:srgbClr val="ECEFF1"/>
+          </a:solidFill>
+          <a:ln>
+            <a:noFill/>
+          </a:ln>
+        </p:spPr>
+        <p:style>
+          <a:lnRef idx="1">
+            <a:schemeClr val="accent1"/>
+          </a:lnRef>
+          <a:fillRef idx="3">
+            <a:schemeClr val="accent1"/>
+          </a:fillRef>
+          <a:effectRef idx="2">
+            <a:schemeClr val="accent1"/>
+          </a:effectRef>
+          <a:fontRef idx="minor">
+            <a:schemeClr val="lt1"/>
+          </a:fontRef>
+        </p:style>
+        <p:txBody>
+          <a:bodyPr rtlCol="0" anchor="ctr"/>
+          <a:lstStyle/>
+          <a:p>
+            <a:pPr algn="ctr"/>
+          </a:p>
+        </p:txBody>
+      </p:sp>
+      <p:sp>
+        <p:nvSpPr>
+          <p:cNvPr id="6" name="TextBox 5"/>
+          <p:cNvSpPr txBox="1"/>
+          <p:nvPr/>
+        </p:nvSpPr>
+        <p:spPr>
+          <a:xfrm>
+            <a:off x="457200" y="6565392"/>
+            <a:ext cx="7315200" cy="256032"/>
+          </a:xfrm>
+          <a:prstGeom prst="rect">
+            <a:avLst/>
+          </a:prstGeom>
+          <a:noFill/>
+        </p:spPr>
+        <p:txBody>
+          <a:bodyPr wrap="none">
+            <a:spAutoFit/>
+          </a:bodyPr>
+          <a:lstStyle/>
+          <a:p>
+            <a:pPr>
+              <a:defRPr sz="900">
+                <a:solidFill>
+                  <a:srgbClr val="607D8B"/>
+                </a:solidFill>
+              </a:defRPr>
+            </a:pPr>
+            <a:r>
+              <a:t>Analiza i wizualizacja danych – Pandas, DataFrame  •  Merito Chorzów</a:t>
+            </a:r>
+          </a:p>
+        </p:txBody>
+      </p:sp>
+      <p:sp>
+        <p:nvSpPr>
+          <p:cNvPr id="7" name="TextBox 6"/>
+          <p:cNvSpPr txBox="1"/>
+          <p:nvPr/>
+        </p:nvSpPr>
+        <p:spPr>
+          <a:xfrm>
+            <a:off x="11094415" y="6565392"/>
+            <a:ext cx="731520" cy="256032"/>
+          </a:xfrm>
+          <a:prstGeom prst="rect">
+            <a:avLst/>
+          </a:prstGeom>
+          <a:noFill/>
+        </p:spPr>
+        <p:txBody>
+          <a:bodyPr wrap="none">
+            <a:spAutoFit/>
+          </a:bodyPr>
+          <a:lstStyle/>
+          <a:p>
+            <a:pPr algn="r">
+              <a:defRPr sz="900">
+                <a:solidFill>
+                  <a:srgbClr val="607D8B"/>
+                </a:solidFill>
+              </a:defRPr>
+            </a:pPr>
+            <a:r>
+              <a:t>6</a:t>
+            </a:r>
+          </a:p>
+        </p:txBody>
+      </p:sp>
     </p:spTree>
   </p:cSld>
   <p:clrMapOvr>
@@ -4934,13 +12266,13 @@
         <p:spPr>
           <a:xfrm>
             <a:off x="0" y="0"/>
-            <a:ext cx="12191695" cy="960120"/>
+            <a:ext cx="12191695" cy="6858000"/>
           </a:xfrm>
           <a:prstGeom prst="rect">
             <a:avLst/>
           </a:prstGeom>
           <a:solidFill>
-            <a:srgbClr val="1565C0"/>
+            <a:srgbClr val="263238"/>
           </a:solidFill>
           <a:ln>
             <a:noFill/>
@@ -4976,8 +12308,8 @@
         </p:nvSpPr>
         <p:spPr>
           <a:xfrm>
-            <a:off x="502920" y="201168"/>
-            <a:ext cx="10972800" cy="502920"/>
+            <a:off x="822960" y="2011680"/>
+            <a:ext cx="1828800" cy="1097280"/>
           </a:xfrm>
           <a:prstGeom prst="rect">
             <a:avLst/>
@@ -4991,73 +12323,162 @@
           <a:lstStyle/>
           <a:p>
             <a:pPr algn="l">
-              <a:defRPr sz="2400" b="1">
+              <a:defRPr sz="7200" b="1">
+                <a:solidFill>
+                  <a:srgbClr val="2E7D32"/>
+                </a:solidFill>
+              </a:defRPr>
+            </a:pPr>
+            <a:r>
+              <a:t>02</a:t>
+            </a:r>
+          </a:p>
+        </p:txBody>
+      </p:sp>
+      <p:sp>
+        <p:nvSpPr>
+          <p:cNvPr id="4" name="TextBox 3"/>
+          <p:cNvSpPr txBox="1"/>
+          <p:nvPr/>
+        </p:nvSpPr>
+        <p:spPr>
+          <a:xfrm>
+            <a:off x="822960" y="3200400"/>
+            <a:ext cx="10058400" cy="914400"/>
+          </a:xfrm>
+          <a:prstGeom prst="rect">
+            <a:avLst/>
+          </a:prstGeom>
+          <a:noFill/>
+        </p:spPr>
+        <p:txBody>
+          <a:bodyPr wrap="square">
+            <a:spAutoFit/>
+          </a:bodyPr>
+          <a:lstStyle/>
+          <a:p>
+            <a:pPr algn="l">
+              <a:defRPr sz="3600" b="1">
                 <a:solidFill>
                   <a:srgbClr val="FFFFFF"/>
                 </a:solidFill>
               </a:defRPr>
             </a:pPr>
             <a:r>
-              <a:t>Miks energetyczny</a:t>
-            </a:r>
-          </a:p>
-        </p:txBody>
-      </p:sp>
-      <p:pic>
-        <p:nvPicPr>
-          <p:cNvPr id="4" name="Picture 3" descr="04_miks_energetyczny.png"/>
-          <p:cNvPicPr>
-            <a:picLocks noChangeAspect="1"/>
-          </p:cNvPicPr>
-          <p:nvPr/>
-        </p:nvPicPr>
-        <p:blipFill>
-          <a:blip r:embed="rId2"/>
-          <a:stretch>
-            <a:fillRect/>
-          </a:stretch>
-        </p:blipFill>
-        <p:spPr>
-          <a:xfrm>
-            <a:off x="594360" y="1051560"/>
-            <a:ext cx="10972800" cy="5403898"/>
-          </a:xfrm>
-          <a:prstGeom prst="rect">
-            <a:avLst/>
-          </a:prstGeom>
-        </p:spPr>
-      </p:pic>
-      <p:sp>
-        <p:nvSpPr>
-          <p:cNvPr id="5" name="TextBox 4"/>
-          <p:cNvSpPr txBox="1"/>
-          <p:nvPr/>
-        </p:nvSpPr>
-        <p:spPr>
-          <a:xfrm>
-            <a:off x="594360" y="6263640"/>
-            <a:ext cx="10972800" cy="320040"/>
-          </a:xfrm>
-          <a:prstGeom prst="rect">
-            <a:avLst/>
-          </a:prstGeom>
-          <a:noFill/>
-        </p:spPr>
-        <p:txBody>
-          <a:bodyPr wrap="square">
-            <a:spAutoFit/>
-          </a:bodyPr>
-          <a:lstStyle/>
-          <a:p>
-            <a:pPr algn="ctr">
-              <a:defRPr sz="1100" b="0">
+              <a:t>Przygotowanie danych</a:t>
+            </a:r>
+          </a:p>
+        </p:txBody>
+      </p:sp>
+      <p:sp>
+        <p:nvSpPr>
+          <p:cNvPr id="5" name="Rectangle 4"/>
+          <p:cNvSpPr/>
+          <p:nvPr/>
+        </p:nvSpPr>
+        <p:spPr>
+          <a:xfrm>
+            <a:off x="0" y="6537960"/>
+            <a:ext cx="12191695" cy="320040"/>
+          </a:xfrm>
+          <a:prstGeom prst="rect">
+            <a:avLst/>
+          </a:prstGeom>
+          <a:solidFill>
+            <a:srgbClr val="ECEFF1"/>
+          </a:solidFill>
+          <a:ln>
+            <a:noFill/>
+          </a:ln>
+        </p:spPr>
+        <p:style>
+          <a:lnRef idx="1">
+            <a:schemeClr val="accent1"/>
+          </a:lnRef>
+          <a:fillRef idx="3">
+            <a:schemeClr val="accent1"/>
+          </a:fillRef>
+          <a:effectRef idx="2">
+            <a:schemeClr val="accent1"/>
+          </a:effectRef>
+          <a:fontRef idx="minor">
+            <a:schemeClr val="lt1"/>
+          </a:fontRef>
+        </p:style>
+        <p:txBody>
+          <a:bodyPr rtlCol="0" anchor="ctr"/>
+          <a:lstStyle/>
+          <a:p>
+            <a:pPr algn="ctr"/>
+          </a:p>
+        </p:txBody>
+      </p:sp>
+      <p:sp>
+        <p:nvSpPr>
+          <p:cNvPr id="6" name="TextBox 5"/>
+          <p:cNvSpPr txBox="1"/>
+          <p:nvPr/>
+        </p:nvSpPr>
+        <p:spPr>
+          <a:xfrm>
+            <a:off x="457200" y="6565392"/>
+            <a:ext cx="7315200" cy="256032"/>
+          </a:xfrm>
+          <a:prstGeom prst="rect">
+            <a:avLst/>
+          </a:prstGeom>
+          <a:noFill/>
+        </p:spPr>
+        <p:txBody>
+          <a:bodyPr wrap="none">
+            <a:spAutoFit/>
+          </a:bodyPr>
+          <a:lstStyle/>
+          <a:p>
+            <a:pPr>
+              <a:defRPr sz="900">
                 <a:solidFill>
                   <a:srgbClr val="607D8B"/>
                 </a:solidFill>
               </a:defRPr>
             </a:pPr>
             <a:r>
-              <a:t>Rosnący udział OZE w strukturze produkcji.</a:t>
+              <a:t>Analiza i wizualizacja danych – Pandas, DataFrame  •  Merito Chorzów</a:t>
+            </a:r>
+          </a:p>
+        </p:txBody>
+      </p:sp>
+      <p:sp>
+        <p:nvSpPr>
+          <p:cNvPr id="7" name="TextBox 6"/>
+          <p:cNvSpPr txBox="1"/>
+          <p:nvPr/>
+        </p:nvSpPr>
+        <p:spPr>
+          <a:xfrm>
+            <a:off x="11094415" y="6565392"/>
+            <a:ext cx="731520" cy="256032"/>
+          </a:xfrm>
+          <a:prstGeom prst="rect">
+            <a:avLst/>
+          </a:prstGeom>
+          <a:noFill/>
+        </p:spPr>
+        <p:txBody>
+          <a:bodyPr wrap="none">
+            <a:spAutoFit/>
+          </a:bodyPr>
+          <a:lstStyle/>
+          <a:p>
+            <a:pPr algn="r">
+              <a:defRPr sz="900">
+                <a:solidFill>
+                  <a:srgbClr val="607D8B"/>
+                </a:solidFill>
+              </a:defRPr>
+            </a:pPr>
+            <a:r>
+              <a:t>7</a:t>
             </a:r>
           </a:p>
         </p:txBody>
@@ -5131,29 +12552,29 @@
         </p:nvSpPr>
         <p:spPr>
           <a:xfrm>
-            <a:off x="502920" y="201168"/>
-            <a:ext cx="10972800" cy="502920"/>
-          </a:xfrm>
-          <a:prstGeom prst="rect">
-            <a:avLst/>
-          </a:prstGeom>
-          <a:noFill/>
-        </p:spPr>
-        <p:txBody>
-          <a:bodyPr wrap="square">
-            <a:spAutoFit/>
-          </a:bodyPr>
-          <a:lstStyle/>
-          <a:p>
-            <a:pPr algn="l">
-              <a:defRPr sz="2600" b="1">
+            <a:off x="502920" y="182880"/>
+            <a:ext cx="10972800" cy="640080"/>
+          </a:xfrm>
+          <a:prstGeom prst="rect">
+            <a:avLst/>
+          </a:prstGeom>
+          <a:noFill/>
+        </p:spPr>
+        <p:txBody>
+          <a:bodyPr wrap="none">
+            <a:spAutoFit/>
+          </a:bodyPr>
+          <a:lstStyle/>
+          <a:p>
+            <a:pPr>
+              <a:defRPr sz="2800" b="1">
                 <a:solidFill>
                   <a:srgbClr val="FFFFFF"/>
                 </a:solidFill>
               </a:defRPr>
             </a:pPr>
             <a:r>
-              <a:t>Wyniki statystyczne</a:t>
+              <a:t>Pre-processing (dobre praktyki Pandas)</a:t>
             </a:r>
           </a:p>
         </p:txBody>
@@ -5166,8 +12587,8 @@
         </p:nvSpPr>
         <p:spPr>
           <a:xfrm>
-            <a:off x="777240" y="1143000"/>
-            <a:ext cx="10515600" cy="502920"/>
+            <a:off x="685800" y="1143000"/>
+            <a:ext cx="10789920" cy="502920"/>
           </a:xfrm>
           <a:prstGeom prst="rect">
             <a:avLst/>
@@ -5188,7 +12609,7 @@
               </a:defRPr>
             </a:pPr>
             <a:r>
-              <a:t>•  Średnie zużycie: 28,698 MW (σ = 4,576)</a:t>
+              <a:t>•  Wczytanie CSV z parse_dates i indeksem czasowym (UTC)</a:t>
             </a:r>
           </a:p>
         </p:txBody>
@@ -5201,8 +12622,8 @@
         </p:nvSpPr>
         <p:spPr>
           <a:xfrm>
-            <a:off x="777240" y="1618488"/>
-            <a:ext cx="10515600" cy="502920"/>
+            <a:off x="685800" y="1581912"/>
+            <a:ext cx="10789920" cy="502920"/>
           </a:xfrm>
           <a:prstGeom prst="rect">
             <a:avLst/>
@@ -5223,7 +12644,7 @@
               </a:defRPr>
             </a:pPr>
             <a:r>
-              <a:t>•  Shapiro-Wilk: p = 9.16e-06 → brak normalności (testy nieparametryczne)</a:t>
+              <a:t>•  Usunięcie kolumn w pełni pustych; uzupełnienie braków ffill/bfill</a:t>
             </a:r>
           </a:p>
         </p:txBody>
@@ -5236,8 +12657,8 @@
         </p:nvSpPr>
         <p:spPr>
           <a:xfrm>
-            <a:off x="777240" y="2093976"/>
-            <a:ext cx="10515600" cy="502920"/>
+            <a:off x="685800" y="2020824"/>
+            <a:ext cx="10789920" cy="502920"/>
           </a:xfrm>
           <a:prstGeom prst="rect">
             <a:avLst/>
@@ -5258,7 +12679,7 @@
               </a:defRPr>
             </a:pPr>
             <a:r>
-              <a:t>•  Mann-Whitney (weekend): p = 0.00e+00 → weekend istotnie niższy</a:t>
+              <a:t>•  Konwersja temperatury K → °C; agregacja pogody po timestamp</a:t>
             </a:r>
           </a:p>
         </p:txBody>
@@ -5271,8 +12692,8 @@
         </p:nvSpPr>
         <p:spPr>
           <a:xfrm>
-            <a:off x="777240" y="2569464"/>
-            <a:ext cx="10515600" cy="502920"/>
+            <a:off x="685800" y="2459736"/>
+            <a:ext cx="10789920" cy="502920"/>
           </a:xfrm>
           <a:prstGeom prst="rect">
             <a:avLst/>
@@ -5293,7 +12714,7 @@
               </a:defRPr>
             </a:pPr>
             <a:r>
-              <a:t>•  Śr. dzień roboczy: 29,425 MW  |  weekend: 26,884 MW</a:t>
+              <a:t>•  Join energia + pogoda (left join + uzupełnienie)</a:t>
             </a:r>
           </a:p>
         </p:txBody>
@@ -5306,8 +12727,8 @@
         </p:nvSpPr>
         <p:spPr>
           <a:xfrm>
-            <a:off x="777240" y="3044952"/>
-            <a:ext cx="10515600" cy="502920"/>
+            <a:off x="685800" y="2898648"/>
+            <a:ext cx="10789920" cy="502920"/>
           </a:xfrm>
           <a:prstGeom prst="rect">
             <a:avLst/>
@@ -5328,7 +12749,120 @@
               </a:defRPr>
             </a:pPr>
             <a:r>
-              <a:t>•  Korelacja zużycie–temperatura: r = 0.20</a:t>
+              <a:t>•  Feature engineering: godzina, dzień tygodnia, miesiąc, weekend, udział OZE</a:t>
+            </a:r>
+          </a:p>
+        </p:txBody>
+      </p:sp>
+      <p:sp>
+        <p:nvSpPr>
+          <p:cNvPr id="9" name="Rectangle 8"/>
+          <p:cNvSpPr/>
+          <p:nvPr/>
+        </p:nvSpPr>
+        <p:spPr>
+          <a:xfrm>
+            <a:off x="0" y="6537960"/>
+            <a:ext cx="12191695" cy="320040"/>
+          </a:xfrm>
+          <a:prstGeom prst="rect">
+            <a:avLst/>
+          </a:prstGeom>
+          <a:solidFill>
+            <a:srgbClr val="ECEFF1"/>
+          </a:solidFill>
+          <a:ln>
+            <a:noFill/>
+          </a:ln>
+        </p:spPr>
+        <p:style>
+          <a:lnRef idx="1">
+            <a:schemeClr val="accent1"/>
+          </a:lnRef>
+          <a:fillRef idx="3">
+            <a:schemeClr val="accent1"/>
+          </a:fillRef>
+          <a:effectRef idx="2">
+            <a:schemeClr val="accent1"/>
+          </a:effectRef>
+          <a:fontRef idx="minor">
+            <a:schemeClr val="lt1"/>
+          </a:fontRef>
+        </p:style>
+        <p:txBody>
+          <a:bodyPr rtlCol="0" anchor="ctr"/>
+          <a:lstStyle/>
+          <a:p>
+            <a:pPr algn="ctr"/>
+          </a:p>
+        </p:txBody>
+      </p:sp>
+      <p:sp>
+        <p:nvSpPr>
+          <p:cNvPr id="10" name="TextBox 9"/>
+          <p:cNvSpPr txBox="1"/>
+          <p:nvPr/>
+        </p:nvSpPr>
+        <p:spPr>
+          <a:xfrm>
+            <a:off x="457200" y="6565392"/>
+            <a:ext cx="7315200" cy="256032"/>
+          </a:xfrm>
+          <a:prstGeom prst="rect">
+            <a:avLst/>
+          </a:prstGeom>
+          <a:noFill/>
+        </p:spPr>
+        <p:txBody>
+          <a:bodyPr wrap="none">
+            <a:spAutoFit/>
+          </a:bodyPr>
+          <a:lstStyle/>
+          <a:p>
+            <a:pPr>
+              <a:defRPr sz="900">
+                <a:solidFill>
+                  <a:srgbClr val="607D8B"/>
+                </a:solidFill>
+              </a:defRPr>
+            </a:pPr>
+            <a:r>
+              <a:t>Analiza i wizualizacja danych – Pandas, DataFrame  •  Merito Chorzów</a:t>
+            </a:r>
+          </a:p>
+        </p:txBody>
+      </p:sp>
+      <p:sp>
+        <p:nvSpPr>
+          <p:cNvPr id="11" name="TextBox 10"/>
+          <p:cNvSpPr txBox="1"/>
+          <p:nvPr/>
+        </p:nvSpPr>
+        <p:spPr>
+          <a:xfrm>
+            <a:off x="11094415" y="6565392"/>
+            <a:ext cx="731520" cy="256032"/>
+          </a:xfrm>
+          <a:prstGeom prst="rect">
+            <a:avLst/>
+          </a:prstGeom>
+          <a:noFill/>
+        </p:spPr>
+        <p:txBody>
+          <a:bodyPr wrap="none">
+            <a:spAutoFit/>
+          </a:bodyPr>
+          <a:lstStyle/>
+          <a:p>
+            <a:pPr algn="r">
+              <a:defRPr sz="900">
+                <a:solidFill>
+                  <a:srgbClr val="607D8B"/>
+                </a:solidFill>
+              </a:defRPr>
+            </a:pPr>
+            <a:r>
+              <a:t>8</a:t>
             </a:r>
           </a:p>
         </p:txBody>
